--- a/docs/agent_knowledge_strategy.pptx
+++ b/docs/agent_knowledge_strategy.pptx
@@ -17,6 +17,8 @@
     <p:sldId id="265" r:id="rId16"/>
     <p:sldId id="266" r:id="rId17"/>
     <p:sldId id="267" r:id="rId18"/>
+    <p:sldId id="268" r:id="rId19"/>
+    <p:sldId id="269" r:id="rId20"/>
   </p:sldIdLst>
   <p:sldSz cx="12191695" cy="6858000" type="screen4x3"/>
   <p:notesSz cx="6858000" cy="9144000"/>
@@ -3209,13 +3211,13 @@
           <a:p>
             <a:pPr algn="l"/>
             <a:r>
-              <a:rPr sz="4400" b="1">
+              <a:rPr sz="4000" b="1">
                 <a:solidFill>
                   <a:srgbClr val="FFFFFF"/>
                 </a:solidFill>
                 <a:latin typeface="Calibri"/>
               </a:rPr>
-              <a:t>Skills, Scripts, and RAG</a:t>
+              <a:t>Scripts, Skills, Subagents, RAG</a:t>
             </a:r>
           </a:p>
         </p:txBody>
@@ -3285,7 +3287,7 @@
                 </a:solidFill>
                 <a:latin typeface="Calibri"/>
               </a:rPr>
-              <a:t>Three tools. Three shapes of knowledge. One pragmatic rule.</a:t>
+              <a:t>Four tools. Four shapes of knowledge. One pragmatic rule.</a:t>
             </a:r>
           </a:p>
         </p:txBody>
@@ -3320,7 +3322,7 @@
                 </a:solidFill>
                 <a:latin typeface="Calibri"/>
               </a:rPr>
-              <a:t>When to write a script, when to write a skill, when to reach for RAG.</a:t>
+              <a:t>When to write a script, a skill, a subagent — and when to reach for RAG.</a:t>
             </a:r>
           </a:p>
         </p:txBody>
@@ -3459,7 +3461,7 @@
                 </a:solidFill>
                 <a:latin typeface="Calibri"/>
               </a:rPr>
-              <a:t>Recommended Layered Architecture</a:t>
+              <a:t>Staleness — Who Notices First?</a:t>
             </a:r>
           </a:p>
         </p:txBody>
@@ -3494,7 +3496,7 @@
                 </a:solidFill>
                 <a:latin typeface="Calibri"/>
               </a:rPr>
-              <a:t>All three at once — used for what they are each best at.</a:t>
+              <a:t>How each approach behaves when the codebase changes underneath it.</a:t>
             </a:r>
           </a:p>
         </p:txBody>
@@ -3577,16 +3579,514 @@
           </a:p>
         </p:txBody>
       </p:sp>
-      <p:sp>
-        <p:nvSpPr>
-          <p:cNvPr id="7" name="Rounded Rectangle 6"/>
+      <p:graphicFrame>
+        <p:nvGraphicFramePr>
+          <p:cNvPr id="7" name="Table 6"/>
+          <p:cNvGraphicFramePr>
+            <a:graphicFrameLocks noGrp="1"/>
+          </p:cNvGraphicFramePr>
+          <p:nvPr/>
+        </p:nvGraphicFramePr>
+        <p:xfrm>
+          <a:off x="502920" y="1417320"/>
+          <a:ext cx="11155680" cy="3657600"/>
+        </p:xfrm>
+        <a:graphic>
+          <a:graphicData uri="http://schemas.openxmlformats.org/drawingml/2006/table">
+            <a:tbl>
+              <a:tblPr firstRow="1" bandRow="1">
+                <a:tableStyleId>{5C22544A-7EE6-4342-B048-85BDC9FD1C3A}</a:tableStyleId>
+              </a:tblPr>
+              <a:tblGrid>
+                <a:gridCol w="1828800"/>
+                <a:gridCol w="4023360"/>
+                <a:gridCol w="2194560"/>
+                <a:gridCol w="3108960"/>
+              </a:tblGrid>
+              <a:tr h="731520">
+                <a:tc>
+                  <a:txBody>
+                    <a:bodyPr lIns="60000" rIns="60000" tIns="40000" bIns="40000"/>
+                    <a:lstStyle/>
+                    <a:p>
+                      <a:pPr algn="l"/>
+                      <a:r>
+                        <a:rPr sz="1200" b="1">
+                          <a:solidFill>
+                            <a:srgbClr val="FFFFFF"/>
+                          </a:solidFill>
+                          <a:latin typeface="Calibri"/>
+                        </a:rPr>
+                        <a:t>Approach</a:t>
+                      </a:r>
+                    </a:p>
+                  </a:txBody>
+                  <a:tcPr>
+                    <a:solidFill>
+                      <a:srgbClr val="1F2A44"/>
+                    </a:solidFill>
+                  </a:tcPr>
+                </a:tc>
+                <a:tc>
+                  <a:txBody>
+                    <a:bodyPr lIns="60000" rIns="60000" tIns="40000" bIns="40000"/>
+                    <a:lstStyle/>
+                    <a:p>
+                      <a:pPr algn="l"/>
+                      <a:r>
+                        <a:rPr sz="1200" b="1">
+                          <a:solidFill>
+                            <a:srgbClr val="FFFFFF"/>
+                          </a:solidFill>
+                          <a:latin typeface="Calibri"/>
+                        </a:rPr>
+                        <a:t>Drift behavior</a:t>
+                      </a:r>
+                    </a:p>
+                  </a:txBody>
+                  <a:tcPr>
+                    <a:solidFill>
+                      <a:srgbClr val="1F8055"/>
+                    </a:solidFill>
+                  </a:tcPr>
+                </a:tc>
+                <a:tc>
+                  <a:txBody>
+                    <a:bodyPr lIns="60000" rIns="60000" tIns="40000" bIns="40000"/>
+                    <a:lstStyle/>
+                    <a:p>
+                      <a:pPr algn="l"/>
+                      <a:r>
+                        <a:rPr sz="1200" b="1">
+                          <a:solidFill>
+                            <a:srgbClr val="FFFFFF"/>
+                          </a:solidFill>
+                          <a:latin typeface="Calibri"/>
+                        </a:rPr>
+                        <a:t>Time to discover</a:t>
+                      </a:r>
+                    </a:p>
+                  </a:txBody>
+                  <a:tcPr>
+                    <a:solidFill>
+                      <a:srgbClr val="C26E1A"/>
+                    </a:solidFill>
+                  </a:tcPr>
+                </a:tc>
+                <a:tc>
+                  <a:txBody>
+                    <a:bodyPr lIns="60000" rIns="60000" tIns="40000" bIns="40000"/>
+                    <a:lstStyle/>
+                    <a:p>
+                      <a:pPr algn="l"/>
+                      <a:r>
+                        <a:rPr sz="1200" b="1">
+                          <a:solidFill>
+                            <a:srgbClr val="FFFFFF"/>
+                          </a:solidFill>
+                          <a:latin typeface="Calibri"/>
+                        </a:rPr>
+                        <a:t>Mitigation</a:t>
+                      </a:r>
+                    </a:p>
+                  </a:txBody>
+                  <a:tcPr>
+                    <a:solidFill>
+                      <a:srgbClr val="1B55E0"/>
+                    </a:solidFill>
+                  </a:tcPr>
+                </a:tc>
+              </a:tr>
+              <a:tr h="731520">
+                <a:tc>
+                  <a:txBody>
+                    <a:bodyPr lIns="60000" rIns="60000" tIns="30000" bIns="30000" wrap="square"/>
+                    <a:lstStyle/>
+                    <a:p>
+                      <a:pPr algn="l"/>
+                      <a:r>
+                        <a:rPr sz="1100">
+                          <a:solidFill>
+                            <a:srgbClr val="1F2A44"/>
+                          </a:solidFill>
+                          <a:latin typeface="Calibri"/>
+                        </a:rPr>
+                        <a:t>Script</a:t>
+                      </a:r>
+                    </a:p>
+                  </a:txBody>
+                  <a:tcPr>
+                    <a:solidFill>
+                      <a:srgbClr val="FFFFFF"/>
+                    </a:solidFill>
+                  </a:tcPr>
+                </a:tc>
+                <a:tc>
+                  <a:txBody>
+                    <a:bodyPr lIns="60000" rIns="60000" tIns="30000" bIns="30000" wrap="square"/>
+                    <a:lstStyle/>
+                    <a:p>
+                      <a:pPr algn="l"/>
+                      <a:r>
+                        <a:rPr sz="1100">
+                          <a:solidFill>
+                            <a:srgbClr val="1F2A44"/>
+                          </a:solidFill>
+                          <a:latin typeface="Calibri"/>
+                        </a:rPr>
+                        <a:t>Breaks loudly — exit code, test failure, type error.</a:t>
+                      </a:r>
+                    </a:p>
+                  </a:txBody>
+                  <a:tcPr>
+                    <a:solidFill>
+                      <a:srgbClr val="FFFFFF"/>
+                    </a:solidFill>
+                  </a:tcPr>
+                </a:tc>
+                <a:tc>
+                  <a:txBody>
+                    <a:bodyPr lIns="60000" rIns="60000" tIns="30000" bIns="30000" wrap="square"/>
+                    <a:lstStyle/>
+                    <a:p>
+                      <a:pPr algn="l"/>
+                      <a:r>
+                        <a:rPr sz="1100">
+                          <a:solidFill>
+                            <a:srgbClr val="1F2A44"/>
+                          </a:solidFill>
+                          <a:latin typeface="Calibri"/>
+                        </a:rPr>
+                        <a:t>Minutes (next CI run).</a:t>
+                      </a:r>
+                    </a:p>
+                  </a:txBody>
+                  <a:tcPr>
+                    <a:solidFill>
+                      <a:srgbClr val="FFFFFF"/>
+                    </a:solidFill>
+                  </a:tcPr>
+                </a:tc>
+                <a:tc>
+                  <a:txBody>
+                    <a:bodyPr lIns="60000" rIns="60000" tIns="30000" bIns="30000" wrap="square"/>
+                    <a:lstStyle/>
+                    <a:p>
+                      <a:pPr algn="l"/>
+                      <a:r>
+                        <a:rPr sz="1100">
+                          <a:solidFill>
+                            <a:srgbClr val="1F2A44"/>
+                          </a:solidFill>
+                          <a:latin typeface="Calibri"/>
+                        </a:rPr>
+                        <a:t>Already covered by your test pyramid.</a:t>
+                      </a:r>
+                    </a:p>
+                  </a:txBody>
+                  <a:tcPr>
+                    <a:solidFill>
+                      <a:srgbClr val="FFFFFF"/>
+                    </a:solidFill>
+                  </a:tcPr>
+                </a:tc>
+              </a:tr>
+              <a:tr h="731520">
+                <a:tc>
+                  <a:txBody>
+                    <a:bodyPr lIns="60000" rIns="60000" tIns="30000" bIns="30000" wrap="square"/>
+                    <a:lstStyle/>
+                    <a:p>
+                      <a:pPr algn="l"/>
+                      <a:r>
+                        <a:rPr sz="1100">
+                          <a:solidFill>
+                            <a:srgbClr val="1F2A44"/>
+                          </a:solidFill>
+                          <a:latin typeface="Calibri"/>
+                        </a:rPr>
+                        <a:t>Skill</a:t>
+                      </a:r>
+                    </a:p>
+                  </a:txBody>
+                  <a:tcPr>
+                    <a:solidFill>
+                      <a:srgbClr val="F5F7FB"/>
+                    </a:solidFill>
+                  </a:tcPr>
+                </a:tc>
+                <a:tc>
+                  <a:txBody>
+                    <a:bodyPr lIns="60000" rIns="60000" tIns="30000" bIns="30000" wrap="square"/>
+                    <a:lstStyle/>
+                    <a:p>
+                      <a:pPr algn="l"/>
+                      <a:r>
+                        <a:rPr sz="1100">
+                          <a:solidFill>
+                            <a:srgbClr val="1F2A44"/>
+                          </a:solidFill>
+                          <a:latin typeface="Calibri"/>
+                        </a:rPr>
+                        <a:t>Silent rot. Agent follows stale instructions; produces a confidently-wrong action.</a:t>
+                      </a:r>
+                    </a:p>
+                  </a:txBody>
+                  <a:tcPr>
+                    <a:solidFill>
+                      <a:srgbClr val="F5F7FB"/>
+                    </a:solidFill>
+                  </a:tcPr>
+                </a:tc>
+                <a:tc>
+                  <a:txBody>
+                    <a:bodyPr lIns="60000" rIns="60000" tIns="30000" bIns="30000" wrap="square"/>
+                    <a:lstStyle/>
+                    <a:p>
+                      <a:pPr algn="l"/>
+                      <a:r>
+                        <a:rPr sz="1100">
+                          <a:solidFill>
+                            <a:srgbClr val="1F2A44"/>
+                          </a:solidFill>
+                          <a:latin typeface="Calibri"/>
+                        </a:rPr>
+                        <a:t>Days to weeks — discovered via incident.</a:t>
+                      </a:r>
+                    </a:p>
+                  </a:txBody>
+                  <a:tcPr>
+                    <a:solidFill>
+                      <a:srgbClr val="F5F7FB"/>
+                    </a:solidFill>
+                  </a:tcPr>
+                </a:tc>
+                <a:tc>
+                  <a:txBody>
+                    <a:bodyPr lIns="60000" rIns="60000" tIns="30000" bIns="30000" wrap="square"/>
+                    <a:lstStyle/>
+                    <a:p>
+                      <a:pPr algn="l"/>
+                      <a:r>
+                        <a:rPr sz="1100">
+                          <a:solidFill>
+                            <a:srgbClr val="1F2A44"/>
+                          </a:solidFill>
+                          <a:latin typeface="Calibri"/>
+                        </a:rPr>
+                        <a:t>Link to file paths in code; CI test asserts the paths still exist.</a:t>
+                      </a:r>
+                    </a:p>
+                  </a:txBody>
+                  <a:tcPr>
+                    <a:solidFill>
+                      <a:srgbClr val="F5F7FB"/>
+                    </a:solidFill>
+                  </a:tcPr>
+                </a:tc>
+              </a:tr>
+              <a:tr h="731520">
+                <a:tc>
+                  <a:txBody>
+                    <a:bodyPr lIns="60000" rIns="60000" tIns="30000" bIns="30000" wrap="square"/>
+                    <a:lstStyle/>
+                    <a:p>
+                      <a:pPr algn="l"/>
+                      <a:r>
+                        <a:rPr sz="1100">
+                          <a:solidFill>
+                            <a:srgbClr val="1F2A44"/>
+                          </a:solidFill>
+                          <a:latin typeface="Calibri"/>
+                        </a:rPr>
+                        <a:t>Subagent</a:t>
+                      </a:r>
+                    </a:p>
+                  </a:txBody>
+                  <a:tcPr>
+                    <a:solidFill>
+                      <a:srgbClr val="FFFFFF"/>
+                    </a:solidFill>
+                  </a:tcPr>
+                </a:tc>
+                <a:tc>
+                  <a:txBody>
+                    <a:bodyPr lIns="60000" rIns="60000" tIns="30000" bIns="30000" wrap="square"/>
+                    <a:lstStyle/>
+                    <a:p>
+                      <a:pPr algn="l"/>
+                      <a:r>
+                        <a:rPr sz="1100">
+                          <a:solidFill>
+                            <a:srgbClr val="1F2A44"/>
+                          </a:solidFill>
+                          <a:latin typeface="Calibri"/>
+                        </a:rPr>
+                        <a:t>Silent rot in the system prompt + drift in tool allowlist (the real tools may have moved).</a:t>
+                      </a:r>
+                    </a:p>
+                  </a:txBody>
+                  <a:tcPr>
+                    <a:solidFill>
+                      <a:srgbClr val="FFFFFF"/>
+                    </a:solidFill>
+                  </a:tcPr>
+                </a:tc>
+                <a:tc>
+                  <a:txBody>
+                    <a:bodyPr lIns="60000" rIns="60000" tIns="30000" bIns="30000" wrap="square"/>
+                    <a:lstStyle/>
+                    <a:p>
+                      <a:pPr algn="l"/>
+                      <a:r>
+                        <a:rPr sz="1100">
+                          <a:solidFill>
+                            <a:srgbClr val="1F2A44"/>
+                          </a:solidFill>
+                          <a:latin typeface="Calibri"/>
+                        </a:rPr>
+                        <a:t>Days to weeks — same incident-driven discovery.</a:t>
+                      </a:r>
+                    </a:p>
+                  </a:txBody>
+                  <a:tcPr>
+                    <a:solidFill>
+                      <a:srgbClr val="FFFFFF"/>
+                    </a:solidFill>
+                  </a:tcPr>
+                </a:tc>
+                <a:tc>
+                  <a:txBody>
+                    <a:bodyPr lIns="60000" rIns="60000" tIns="30000" bIns="30000" wrap="square"/>
+                    <a:lstStyle/>
+                    <a:p>
+                      <a:pPr algn="l"/>
+                      <a:r>
+                        <a:rPr sz="1100">
+                          <a:solidFill>
+                            <a:srgbClr val="1F2A44"/>
+                          </a:solidFill>
+                          <a:latin typeface="Calibri"/>
+                        </a:rPr>
+                        <a:t>Same as skill, plus integration test that runs the subagent on a fixed input.</a:t>
+                      </a:r>
+                    </a:p>
+                  </a:txBody>
+                  <a:tcPr>
+                    <a:solidFill>
+                      <a:srgbClr val="FFFFFF"/>
+                    </a:solidFill>
+                  </a:tcPr>
+                </a:tc>
+              </a:tr>
+              <a:tr h="731520">
+                <a:tc>
+                  <a:txBody>
+                    <a:bodyPr lIns="60000" rIns="60000" tIns="30000" bIns="30000" wrap="square"/>
+                    <a:lstStyle/>
+                    <a:p>
+                      <a:pPr algn="l"/>
+                      <a:r>
+                        <a:rPr sz="1100">
+                          <a:solidFill>
+                            <a:srgbClr val="1F2A44"/>
+                          </a:solidFill>
+                          <a:latin typeface="Calibri"/>
+                        </a:rPr>
+                        <a:t>RAG</a:t>
+                      </a:r>
+                    </a:p>
+                  </a:txBody>
+                  <a:tcPr>
+                    <a:solidFill>
+                      <a:srgbClr val="F5F7FB"/>
+                    </a:solidFill>
+                  </a:tcPr>
+                </a:tc>
+                <a:tc>
+                  <a:txBody>
+                    <a:bodyPr lIns="60000" rIns="60000" tIns="30000" bIns="30000" wrap="square"/>
+                    <a:lstStyle/>
+                    <a:p>
+                      <a:pPr algn="l"/>
+                      <a:r>
+                        <a:rPr sz="1100">
+                          <a:solidFill>
+                            <a:srgbClr val="1F2A44"/>
+                          </a:solidFill>
+                          <a:latin typeface="Calibri"/>
+                        </a:rPr>
+                        <a:t>Silent degradation. Retrieval picks an outdated chunk; answer drifts.</a:t>
+                      </a:r>
+                    </a:p>
+                  </a:txBody>
+                  <a:tcPr>
+                    <a:solidFill>
+                      <a:srgbClr val="F5F7FB"/>
+                    </a:solidFill>
+                  </a:tcPr>
+                </a:tc>
+                <a:tc>
+                  <a:txBody>
+                    <a:bodyPr lIns="60000" rIns="60000" tIns="30000" bIns="30000" wrap="square"/>
+                    <a:lstStyle/>
+                    <a:p>
+                      <a:pPr algn="l"/>
+                      <a:r>
+                        <a:rPr sz="1100">
+                          <a:solidFill>
+                            <a:srgbClr val="1F2A44"/>
+                          </a:solidFill>
+                          <a:latin typeface="Calibri"/>
+                        </a:rPr>
+                        <a:t>Weeks to months — usually noticed via aggregate quality dip.</a:t>
+                      </a:r>
+                    </a:p>
+                  </a:txBody>
+                  <a:tcPr>
+                    <a:solidFill>
+                      <a:srgbClr val="F5F7FB"/>
+                    </a:solidFill>
+                  </a:tcPr>
+                </a:tc>
+                <a:tc>
+                  <a:txBody>
+                    <a:bodyPr lIns="60000" rIns="60000" tIns="30000" bIns="30000" wrap="square"/>
+                    <a:lstStyle/>
+                    <a:p>
+                      <a:pPr algn="l"/>
+                      <a:r>
+                        <a:rPr sz="1100">
+                          <a:solidFill>
+                            <a:srgbClr val="1F2A44"/>
+                          </a:solidFill>
+                          <a:latin typeface="Calibri"/>
+                        </a:rPr>
+                        <a:t>Indexer freshness SLO + retrieval evaluation on a fixed eval set.</a:t>
+                      </a:r>
+                    </a:p>
+                  </a:txBody>
+                  <a:tcPr>
+                    <a:solidFill>
+                      <a:srgbClr val="F5F7FB"/>
+                    </a:solidFill>
+                  </a:tcPr>
+                </a:tc>
+              </a:tr>
+            </a:tbl>
+          </a:graphicData>
+        </a:graphic>
+      </p:graphicFrame>
+      <p:sp>
+        <p:nvSpPr>
+          <p:cNvPr id="8" name="Rounded Rectangle 7"/>
           <p:cNvSpPr/>
           <p:nvPr/>
         </p:nvSpPr>
         <p:spPr>
           <a:xfrm>
-            <a:off x="502920" y="1417320"/>
-            <a:ext cx="3703320" cy="4023360"/>
+            <a:off x="502920" y="5349240"/>
+            <a:ext cx="11155680" cy="914400"/>
           </a:xfrm>
           <a:prstGeom prst="roundRect">
             <a:avLst/>
@@ -3594,7 +4094,7 @@
           <a:solidFill>
             <a:srgbClr val="E9F5EE"/>
           </a:solidFill>
-          <a:ln w="15875">
+          <a:ln w="12700">
             <a:solidFill>
               <a:srgbClr val="1F8055"/>
             </a:solidFill>
@@ -3624,14 +4124,14 @@
       </p:sp>
       <p:sp>
         <p:nvSpPr>
-          <p:cNvPr id="8" name="TextBox 7"/>
+          <p:cNvPr id="9" name="TextBox 8"/>
           <p:cNvSpPr txBox="1"/>
           <p:nvPr/>
         </p:nvSpPr>
         <p:spPr>
           <a:xfrm>
-            <a:off x="667512" y="1527048"/>
-            <a:ext cx="3429000" cy="365760"/>
+            <a:off x="777240" y="5440680"/>
+            <a:ext cx="10607040" cy="365760"/>
           </a:xfrm>
           <a:prstGeom prst="rect">
             <a:avLst/>
@@ -3646,223 +4146,27 @@
           <a:p>
             <a:pPr algn="l"/>
             <a:r>
-              <a:rPr sz="1500" b="1">
+              <a:rPr sz="1400" b="1">
                 <a:solidFill>
                   <a:srgbClr val="1F8055"/>
                 </a:solidFill>
                 <a:latin typeface="Calibri"/>
               </a:rPr>
-              <a:t>Operational layer</a:t>
-            </a:r>
-          </a:p>
-        </p:txBody>
-      </p:sp>
-      <p:sp>
-        <p:nvSpPr>
-          <p:cNvPr id="9" name="TextBox 8"/>
+              <a:t>Why scripts win the staleness game</a:t>
+            </a:r>
+          </a:p>
+        </p:txBody>
+      </p:sp>
+      <p:sp>
+        <p:nvSpPr>
+          <p:cNvPr id="10" name="TextBox 9"/>
           <p:cNvSpPr txBox="1"/>
           <p:nvPr/>
         </p:nvSpPr>
         <p:spPr>
           <a:xfrm>
-            <a:off x="667512" y="1920240"/>
-            <a:ext cx="3429000" cy="3383280"/>
-          </a:xfrm>
-          <a:prstGeom prst="rect">
-            <a:avLst/>
-          </a:prstGeom>
-          <a:noFill/>
-        </p:spPr>
-        <p:txBody>
-          <a:bodyPr wrap="square" lIns="0" rIns="0" tIns="0" bIns="0">
-            <a:spAutoFit/>
-          </a:bodyPr>
-          <a:lstStyle/>
-          <a:p>
-            <a:pPr algn="l">
-              <a:spcAft>
-                <a:spcPts val="500"/>
-              </a:spcAft>
-            </a:pPr>
-            <a:r>
-              <a:rPr sz="1200">
-                <a:solidFill>
-                  <a:srgbClr val="1F2A44"/>
-                </a:solidFill>
-                <a:latin typeface="Calibri"/>
-              </a:rPr>
-              <a:t>•  Scripts you commit and run.</a:t>
-            </a:r>
-          </a:p>
-          <a:p>
-            <a:pPr algn="l">
-              <a:spcAft>
-                <a:spcPts val="500"/>
-              </a:spcAft>
-            </a:pPr>
-            <a:r>
-              <a:rPr sz="1200">
-                <a:solidFill>
-                  <a:srgbClr val="1F2A44"/>
-                </a:solidFill>
-                <a:latin typeface="Calibri"/>
-              </a:rPr>
-              <a:t>•  Deploys, migrations, seeds.</a:t>
-            </a:r>
-          </a:p>
-          <a:p>
-            <a:pPr algn="l">
-              <a:spcAft>
-                <a:spcPts val="500"/>
-              </a:spcAft>
-            </a:pPr>
-            <a:r>
-              <a:rPr sz="1200">
-                <a:solidFill>
-                  <a:srgbClr val="1F2A44"/>
-                </a:solidFill>
-                <a:latin typeface="Calibri"/>
-              </a:rPr>
-              <a:t>•  Validation harnesses.</a:t>
-            </a:r>
-          </a:p>
-          <a:p>
-            <a:pPr algn="l">
-              <a:spcAft>
-                <a:spcPts val="500"/>
-              </a:spcAft>
-            </a:pPr>
-            <a:r>
-              <a:rPr sz="1200">
-                <a:solidFill>
-                  <a:srgbClr val="1F2A44"/>
-                </a:solidFill>
-                <a:latin typeface="Calibri"/>
-              </a:rPr>
-              <a:t>•  Cron / scheduled jobs.</a:t>
-            </a:r>
-          </a:p>
-          <a:p>
-            <a:pPr algn="l">
-              <a:spcAft>
-                <a:spcPts val="500"/>
-              </a:spcAft>
-            </a:pPr>
-            <a:r>
-              <a:rPr sz="1200">
-                <a:solidFill>
-                  <a:srgbClr val="1F2A44"/>
-                </a:solidFill>
-                <a:latin typeface="Calibri"/>
-              </a:rPr>
-              <a:t>•  —</a:t>
-            </a:r>
-          </a:p>
-          <a:p>
-            <a:pPr algn="l">
-              <a:spcAft>
-                <a:spcPts val="500"/>
-              </a:spcAft>
-            </a:pPr>
-            <a:r>
-              <a:rPr sz="1200">
-                <a:solidFill>
-                  <a:srgbClr val="1F2A44"/>
-                </a:solidFill>
-                <a:latin typeface="Calibri"/>
-              </a:rPr>
-              <a:t>•  Drift surface: CI / tests.</a:t>
-            </a:r>
-          </a:p>
-          <a:p>
-            <a:pPr algn="l">
-              <a:spcAft>
-                <a:spcPts val="500"/>
-              </a:spcAft>
-            </a:pPr>
-            <a:r>
-              <a:rPr sz="1200">
-                <a:solidFill>
-                  <a:srgbClr val="1F2A44"/>
-                </a:solidFill>
-                <a:latin typeface="Calibri"/>
-              </a:rPr>
-              <a:t>•  Owner: the engineer.</a:t>
-            </a:r>
-          </a:p>
-          <a:p>
-            <a:pPr algn="l">
-              <a:spcAft>
-                <a:spcPts val="500"/>
-              </a:spcAft>
-            </a:pPr>
-            <a:r>
-              <a:rPr sz="1200">
-                <a:solidFill>
-                  <a:srgbClr val="1F2A44"/>
-                </a:solidFill>
-                <a:latin typeface="Calibri"/>
-              </a:rPr>
-              <a:t>•  Default tool: code.</a:t>
-            </a:r>
-          </a:p>
-        </p:txBody>
-      </p:sp>
-      <p:sp>
-        <p:nvSpPr>
-          <p:cNvPr id="10" name="Rounded Rectangle 9"/>
-          <p:cNvSpPr/>
-          <p:nvPr/>
-        </p:nvSpPr>
-        <p:spPr>
-          <a:xfrm>
-            <a:off x="4297680" y="1417320"/>
-            <a:ext cx="3703320" cy="4023360"/>
-          </a:xfrm>
-          <a:prstGeom prst="roundRect">
-            <a:avLst/>
-          </a:prstGeom>
-          <a:solidFill>
-            <a:srgbClr val="FBF1E2"/>
-          </a:solidFill>
-          <a:ln w="15875">
-            <a:solidFill>
-              <a:srgbClr val="C26E1A"/>
-            </a:solidFill>
-          </a:ln>
-        </p:spPr>
-        <p:style>
-          <a:lnRef idx="1">
-            <a:schemeClr val="accent1"/>
-          </a:lnRef>
-          <a:fillRef idx="3">
-            <a:schemeClr val="accent1"/>
-          </a:fillRef>
-          <a:effectRef idx="2">
-            <a:schemeClr val="accent1"/>
-          </a:effectRef>
-          <a:fontRef idx="minor">
-            <a:schemeClr val="lt1"/>
-          </a:fontRef>
-        </p:style>
-        <p:txBody>
-          <a:bodyPr rtlCol="0" anchor="ctr"/>
-          <a:lstStyle/>
-          <a:p>
-            <a:pPr algn="ctr"/>
-          </a:p>
-        </p:txBody>
-      </p:sp>
-      <p:sp>
-        <p:nvSpPr>
-          <p:cNvPr id="11" name="TextBox 10"/>
-          <p:cNvSpPr txBox="1"/>
-          <p:nvPr/>
-        </p:nvSpPr>
-        <p:spPr>
-          <a:xfrm>
-            <a:off x="4462272" y="1527048"/>
-            <a:ext cx="3429000" cy="365760"/>
+            <a:off x="777240" y="5806440"/>
+            <a:ext cx="10607040" cy="457200"/>
           </a:xfrm>
           <a:prstGeom prst="rect">
             <a:avLst/>
@@ -3877,475 +4181,13 @@
           <a:p>
             <a:pPr algn="l"/>
             <a:r>
-              <a:rPr sz="1500" b="1">
-                <a:solidFill>
-                  <a:srgbClr val="C26E1A"/>
-                </a:solidFill>
-                <a:latin typeface="Calibri"/>
-              </a:rPr>
-              <a:t>Judgment layer</a:t>
-            </a:r>
-          </a:p>
-        </p:txBody>
-      </p:sp>
-      <p:sp>
-        <p:nvSpPr>
-          <p:cNvPr id="12" name="TextBox 11"/>
-          <p:cNvSpPr txBox="1"/>
-          <p:nvPr/>
-        </p:nvSpPr>
-        <p:spPr>
-          <a:xfrm>
-            <a:off x="4462272" y="1920240"/>
-            <a:ext cx="3429000" cy="3383280"/>
-          </a:xfrm>
-          <a:prstGeom prst="rect">
-            <a:avLst/>
-          </a:prstGeom>
-          <a:noFill/>
-        </p:spPr>
-        <p:txBody>
-          <a:bodyPr wrap="square" lIns="0" rIns="0" tIns="0" bIns="0">
-            <a:spAutoFit/>
-          </a:bodyPr>
-          <a:lstStyle/>
-          <a:p>
-            <a:pPr algn="l">
-              <a:spcAft>
-                <a:spcPts val="500"/>
-              </a:spcAft>
-            </a:pPr>
-            <a:r>
-              <a:rPr sz="1200">
+              <a:rPr sz="1300" b="0">
                 <a:solidFill>
                   <a:srgbClr val="1F2A44"/>
                 </a:solidFill>
                 <a:latin typeface="Calibri"/>
               </a:rPr>
-              <a:t>•  Skills the agent invokes.</a:t>
-            </a:r>
-          </a:p>
-          <a:p>
-            <a:pPr algn="l">
-              <a:spcAft>
-                <a:spcPts val="500"/>
-              </a:spcAft>
-            </a:pPr>
-            <a:r>
-              <a:rPr sz="1200">
-                <a:solidFill>
-                  <a:srgbClr val="1F2A44"/>
-                </a:solidFill>
-                <a:latin typeface="Calibri"/>
-              </a:rPr>
-              <a:t>•  Code review patterns.</a:t>
-            </a:r>
-          </a:p>
-          <a:p>
-            <a:pPr algn="l">
-              <a:spcAft>
-                <a:spcPts val="500"/>
-              </a:spcAft>
-            </a:pPr>
-            <a:r>
-              <a:rPr sz="1200">
-                <a:solidFill>
-                  <a:srgbClr val="1F2A44"/>
-                </a:solidFill>
-                <a:latin typeface="Calibri"/>
-              </a:rPr>
-              <a:t>•  Refactor scoping rubrics.</a:t>
-            </a:r>
-          </a:p>
-          <a:p>
-            <a:pPr algn="l">
-              <a:spcAft>
-                <a:spcPts val="500"/>
-              </a:spcAft>
-            </a:pPr>
-            <a:r>
-              <a:rPr sz="1200">
-                <a:solidFill>
-                  <a:srgbClr val="1F2A44"/>
-                </a:solidFill>
-                <a:latin typeface="Calibri"/>
-              </a:rPr>
-              <a:t>•  Design-tradeoff playbooks.</a:t>
-            </a:r>
-          </a:p>
-          <a:p>
-            <a:pPr algn="l">
-              <a:spcAft>
-                <a:spcPts val="500"/>
-              </a:spcAft>
-            </a:pPr>
-            <a:r>
-              <a:rPr sz="1200">
-                <a:solidFill>
-                  <a:srgbClr val="1F2A44"/>
-                </a:solidFill>
-                <a:latin typeface="Calibri"/>
-              </a:rPr>
-              <a:t>•  —</a:t>
-            </a:r>
-          </a:p>
-          <a:p>
-            <a:pPr algn="l">
-              <a:spcAft>
-                <a:spcPts val="500"/>
-              </a:spcAft>
-            </a:pPr>
-            <a:r>
-              <a:rPr sz="1200">
-                <a:solidFill>
-                  <a:srgbClr val="1F2A44"/>
-                </a:solidFill>
-                <a:latin typeface="Calibri"/>
-              </a:rPr>
-              <a:t>•  Drift surface: linked-path tests.</a:t>
-            </a:r>
-          </a:p>
-          <a:p>
-            <a:pPr algn="l">
-              <a:spcAft>
-                <a:spcPts val="500"/>
-              </a:spcAft>
-            </a:pPr>
-            <a:r>
-              <a:rPr sz="1200">
-                <a:solidFill>
-                  <a:srgbClr val="1F2A44"/>
-                </a:solidFill>
-                <a:latin typeface="Calibri"/>
-              </a:rPr>
-              <a:t>•  Owner: the team that writes them.</a:t>
-            </a:r>
-          </a:p>
-          <a:p>
-            <a:pPr algn="l">
-              <a:spcAft>
-                <a:spcPts val="500"/>
-              </a:spcAft>
-            </a:pPr>
-            <a:r>
-              <a:rPr sz="1200">
-                <a:solidFill>
-                  <a:srgbClr val="1F2A44"/>
-                </a:solidFill>
-                <a:latin typeface="Calibri"/>
-              </a:rPr>
-              <a:t>•  Default tool: markdown + tests.</a:t>
-            </a:r>
-          </a:p>
-        </p:txBody>
-      </p:sp>
-      <p:sp>
-        <p:nvSpPr>
-          <p:cNvPr id="13" name="Rounded Rectangle 12"/>
-          <p:cNvSpPr/>
-          <p:nvPr/>
-        </p:nvSpPr>
-        <p:spPr>
-          <a:xfrm>
-            <a:off x="8092440" y="1417320"/>
-            <a:ext cx="3566160" cy="4023360"/>
-          </a:xfrm>
-          <a:prstGeom prst="roundRect">
-            <a:avLst/>
-          </a:prstGeom>
-          <a:solidFill>
-            <a:srgbClr val="ECF3FF"/>
-          </a:solidFill>
-          <a:ln w="15875">
-            <a:solidFill>
-              <a:srgbClr val="1B55E0"/>
-            </a:solidFill>
-          </a:ln>
-        </p:spPr>
-        <p:style>
-          <a:lnRef idx="1">
-            <a:schemeClr val="accent1"/>
-          </a:lnRef>
-          <a:fillRef idx="3">
-            <a:schemeClr val="accent1"/>
-          </a:fillRef>
-          <a:effectRef idx="2">
-            <a:schemeClr val="accent1"/>
-          </a:effectRef>
-          <a:fontRef idx="minor">
-            <a:schemeClr val="lt1"/>
-          </a:fontRef>
-        </p:style>
-        <p:txBody>
-          <a:bodyPr rtlCol="0" anchor="ctr"/>
-          <a:lstStyle/>
-          <a:p>
-            <a:pPr algn="ctr"/>
-          </a:p>
-        </p:txBody>
-      </p:sp>
-      <p:sp>
-        <p:nvSpPr>
-          <p:cNvPr id="14" name="TextBox 13"/>
-          <p:cNvSpPr txBox="1"/>
-          <p:nvPr/>
-        </p:nvSpPr>
-        <p:spPr>
-          <a:xfrm>
-            <a:off x="8257032" y="1527048"/>
-            <a:ext cx="3291840" cy="365760"/>
-          </a:xfrm>
-          <a:prstGeom prst="rect">
-            <a:avLst/>
-          </a:prstGeom>
-          <a:noFill/>
-        </p:spPr>
-        <p:txBody>
-          <a:bodyPr wrap="square" anchor="t" lIns="0" rIns="0" tIns="0" bIns="0">
-            <a:spAutoFit/>
-          </a:bodyPr>
-          <a:lstStyle/>
-          <a:p>
-            <a:pPr algn="l"/>
-            <a:r>
-              <a:rPr sz="1500" b="1">
-                <a:solidFill>
-                  <a:srgbClr val="1B55E0"/>
-                </a:solidFill>
-                <a:latin typeface="Calibri"/>
-              </a:rPr>
-              <a:t>Volatile-knowledge layer</a:t>
-            </a:r>
-          </a:p>
-        </p:txBody>
-      </p:sp>
-      <p:sp>
-        <p:nvSpPr>
-          <p:cNvPr id="15" name="TextBox 14"/>
-          <p:cNvSpPr txBox="1"/>
-          <p:nvPr/>
-        </p:nvSpPr>
-        <p:spPr>
-          <a:xfrm>
-            <a:off x="8257032" y="1920240"/>
-            <a:ext cx="3291840" cy="3383280"/>
-          </a:xfrm>
-          <a:prstGeom prst="rect">
-            <a:avLst/>
-          </a:prstGeom>
-          <a:noFill/>
-        </p:spPr>
-        <p:txBody>
-          <a:bodyPr wrap="square" lIns="0" rIns="0" tIns="0" bIns="0">
-            <a:spAutoFit/>
-          </a:bodyPr>
-          <a:lstStyle/>
-          <a:p>
-            <a:pPr algn="l">
-              <a:spcAft>
-                <a:spcPts val="500"/>
-              </a:spcAft>
-            </a:pPr>
-            <a:r>
-              <a:rPr sz="1200">
-                <a:solidFill>
-                  <a:srgbClr val="1F2A44"/>
-                </a:solidFill>
-                <a:latin typeface="Calibri"/>
-              </a:rPr>
-              <a:t>•  RAG / knowledge graph / catalog.</a:t>
-            </a:r>
-          </a:p>
-          <a:p>
-            <a:pPr algn="l">
-              <a:spcAft>
-                <a:spcPts val="500"/>
-              </a:spcAft>
-            </a:pPr>
-            <a:r>
-              <a:rPr sz="1200">
-                <a:solidFill>
-                  <a:srgbClr val="1F2A44"/>
-                </a:solidFill>
-                <a:latin typeface="Calibri"/>
-              </a:rPr>
-              <a:t>•  ADRs, runbooks, incidents.</a:t>
-            </a:r>
-          </a:p>
-          <a:p>
-            <a:pPr algn="l">
-              <a:spcAft>
-                <a:spcPts val="500"/>
-              </a:spcAft>
-            </a:pPr>
-            <a:r>
-              <a:rPr sz="1200">
-                <a:solidFill>
-                  <a:srgbClr val="1F2A44"/>
-                </a:solidFill>
-                <a:latin typeface="Calibri"/>
-              </a:rPr>
-              <a:t>•  Live ontology + bindings.</a:t>
-            </a:r>
-          </a:p>
-          <a:p>
-            <a:pPr algn="l">
-              <a:spcAft>
-                <a:spcPts val="500"/>
-              </a:spcAft>
-            </a:pPr>
-            <a:r>
-              <a:rPr sz="1200">
-                <a:solidFill>
-                  <a:srgbClr val="1F2A44"/>
-                </a:solidFill>
-                <a:latin typeface="Calibri"/>
-              </a:rPr>
-              <a:t>•  Customer / domain corpora.</a:t>
-            </a:r>
-          </a:p>
-          <a:p>
-            <a:pPr algn="l">
-              <a:spcAft>
-                <a:spcPts val="500"/>
-              </a:spcAft>
-            </a:pPr>
-            <a:r>
-              <a:rPr sz="1200">
-                <a:solidFill>
-                  <a:srgbClr val="1F2A44"/>
-                </a:solidFill>
-                <a:latin typeface="Calibri"/>
-              </a:rPr>
-              <a:t>•  —</a:t>
-            </a:r>
-          </a:p>
-          <a:p>
-            <a:pPr algn="l">
-              <a:spcAft>
-                <a:spcPts val="500"/>
-              </a:spcAft>
-            </a:pPr>
-            <a:r>
-              <a:rPr sz="1200">
-                <a:solidFill>
-                  <a:srgbClr val="1F2A44"/>
-                </a:solidFill>
-                <a:latin typeface="Calibri"/>
-              </a:rPr>
-              <a:t>•  Drift surface: indexer SLO + eval set.</a:t>
-            </a:r>
-          </a:p>
-          <a:p>
-            <a:pPr algn="l">
-              <a:spcAft>
-                <a:spcPts val="500"/>
-              </a:spcAft>
-            </a:pPr>
-            <a:r>
-              <a:rPr sz="1200">
-                <a:solidFill>
-                  <a:srgbClr val="1F2A44"/>
-                </a:solidFill>
-                <a:latin typeface="Calibri"/>
-              </a:rPr>
-              <a:t>•  Owner: a data team.</a:t>
-            </a:r>
-          </a:p>
-          <a:p>
-            <a:pPr algn="l">
-              <a:spcAft>
-                <a:spcPts val="500"/>
-              </a:spcAft>
-            </a:pPr>
-            <a:r>
-              <a:rPr sz="1200">
-                <a:solidFill>
-                  <a:srgbClr val="1F2A44"/>
-                </a:solidFill>
-                <a:latin typeface="Calibri"/>
-              </a:rPr>
-              <a:t>•  Default tool: query, not encode.</a:t>
-            </a:r>
-          </a:p>
-        </p:txBody>
-      </p:sp>
-      <p:sp>
-        <p:nvSpPr>
-          <p:cNvPr id="16" name="Rounded Rectangle 15"/>
-          <p:cNvSpPr/>
-          <p:nvPr/>
-        </p:nvSpPr>
-        <p:spPr>
-          <a:xfrm>
-            <a:off x="502920" y="5623560"/>
-            <a:ext cx="11155680" cy="594360"/>
-          </a:xfrm>
-          <a:prstGeom prst="roundRect">
-            <a:avLst/>
-          </a:prstGeom>
-          <a:solidFill>
-            <a:srgbClr val="ECF3FF"/>
-          </a:solidFill>
-          <a:ln w="12700">
-            <a:solidFill>
-              <a:srgbClr val="1B55E0"/>
-            </a:solidFill>
-          </a:ln>
-        </p:spPr>
-        <p:style>
-          <a:lnRef idx="1">
-            <a:schemeClr val="accent1"/>
-          </a:lnRef>
-          <a:fillRef idx="3">
-            <a:schemeClr val="accent1"/>
-          </a:fillRef>
-          <a:effectRef idx="2">
-            <a:schemeClr val="accent1"/>
-          </a:effectRef>
-          <a:fontRef idx="minor">
-            <a:schemeClr val="lt1"/>
-          </a:fontRef>
-        </p:style>
-        <p:txBody>
-          <a:bodyPr rtlCol="0" anchor="ctr"/>
-          <a:lstStyle/>
-          <a:p>
-            <a:pPr algn="ctr"/>
-          </a:p>
-        </p:txBody>
-      </p:sp>
-      <p:sp>
-        <p:nvSpPr>
-          <p:cNvPr id="17" name="TextBox 16"/>
-          <p:cNvSpPr txBox="1"/>
-          <p:nvPr/>
-        </p:nvSpPr>
-        <p:spPr>
-          <a:xfrm>
-            <a:off x="777240" y="5715000"/>
-            <a:ext cx="10607040" cy="457200"/>
-          </a:xfrm>
-          <a:prstGeom prst="rect">
-            <a:avLst/>
-          </a:prstGeom>
-          <a:noFill/>
-        </p:spPr>
-        <p:txBody>
-          <a:bodyPr wrap="square" anchor="t" lIns="0" rIns="0" tIns="0" bIns="0">
-            <a:spAutoFit/>
-          </a:bodyPr>
-          <a:lstStyle/>
-          <a:p>
-            <a:pPr algn="l"/>
-            <a:r>
-              <a:rPr sz="1300" b="1">
-                <a:solidFill>
-                  <a:srgbClr val="1440A8"/>
-                </a:solidFill>
-                <a:latin typeface="Calibri"/>
-              </a:rPr>
-              <a:t>PMOS today already does this — scripts in /scripts, ontology in Neo4j, RAG in Qdrant. The trap is letting the skill layer sprawl into the others.</a:t>
+              <a:t>Loud failure beats silent rot. A script that breaks in CI is a feature — drift becomes a build error, not a production incident.</a:t>
             </a:r>
           </a:p>
         </p:txBody>
@@ -4449,7 +4291,7 @@
                 </a:solidFill>
                 <a:latin typeface="Calibri"/>
               </a:rPr>
-              <a:t>Anti-Patterns to Avoid</a:t>
+              <a:t>Determinism vs. Probabilistic Retrieval</a:t>
             </a:r>
           </a:p>
         </p:txBody>
@@ -4484,7 +4326,7 @@
                 </a:solidFill>
                 <a:latin typeface="Calibri"/>
               </a:rPr>
-              <a:t>The four ways teams over-spend on the wrong layer.</a:t>
+              <a:t>Stacking ranks — least probabilistic to most. Fewer flips = fewer surprises.</a:t>
             </a:r>
           </a:p>
         </p:txBody>
@@ -4576,8 +4418,8 @@
           <p:nvPr/>
         </p:nvGraphicFramePr>
         <p:xfrm>
-          <a:off x="502920" y="1463040"/>
-          <a:ext cx="11155680" cy="4206240"/>
+          <a:off x="502920" y="1417320"/>
+          <a:ext cx="11155680" cy="3291840"/>
         </p:xfrm>
         <a:graphic>
           <a:graphicData uri="http://schemas.openxmlformats.org/drawingml/2006/table">
@@ -4586,11 +4428,11 @@
                 <a:tableStyleId>{5C22544A-7EE6-4342-B048-85BDC9FD1C3A}</a:tableStyleId>
               </a:tblPr>
               <a:tblGrid>
-                <a:gridCol w="2377440"/>
-                <a:gridCol w="4937760"/>
-                <a:gridCol w="3840480"/>
+                <a:gridCol w="1828800"/>
+                <a:gridCol w="5120640"/>
+                <a:gridCol w="4206240"/>
               </a:tblGrid>
-              <a:tr h="841248">
+              <a:tr h="658368">
                 <a:tc>
                   <a:txBody>
                     <a:bodyPr lIns="60000" rIns="60000" tIns="40000" bIns="40000"/>
@@ -4598,13 +4440,13 @@
                     <a:p>
                       <a:pPr algn="l"/>
                       <a:r>
-                        <a:rPr sz="1300" b="1">
+                        <a:rPr sz="1200" b="1">
                           <a:solidFill>
                             <a:srgbClr val="FFFFFF"/>
                           </a:solidFill>
                           <a:latin typeface="Calibri"/>
                         </a:rPr>
-                        <a:t>Anti-pattern</a:t>
+                        <a:t>Approach</a:t>
                       </a:r>
                     </a:p>
                   </a:txBody>
@@ -4621,19 +4463,19 @@
                     <a:p>
                       <a:pPr algn="l"/>
                       <a:r>
-                        <a:rPr sz="1300" b="1">
+                        <a:rPr sz="1200" b="1">
                           <a:solidFill>
                             <a:srgbClr val="FFFFFF"/>
                           </a:solidFill>
                           <a:latin typeface="Calibri"/>
                         </a:rPr>
-                        <a:t>What it looks like</a:t>
+                        <a:t>Where probability enters</a:t>
                       </a:r>
                     </a:p>
                   </a:txBody>
                   <a:tcPr>
                     <a:solidFill>
-                      <a:srgbClr val="1F2A44"/>
+                      <a:srgbClr val="1F8055"/>
                     </a:solidFill>
                   </a:tcPr>
                 </a:tc>
@@ -4644,24 +4486,24 @@
                     <a:p>
                       <a:pPr algn="l"/>
                       <a:r>
-                        <a:rPr sz="1300" b="1">
+                        <a:rPr sz="1200" b="1">
                           <a:solidFill>
                             <a:srgbClr val="FFFFFF"/>
                           </a:solidFill>
                           <a:latin typeface="Calibri"/>
                         </a:rPr>
-                        <a:t>What to do instead</a:t>
+                        <a:t>What is fixed once chosen</a:t>
                       </a:r>
                     </a:p>
                   </a:txBody>
                   <a:tcPr>
                     <a:solidFill>
-                      <a:srgbClr val="1F2A44"/>
+                      <a:srgbClr val="C26E1A"/>
                     </a:solidFill>
                   </a:tcPr>
                 </a:tc>
               </a:tr>
-              <a:tr h="841248">
+              <a:tr h="658368">
                 <a:tc>
                   <a:txBody>
                     <a:bodyPr lIns="60000" rIns="60000" tIns="30000" bIns="30000" wrap="square"/>
@@ -4669,13 +4511,13 @@
                     <a:p>
                       <a:pPr algn="l"/>
                       <a:r>
-                        <a:rPr sz="1200">
+                        <a:rPr sz="1100">
                           <a:solidFill>
                             <a:srgbClr val="1F2A44"/>
                           </a:solidFill>
                           <a:latin typeface="Calibri"/>
                         </a:rPr>
-                        <a:t>Skill-for-everything</a:t>
+                        <a:t>Script</a:t>
                       </a:r>
                     </a:p>
                   </a:txBody>
@@ -4692,13 +4534,13 @@
                     <a:p>
                       <a:pPr algn="l"/>
                       <a:r>
-                        <a:rPr sz="1200">
+                        <a:rPr sz="1100">
                           <a:solidFill>
                             <a:srgbClr val="1F2A44"/>
                           </a:solidFill>
                           <a:latin typeface="Calibri"/>
                         </a:rPr>
-                        <a:t>A markdown for "how to deploy," "how to run tests," "how to seed data."</a:t>
+                        <a:t>Nowhere — fully deterministic.</a:t>
                       </a:r>
                     </a:p>
                   </a:txBody>
@@ -4715,13 +4557,13 @@
                     <a:p>
                       <a:pPr algn="l"/>
                       <a:r>
-                        <a:rPr sz="1200">
+                        <a:rPr sz="1100">
                           <a:solidFill>
                             <a:srgbClr val="1F2A44"/>
                           </a:solidFill>
                           <a:latin typeface="Calibri"/>
                         </a:rPr>
-                        <a:t>Write the script. The skill, if needed, just says "run scripts/X."</a:t>
+                        <a:t>Everything.</a:t>
                       </a:r>
                     </a:p>
                   </a:txBody>
@@ -4732,7 +4574,7 @@
                   </a:tcPr>
                 </a:tc>
               </a:tr>
-              <a:tr h="841248">
+              <a:tr h="658368">
                 <a:tc>
                   <a:txBody>
                     <a:bodyPr lIns="60000" rIns="60000" tIns="30000" bIns="30000" wrap="square"/>
@@ -4740,13 +4582,13 @@
                     <a:p>
                       <a:pPr algn="l"/>
                       <a:r>
-                        <a:rPr sz="1200">
+                        <a:rPr sz="1100">
                           <a:solidFill>
                             <a:srgbClr val="1F2A44"/>
                           </a:solidFill>
                           <a:latin typeface="Calibri"/>
                         </a:rPr>
-                        <a:t>Confluence-as-a-skill</a:t>
+                        <a:t>Skill</a:t>
                       </a:r>
                     </a:p>
                   </a:txBody>
@@ -4763,13 +4605,13 @@
                     <a:p>
                       <a:pPr algn="l"/>
                       <a:r>
-                        <a:rPr sz="1200">
+                        <a:rPr sz="1100">
                           <a:solidFill>
                             <a:srgbClr val="1F2A44"/>
                           </a:solidFill>
                           <a:latin typeface="Calibri"/>
                         </a:rPr>
-                        <a:t>Documentation ported into a /skills folder — no decision authority, no actions.</a:t>
+                        <a:t>Selection: agent decides whether to invoke this skill on a given query.</a:t>
                       </a:r>
                     </a:p>
                   </a:txBody>
@@ -4786,13 +4628,13 @@
                     <a:p>
                       <a:pPr algn="l"/>
                       <a:r>
-                        <a:rPr sz="1200">
+                        <a:rPr sz="1100">
                           <a:solidFill>
                             <a:srgbClr val="1F2A44"/>
                           </a:solidFill>
                           <a:latin typeface="Calibri"/>
                         </a:rPr>
-                        <a:t>Leave it as documentation. Skills are for the agent, not for humans.</a:t>
+                        <a:t>Once invoked, the skill content is fixed in the system prompt.</a:t>
                       </a:r>
                     </a:p>
                   </a:txBody>
@@ -4803,7 +4645,7 @@
                   </a:tcPr>
                 </a:tc>
               </a:tr>
-              <a:tr h="841248">
+              <a:tr h="658368">
                 <a:tc>
                   <a:txBody>
                     <a:bodyPr lIns="60000" rIns="60000" tIns="30000" bIns="30000" wrap="square"/>
@@ -4811,13 +4653,13 @@
                     <a:p>
                       <a:pPr algn="l"/>
                       <a:r>
-                        <a:rPr sz="1200">
+                        <a:rPr sz="1100">
                           <a:solidFill>
                             <a:srgbClr val="1F2A44"/>
                           </a:solidFill>
                           <a:latin typeface="Calibri"/>
                         </a:rPr>
-                        <a:t>RAG over the source code</a:t>
+                        <a:t>Subagent</a:t>
                       </a:r>
                     </a:p>
                   </a:txBody>
@@ -4834,13 +4676,13 @@
                     <a:p>
                       <a:pPr algn="l"/>
                       <a:r>
-                        <a:rPr sz="1200">
+                        <a:rPr sz="1100">
                           <a:solidFill>
                             <a:srgbClr val="1F2A44"/>
                           </a:solidFill>
                           <a:latin typeface="Calibri"/>
                         </a:rPr>
-                        <a:t>Indexing the repo to answer code questions — the IDE already does this better.</a:t>
+                        <a:t>Selection AND the subagent's own internal decisions. Two coin flips stacked.</a:t>
                       </a:r>
                     </a:p>
                   </a:txBody>
@@ -4857,13 +4699,13 @@
                     <a:p>
                       <a:pPr algn="l"/>
                       <a:r>
-                        <a:rPr sz="1200">
+                        <a:rPr sz="1100">
                           <a:solidFill>
                             <a:srgbClr val="1F2A44"/>
                           </a:solidFill>
                           <a:latin typeface="Calibri"/>
                         </a:rPr>
-                        <a:t>Use the IDE / language server. Reserve RAG for non-code corpora.</a:t>
+                        <a:t>Tool allowlist + system prompt are fixed; behavior within them is stochastic.</a:t>
                       </a:r>
                     </a:p>
                   </a:txBody>
@@ -4874,7 +4716,7 @@
                   </a:tcPr>
                 </a:tc>
               </a:tr>
-              <a:tr h="841248">
+              <a:tr h="658368">
                 <a:tc>
                   <a:txBody>
                     <a:bodyPr lIns="60000" rIns="60000" tIns="30000" bIns="30000" wrap="square"/>
@@ -4882,13 +4724,13 @@
                     <a:p>
                       <a:pPr algn="l"/>
                       <a:r>
-                        <a:rPr sz="1200">
+                        <a:rPr sz="1100">
                           <a:solidFill>
                             <a:srgbClr val="1F2A44"/>
                           </a:solidFill>
                           <a:latin typeface="Calibri"/>
                         </a:rPr>
-                        <a:t>Script-for-judgment</a:t>
+                        <a:t>RAG</a:t>
                       </a:r>
                     </a:p>
                   </a:txBody>
@@ -4905,13 +4747,13 @@
                     <a:p>
                       <a:pPr algn="l"/>
                       <a:r>
-                        <a:rPr sz="1200">
+                        <a:rPr sz="1100">
                           <a:solidFill>
                             <a:srgbClr val="1F2A44"/>
                           </a:solidFill>
                           <a:latin typeface="Calibri"/>
                         </a:rPr>
-                        <a:t>review.py that grades code with regexes; estimate.py that grades scope by file count.</a:t>
+                        <a:t>Two stages: query rewrite → retrieval ranking. Both can miss.</a:t>
                       </a:r>
                     </a:p>
                   </a:txBody>
@@ -4928,13 +4770,13 @@
                     <a:p>
                       <a:pPr algn="l"/>
                       <a:r>
-                        <a:rPr sz="1200">
+                        <a:rPr sz="1100">
                           <a:solidFill>
                             <a:srgbClr val="1F2A44"/>
                           </a:solidFill>
                           <a:latin typeface="Calibri"/>
                         </a:rPr>
-                        <a:t>Promote to a skill — the agent can apply judgment that regex cannot.</a:t>
+                        <a:t>Only the chunks actually retrieved make it in — and they may be wrong.</a:t>
                       </a:r>
                     </a:p>
                   </a:txBody>
@@ -4951,59 +4793,14 @@
       </p:graphicFrame>
       <p:sp>
         <p:nvSpPr>
-          <p:cNvPr id="8" name="Rounded Rectangle 7"/>
-          <p:cNvSpPr/>
-          <p:nvPr/>
-        </p:nvSpPr>
-        <p:spPr>
-          <a:xfrm>
-            <a:off x="502920" y="5852160"/>
-            <a:ext cx="11155680" cy="411480"/>
-          </a:xfrm>
-          <a:prstGeom prst="roundRect">
-            <a:avLst/>
-          </a:prstGeom>
-          <a:solidFill>
-            <a:srgbClr val="FEF6E6"/>
-          </a:solidFill>
-          <a:ln w="12700">
-            <a:solidFill>
-              <a:srgbClr val="C1462C"/>
-            </a:solidFill>
-          </a:ln>
-        </p:spPr>
-        <p:style>
-          <a:lnRef idx="1">
-            <a:schemeClr val="accent1"/>
-          </a:lnRef>
-          <a:fillRef idx="3">
-            <a:schemeClr val="accent1"/>
-          </a:fillRef>
-          <a:effectRef idx="2">
-            <a:schemeClr val="accent1"/>
-          </a:effectRef>
-          <a:fontRef idx="minor">
-            <a:schemeClr val="lt1"/>
-          </a:fontRef>
-        </p:style>
-        <p:txBody>
-          <a:bodyPr rtlCol="0" anchor="ctr"/>
-          <a:lstStyle/>
-          <a:p>
-            <a:pPr algn="ctr"/>
-          </a:p>
-        </p:txBody>
-      </p:sp>
-      <p:sp>
-        <p:nvSpPr>
-          <p:cNvPr id="9" name="TextBox 8"/>
+          <p:cNvPr id="8" name="TextBox 7"/>
           <p:cNvSpPr txBox="1"/>
           <p:nvPr/>
         </p:nvSpPr>
         <p:spPr>
           <a:xfrm>
-            <a:off x="777240" y="5897880"/>
-            <a:ext cx="10607040" cy="365760"/>
+            <a:off x="502920" y="4937760"/>
+            <a:ext cx="11155680" cy="365760"/>
           </a:xfrm>
           <a:prstGeom prst="rect">
             <a:avLst/>
@@ -5018,13 +4815,84 @@
           <a:p>
             <a:pPr algn="l"/>
             <a:r>
-              <a:rPr sz="1200" b="1">
-                <a:solidFill>
-                  <a:srgbClr val="C1462C"/>
-                </a:solidFill>
-                <a:latin typeface="Calibri"/>
-              </a:rPr>
-              <a:t>All four share the same root cause: picking the layer that feels easy to author rather than the one that fits the task.</a:t>
+              <a:rPr sz="1600" b="1">
+                <a:solidFill>
+                  <a:srgbClr val="1440A8"/>
+                </a:solidFill>
+                <a:latin typeface="Calibri"/>
+              </a:rPr>
+              <a:t>The counter-intuitive takeaways</a:t>
+            </a:r>
+          </a:p>
+        </p:txBody>
+      </p:sp>
+      <p:sp>
+        <p:nvSpPr>
+          <p:cNvPr id="9" name="TextBox 8"/>
+          <p:cNvSpPr txBox="1"/>
+          <p:nvPr/>
+        </p:nvSpPr>
+        <p:spPr>
+          <a:xfrm>
+            <a:off x="640080" y="5303520"/>
+            <a:ext cx="10972800" cy="1371600"/>
+          </a:xfrm>
+          <a:prstGeom prst="rect">
+            <a:avLst/>
+          </a:prstGeom>
+          <a:noFill/>
+        </p:spPr>
+        <p:txBody>
+          <a:bodyPr wrap="square" lIns="0" rIns="0" tIns="0" bIns="0">
+            <a:spAutoFit/>
+          </a:bodyPr>
+          <a:lstStyle/>
+          <a:p>
+            <a:pPr algn="l">
+              <a:spcAft>
+                <a:spcPts val="500"/>
+              </a:spcAft>
+            </a:pPr>
+            <a:r>
+              <a:rPr sz="1300">
+                <a:solidFill>
+                  <a:srgbClr val="1F2A44"/>
+                </a:solidFill>
+                <a:latin typeface="Calibri"/>
+              </a:rPr>
+              <a:t>•  RAG is more probabilistic than skills, not less. Two ranking decisions stack on top of each other.</a:t>
+            </a:r>
+          </a:p>
+          <a:p>
+            <a:pPr algn="l">
+              <a:spcAft>
+                <a:spcPts val="500"/>
+              </a:spcAft>
+            </a:pPr>
+            <a:r>
+              <a:rPr sz="1300">
+                <a:solidFill>
+                  <a:srgbClr val="1F2A44"/>
+                </a:solidFill>
+                <a:latin typeface="Calibri"/>
+              </a:rPr>
+              <a:t>•  Subagents are more probabilistic than skills, not less. The isolation is the value, not less uncertainty.</a:t>
+            </a:r>
+          </a:p>
+          <a:p>
+            <a:pPr algn="l">
+              <a:spcAft>
+                <a:spcPts val="500"/>
+              </a:spcAft>
+            </a:pPr>
+            <a:r>
+              <a:rPr sz="1300">
+                <a:solidFill>
+                  <a:srgbClr val="1F2A44"/>
+                </a:solidFill>
+                <a:latin typeface="Calibri"/>
+              </a:rPr>
+              <a:t>•  If your concern is "agent picks the wrong knowledge," the fix is fewer + sharper artifacts, not a heavier mechanism.</a:t>
             </a:r>
           </a:p>
         </p:txBody>
@@ -5128,7 +4996,7 @@
                 </a:solidFill>
                 <a:latin typeface="Calibri"/>
               </a:rPr>
-              <a:t>Recommendation</a:t>
+              <a:t>Recommended Layered Architecture</a:t>
             </a:r>
           </a:p>
         </p:txBody>
@@ -5163,7 +5031,7 @@
                 </a:solidFill>
                 <a:latin typeface="Calibri"/>
               </a:rPr>
-              <a:t>What this means for how the team writes things going forward.</a:t>
+              <a:t>All four at once — used for what they are each best at.</a:t>
             </a:r>
           </a:p>
         </p:txBody>
@@ -5248,49 +5116,14 @@
       </p:sp>
       <p:sp>
         <p:nvSpPr>
-          <p:cNvPr id="7" name="TextBox 6"/>
-          <p:cNvSpPr txBox="1"/>
-          <p:nvPr/>
-        </p:nvSpPr>
-        <p:spPr>
-          <a:xfrm>
-            <a:off x="502920" y="1325880"/>
-            <a:ext cx="11155680" cy="365760"/>
-          </a:xfrm>
-          <a:prstGeom prst="rect">
-            <a:avLst/>
-          </a:prstGeom>
-          <a:noFill/>
-        </p:spPr>
-        <p:txBody>
-          <a:bodyPr wrap="square" anchor="t" lIns="0" rIns="0" tIns="0" bIns="0">
-            <a:spAutoFit/>
-          </a:bodyPr>
-          <a:lstStyle/>
-          <a:p>
-            <a:pPr algn="l"/>
-            <a:r>
-              <a:rPr sz="1600" b="1">
-                <a:solidFill>
-                  <a:srgbClr val="1440A8"/>
-                </a:solidFill>
-                <a:latin typeface="Calibri"/>
-              </a:rPr>
-              <a:t>Default rule</a:t>
-            </a:r>
-          </a:p>
-        </p:txBody>
-      </p:sp>
-      <p:sp>
-        <p:nvSpPr>
-          <p:cNvPr id="8" name="Rounded Rectangle 7"/>
+          <p:cNvPr id="7" name="Rounded Rectangle 6"/>
           <p:cNvSpPr/>
           <p:nvPr/>
         </p:nvSpPr>
         <p:spPr>
           <a:xfrm>
-            <a:off x="502920" y="1691640"/>
-            <a:ext cx="11155680" cy="594360"/>
+            <a:off x="502920" y="1417320"/>
+            <a:ext cx="2670048" cy="4206240"/>
           </a:xfrm>
           <a:prstGeom prst="roundRect">
             <a:avLst/>
@@ -5328,14 +5161,14 @@
       </p:sp>
       <p:sp>
         <p:nvSpPr>
-          <p:cNvPr id="9" name="TextBox 8"/>
+          <p:cNvPr id="8" name="TextBox 7"/>
           <p:cNvSpPr txBox="1"/>
           <p:nvPr/>
         </p:nvSpPr>
         <p:spPr>
           <a:xfrm>
-            <a:off x="777240" y="1783080"/>
-            <a:ext cx="10607040" cy="457200"/>
+            <a:off x="667512" y="1527048"/>
+            <a:ext cx="2395728" cy="365760"/>
           </a:xfrm>
           <a:prstGeom prst="rect">
             <a:avLst/>
@@ -5352,60 +5185,25 @@
             <a:r>
               <a:rPr sz="1400" b="1">
                 <a:solidFill>
-                  <a:srgbClr val="1F2A44"/>
-                </a:solidFill>
-                <a:latin typeface="Calibri"/>
-              </a:rPr>
-              <a:t>If you can write a script, write the script. Promote to a skill only when judgment + composition is required. Push to RAG only when corpus size or volatility forces it.</a:t>
-            </a:r>
-          </a:p>
-        </p:txBody>
-      </p:sp>
-      <p:sp>
-        <p:nvSpPr>
-          <p:cNvPr id="10" name="TextBox 9"/>
+                  <a:srgbClr val="1F8055"/>
+                </a:solidFill>
+                <a:latin typeface="Calibri"/>
+              </a:rPr>
+              <a:t>Operational layer</a:t>
+            </a:r>
+          </a:p>
+        </p:txBody>
+      </p:sp>
+      <p:sp>
+        <p:nvSpPr>
+          <p:cNvPr id="9" name="TextBox 8"/>
           <p:cNvSpPr txBox="1"/>
           <p:nvPr/>
         </p:nvSpPr>
         <p:spPr>
           <a:xfrm>
-            <a:off x="502920" y="2514600"/>
-            <a:ext cx="11155680" cy="365760"/>
-          </a:xfrm>
-          <a:prstGeom prst="rect">
-            <a:avLst/>
-          </a:prstGeom>
-          <a:noFill/>
-        </p:spPr>
-        <p:txBody>
-          <a:bodyPr wrap="square" anchor="t" lIns="0" rIns="0" tIns="0" bIns="0">
-            <a:spAutoFit/>
-          </a:bodyPr>
-          <a:lstStyle/>
-          <a:p>
-            <a:pPr algn="l"/>
-            <a:r>
-              <a:rPr sz="1600" b="1">
-                <a:solidFill>
-                  <a:srgbClr val="1440A8"/>
-                </a:solidFill>
-                <a:latin typeface="Calibri"/>
-              </a:rPr>
-              <a:t>Three rules of thumb that follow from it</a:t>
-            </a:r>
-          </a:p>
-        </p:txBody>
-      </p:sp>
-      <p:sp>
-        <p:nvSpPr>
-          <p:cNvPr id="11" name="TextBox 10"/>
-          <p:cNvSpPr txBox="1"/>
-          <p:nvPr/>
-        </p:nvSpPr>
-        <p:spPr>
-          <a:xfrm>
-            <a:off x="640080" y="2880360"/>
-            <a:ext cx="10972800" cy="1828800"/>
+            <a:off x="667512" y="1920240"/>
+            <a:ext cx="2395728" cy="3566160"/>
           </a:xfrm>
           <a:prstGeom prst="rect">
             <a:avLst/>
@@ -5424,13 +5222,13 @@
               </a:spcAft>
             </a:pPr>
             <a:r>
-              <a:rPr sz="1300">
+              <a:rPr sz="1100">
                 <a:solidFill>
                   <a:srgbClr val="1F2A44"/>
                 </a:solidFill>
                 <a:latin typeface="Calibri"/>
               </a:rPr>
-              <a:t>•  Fewer skills, sharper skills. Every skill should answer "what judgment am I teaching the agent here?" — if the answer is a sequence of steps, write a script.</a:t>
+              <a:t>•  Scripts you commit + run.</a:t>
             </a:r>
           </a:p>
           <a:p>
@@ -5440,13 +5238,13 @@
               </a:spcAft>
             </a:pPr>
             <a:r>
-              <a:rPr sz="1300">
+              <a:rPr sz="1100">
                 <a:solidFill>
                   <a:srgbClr val="1F2A44"/>
                 </a:solidFill>
                 <a:latin typeface="Calibri"/>
               </a:rPr>
-              <a:t>•  Treat skills like code. Version with the repo, link to live paths, add a CI test that fails when those paths move.</a:t>
+              <a:t>•  Deploys, migrations, seeds.</a:t>
             </a:r>
           </a:p>
           <a:p>
@@ -5456,73 +5254,15 @@
               </a:spcAft>
             </a:pPr>
             <a:r>
-              <a:rPr sz="1300">
+              <a:rPr sz="1100">
                 <a:solidFill>
                   <a:srgbClr val="1F2A44"/>
                 </a:solidFill>
                 <a:latin typeface="Calibri"/>
               </a:rPr>
-              <a:t>•  RAG only when no API exists. If the data lives in a DB / catalog / graph, query it directly; RAG is the option of last resort for unstructured corpora.</a:t>
-            </a:r>
-          </a:p>
-        </p:txBody>
-      </p:sp>
-      <p:sp>
-        <p:nvSpPr>
-          <p:cNvPr id="12" name="TextBox 11"/>
-          <p:cNvSpPr txBox="1"/>
-          <p:nvPr/>
-        </p:nvSpPr>
-        <p:spPr>
-          <a:xfrm>
-            <a:off x="502920" y="4937760"/>
-            <a:ext cx="11155680" cy="365760"/>
-          </a:xfrm>
-          <a:prstGeom prst="rect">
-            <a:avLst/>
-          </a:prstGeom>
-          <a:noFill/>
-        </p:spPr>
-        <p:txBody>
-          <a:bodyPr wrap="square" anchor="t" lIns="0" rIns="0" tIns="0" bIns="0">
-            <a:spAutoFit/>
-          </a:bodyPr>
-          <a:lstStyle/>
-          <a:p>
-            <a:pPr algn="l"/>
-            <a:r>
-              <a:rPr sz="1600" b="1">
-                <a:solidFill>
-                  <a:srgbClr val="1440A8"/>
-                </a:solidFill>
-                <a:latin typeface="Calibri"/>
-              </a:rPr>
-              <a:t>What this means for our work</a:t>
-            </a:r>
-          </a:p>
-        </p:txBody>
-      </p:sp>
-      <p:sp>
-        <p:nvSpPr>
-          <p:cNvPr id="13" name="TextBox 12"/>
-          <p:cNvSpPr txBox="1"/>
-          <p:nvPr/>
-        </p:nvSpPr>
-        <p:spPr>
-          <a:xfrm>
-            <a:off x="640080" y="5303520"/>
-            <a:ext cx="10972800" cy="1371600"/>
-          </a:xfrm>
-          <a:prstGeom prst="rect">
-            <a:avLst/>
-          </a:prstGeom>
-          <a:noFill/>
-        </p:spPr>
-        <p:txBody>
-          <a:bodyPr wrap="square" lIns="0" rIns="0" tIns="0" bIns="0">
-            <a:spAutoFit/>
-          </a:bodyPr>
-          <a:lstStyle/>
+              <a:t>•  Validation harnesses.</a:t>
+            </a:r>
+          </a:p>
           <a:p>
             <a:pPr algn="l">
               <a:spcAft>
@@ -5530,13 +5270,13 @@
               </a:spcAft>
             </a:pPr>
             <a:r>
-              <a:rPr sz="1300">
+              <a:rPr sz="1100">
                 <a:solidFill>
                   <a:srgbClr val="1F2A44"/>
                 </a:solidFill>
                 <a:latin typeface="Calibri"/>
               </a:rPr>
-              <a:t>•  Audit existing skills against the rule above — most will demote to scripts or be deleted.</a:t>
+              <a:t>•  Cron / scheduled jobs.</a:t>
             </a:r>
           </a:p>
           <a:p>
@@ -5546,13 +5286,13 @@
               </a:spcAft>
             </a:pPr>
             <a:r>
-              <a:rPr sz="1300">
+              <a:rPr sz="1100">
                 <a:solidFill>
                   <a:srgbClr val="1F2A44"/>
                 </a:solidFill>
                 <a:latin typeface="Calibri"/>
               </a:rPr>
-              <a:t>•  Keep growing the script library; it is the cheapest, most durable knowledge surface.</a:t>
+              <a:t>•  —</a:t>
             </a:r>
           </a:p>
           <a:p>
@@ -5562,13 +5302,2183 @@
               </a:spcAft>
             </a:pPr>
             <a:r>
+              <a:rPr sz="1100">
+                <a:solidFill>
+                  <a:srgbClr val="1F2A44"/>
+                </a:solidFill>
+                <a:latin typeface="Calibri"/>
+              </a:rPr>
+              <a:t>•  Drift: CI / tests.</a:t>
+            </a:r>
+          </a:p>
+          <a:p>
+            <a:pPr algn="l">
+              <a:spcAft>
+                <a:spcPts val="500"/>
+              </a:spcAft>
+            </a:pPr>
+            <a:r>
+              <a:rPr sz="1100">
+                <a:solidFill>
+                  <a:srgbClr val="1F2A44"/>
+                </a:solidFill>
+                <a:latin typeface="Calibri"/>
+              </a:rPr>
+              <a:t>•  Owner: the engineer.</a:t>
+            </a:r>
+          </a:p>
+          <a:p>
+            <a:pPr algn="l">
+              <a:spcAft>
+                <a:spcPts val="500"/>
+              </a:spcAft>
+            </a:pPr>
+            <a:r>
+              <a:rPr sz="1100">
+                <a:solidFill>
+                  <a:srgbClr val="1F2A44"/>
+                </a:solidFill>
+                <a:latin typeface="Calibri"/>
+              </a:rPr>
+              <a:t>•  Default tool: code.</a:t>
+            </a:r>
+          </a:p>
+        </p:txBody>
+      </p:sp>
+      <p:sp>
+        <p:nvSpPr>
+          <p:cNvPr id="10" name="Rounded Rectangle 9"/>
+          <p:cNvSpPr/>
+          <p:nvPr/>
+        </p:nvSpPr>
+        <p:spPr>
+          <a:xfrm>
+            <a:off x="3337560" y="1417320"/>
+            <a:ext cx="2670048" cy="4206240"/>
+          </a:xfrm>
+          <a:prstGeom prst="roundRect">
+            <a:avLst/>
+          </a:prstGeom>
+          <a:solidFill>
+            <a:srgbClr val="FBF1E2"/>
+          </a:solidFill>
+          <a:ln w="15875">
+            <a:solidFill>
+              <a:srgbClr val="C26E1A"/>
+            </a:solidFill>
+          </a:ln>
+        </p:spPr>
+        <p:style>
+          <a:lnRef idx="1">
+            <a:schemeClr val="accent1"/>
+          </a:lnRef>
+          <a:fillRef idx="3">
+            <a:schemeClr val="accent1"/>
+          </a:fillRef>
+          <a:effectRef idx="2">
+            <a:schemeClr val="accent1"/>
+          </a:effectRef>
+          <a:fontRef idx="minor">
+            <a:schemeClr val="lt1"/>
+          </a:fontRef>
+        </p:style>
+        <p:txBody>
+          <a:bodyPr rtlCol="0" anchor="ctr"/>
+          <a:lstStyle/>
+          <a:p>
+            <a:pPr algn="ctr"/>
+          </a:p>
+        </p:txBody>
+      </p:sp>
+      <p:sp>
+        <p:nvSpPr>
+          <p:cNvPr id="11" name="TextBox 10"/>
+          <p:cNvSpPr txBox="1"/>
+          <p:nvPr/>
+        </p:nvSpPr>
+        <p:spPr>
+          <a:xfrm>
+            <a:off x="3502152" y="1527048"/>
+            <a:ext cx="2395728" cy="365760"/>
+          </a:xfrm>
+          <a:prstGeom prst="rect">
+            <a:avLst/>
+          </a:prstGeom>
+          <a:noFill/>
+        </p:spPr>
+        <p:txBody>
+          <a:bodyPr wrap="square" anchor="t" lIns="0" rIns="0" tIns="0" bIns="0">
+            <a:spAutoFit/>
+          </a:bodyPr>
+          <a:lstStyle/>
+          <a:p>
+            <a:pPr algn="l"/>
+            <a:r>
+              <a:rPr sz="1400" b="1">
+                <a:solidFill>
+                  <a:srgbClr val="C26E1A"/>
+                </a:solidFill>
+                <a:latin typeface="Calibri"/>
+              </a:rPr>
+              <a:t>Judgment layer</a:t>
+            </a:r>
+          </a:p>
+        </p:txBody>
+      </p:sp>
+      <p:sp>
+        <p:nvSpPr>
+          <p:cNvPr id="12" name="TextBox 11"/>
+          <p:cNvSpPr txBox="1"/>
+          <p:nvPr/>
+        </p:nvSpPr>
+        <p:spPr>
+          <a:xfrm>
+            <a:off x="3502152" y="1920240"/>
+            <a:ext cx="2395728" cy="3566160"/>
+          </a:xfrm>
+          <a:prstGeom prst="rect">
+            <a:avLst/>
+          </a:prstGeom>
+          <a:noFill/>
+        </p:spPr>
+        <p:txBody>
+          <a:bodyPr wrap="square" lIns="0" rIns="0" tIns="0" bIns="0">
+            <a:spAutoFit/>
+          </a:bodyPr>
+          <a:lstStyle/>
+          <a:p>
+            <a:pPr algn="l">
+              <a:spcAft>
+                <a:spcPts val="500"/>
+              </a:spcAft>
+            </a:pPr>
+            <a:r>
+              <a:rPr sz="1100">
+                <a:solidFill>
+                  <a:srgbClr val="1F2A44"/>
+                </a:solidFill>
+                <a:latin typeface="Calibri"/>
+              </a:rPr>
+              <a:t>•  Skills the agent invokes.</a:t>
+            </a:r>
+          </a:p>
+          <a:p>
+            <a:pPr algn="l">
+              <a:spcAft>
+                <a:spcPts val="500"/>
+              </a:spcAft>
+            </a:pPr>
+            <a:r>
+              <a:rPr sz="1100">
+                <a:solidFill>
+                  <a:srgbClr val="1F2A44"/>
+                </a:solidFill>
+                <a:latin typeface="Calibri"/>
+              </a:rPr>
+              <a:t>•  Code-review patterns.</a:t>
+            </a:r>
+          </a:p>
+          <a:p>
+            <a:pPr algn="l">
+              <a:spcAft>
+                <a:spcPts val="500"/>
+              </a:spcAft>
+            </a:pPr>
+            <a:r>
+              <a:rPr sz="1100">
+                <a:solidFill>
+                  <a:srgbClr val="1F2A44"/>
+                </a:solidFill>
+                <a:latin typeface="Calibri"/>
+              </a:rPr>
+              <a:t>•  Refactor scoping rubrics.</a:t>
+            </a:r>
+          </a:p>
+          <a:p>
+            <a:pPr algn="l">
+              <a:spcAft>
+                <a:spcPts val="500"/>
+              </a:spcAft>
+            </a:pPr>
+            <a:r>
+              <a:rPr sz="1100">
+                <a:solidFill>
+                  <a:srgbClr val="1F2A44"/>
+                </a:solidFill>
+                <a:latin typeface="Calibri"/>
+              </a:rPr>
+              <a:t>•  Design tradeoff playbooks.</a:t>
+            </a:r>
+          </a:p>
+          <a:p>
+            <a:pPr algn="l">
+              <a:spcAft>
+                <a:spcPts val="500"/>
+              </a:spcAft>
+            </a:pPr>
+            <a:r>
+              <a:rPr sz="1100">
+                <a:solidFill>
+                  <a:srgbClr val="1F2A44"/>
+                </a:solidFill>
+                <a:latin typeface="Calibri"/>
+              </a:rPr>
+              <a:t>•  —</a:t>
+            </a:r>
+          </a:p>
+          <a:p>
+            <a:pPr algn="l">
+              <a:spcAft>
+                <a:spcPts val="500"/>
+              </a:spcAft>
+            </a:pPr>
+            <a:r>
+              <a:rPr sz="1100">
+                <a:solidFill>
+                  <a:srgbClr val="1F2A44"/>
+                </a:solidFill>
+                <a:latin typeface="Calibri"/>
+              </a:rPr>
+              <a:t>•  Drift: linked-path tests.</a:t>
+            </a:r>
+          </a:p>
+          <a:p>
+            <a:pPr algn="l">
+              <a:spcAft>
+                <a:spcPts val="500"/>
+              </a:spcAft>
+            </a:pPr>
+            <a:r>
+              <a:rPr sz="1100">
+                <a:solidFill>
+                  <a:srgbClr val="1F2A44"/>
+                </a:solidFill>
+                <a:latin typeface="Calibri"/>
+              </a:rPr>
+              <a:t>•  Owner: the writing team.</a:t>
+            </a:r>
+          </a:p>
+          <a:p>
+            <a:pPr algn="l">
+              <a:spcAft>
+                <a:spcPts val="500"/>
+              </a:spcAft>
+            </a:pPr>
+            <a:r>
+              <a:rPr sz="1100">
+                <a:solidFill>
+                  <a:srgbClr val="1F2A44"/>
+                </a:solidFill>
+                <a:latin typeface="Calibri"/>
+              </a:rPr>
+              <a:t>•  Default tool: markdown.</a:t>
+            </a:r>
+          </a:p>
+        </p:txBody>
+      </p:sp>
+      <p:sp>
+        <p:nvSpPr>
+          <p:cNvPr id="13" name="Rounded Rectangle 12"/>
+          <p:cNvSpPr/>
+          <p:nvPr/>
+        </p:nvSpPr>
+        <p:spPr>
+          <a:xfrm>
+            <a:off x="6172200" y="1417320"/>
+            <a:ext cx="2670048" cy="4206240"/>
+          </a:xfrm>
+          <a:prstGeom prst="roundRect">
+            <a:avLst/>
+          </a:prstGeom>
+          <a:solidFill>
+            <a:srgbClr val="F1ECF8"/>
+          </a:solidFill>
+          <a:ln w="15875">
+            <a:solidFill>
+              <a:srgbClr val="6B3DB5"/>
+            </a:solidFill>
+          </a:ln>
+        </p:spPr>
+        <p:style>
+          <a:lnRef idx="1">
+            <a:schemeClr val="accent1"/>
+          </a:lnRef>
+          <a:fillRef idx="3">
+            <a:schemeClr val="accent1"/>
+          </a:fillRef>
+          <a:effectRef idx="2">
+            <a:schemeClr val="accent1"/>
+          </a:effectRef>
+          <a:fontRef idx="minor">
+            <a:schemeClr val="lt1"/>
+          </a:fontRef>
+        </p:style>
+        <p:txBody>
+          <a:bodyPr rtlCol="0" anchor="ctr"/>
+          <a:lstStyle/>
+          <a:p>
+            <a:pPr algn="ctr"/>
+          </a:p>
+        </p:txBody>
+      </p:sp>
+      <p:sp>
+        <p:nvSpPr>
+          <p:cNvPr id="14" name="TextBox 13"/>
+          <p:cNvSpPr txBox="1"/>
+          <p:nvPr/>
+        </p:nvSpPr>
+        <p:spPr>
+          <a:xfrm>
+            <a:off x="6336792" y="1527048"/>
+            <a:ext cx="2395728" cy="365760"/>
+          </a:xfrm>
+          <a:prstGeom prst="rect">
+            <a:avLst/>
+          </a:prstGeom>
+          <a:noFill/>
+        </p:spPr>
+        <p:txBody>
+          <a:bodyPr wrap="square" anchor="t" lIns="0" rIns="0" tIns="0" bIns="0">
+            <a:spAutoFit/>
+          </a:bodyPr>
+          <a:lstStyle/>
+          <a:p>
+            <a:pPr algn="l"/>
+            <a:r>
+              <a:rPr sz="1400" b="1">
+                <a:solidFill>
+                  <a:srgbClr val="6B3DB5"/>
+                </a:solidFill>
+                <a:latin typeface="Calibri"/>
+              </a:rPr>
+              <a:t>Specialist layer</a:t>
+            </a:r>
+          </a:p>
+        </p:txBody>
+      </p:sp>
+      <p:sp>
+        <p:nvSpPr>
+          <p:cNvPr id="15" name="TextBox 14"/>
+          <p:cNvSpPr txBox="1"/>
+          <p:nvPr/>
+        </p:nvSpPr>
+        <p:spPr>
+          <a:xfrm>
+            <a:off x="6336792" y="1920240"/>
+            <a:ext cx="2395728" cy="3566160"/>
+          </a:xfrm>
+          <a:prstGeom prst="rect">
+            <a:avLst/>
+          </a:prstGeom>
+          <a:noFill/>
+        </p:spPr>
+        <p:txBody>
+          <a:bodyPr wrap="square" lIns="0" rIns="0" tIns="0" bIns="0">
+            <a:spAutoFit/>
+          </a:bodyPr>
+          <a:lstStyle/>
+          <a:p>
+            <a:pPr algn="l">
+              <a:spcAft>
+                <a:spcPts val="500"/>
+              </a:spcAft>
+            </a:pPr>
+            <a:r>
+              <a:rPr sz="1100">
+                <a:solidFill>
+                  <a:srgbClr val="1F2A44"/>
+                </a:solidFill>
+                <a:latin typeface="Calibri"/>
+              </a:rPr>
+              <a:t>•  Subagents invoked as tools.</a:t>
+            </a:r>
+          </a:p>
+          <a:p>
+            <a:pPr algn="l">
+              <a:spcAft>
+                <a:spcPts val="500"/>
+              </a:spcAft>
+            </a:pPr>
+            <a:r>
+              <a:rPr sz="1100">
+                <a:solidFill>
+                  <a:srgbClr val="1F2A44"/>
+                </a:solidFill>
+                <a:latin typeface="Calibri"/>
+              </a:rPr>
+              <a:t>•  Read-only reviewer.</a:t>
+            </a:r>
+          </a:p>
+          <a:p>
+            <a:pPr algn="l">
+              <a:spcAft>
+                <a:spcPts val="500"/>
+              </a:spcAft>
+            </a:pPr>
+            <a:r>
+              <a:rPr sz="1100">
+                <a:solidFill>
+                  <a:srgbClr val="1F2A44"/>
+                </a:solidFill>
+                <a:latin typeface="Calibri"/>
+              </a:rPr>
+              <a:t>•  Codebase explorer.</a:t>
+            </a:r>
+          </a:p>
+          <a:p>
+            <a:pPr algn="l">
+              <a:spcAft>
+                <a:spcPts val="500"/>
+              </a:spcAft>
+            </a:pPr>
+            <a:r>
+              <a:rPr sz="1100">
+                <a:solidFill>
+                  <a:srgbClr val="1F2A44"/>
+                </a:solidFill>
+                <a:latin typeface="Calibri"/>
+              </a:rPr>
+              <a:t>•  Security-audit subagent.</a:t>
+            </a:r>
+          </a:p>
+          <a:p>
+            <a:pPr algn="l">
+              <a:spcAft>
+                <a:spcPts val="500"/>
+              </a:spcAft>
+            </a:pPr>
+            <a:r>
+              <a:rPr sz="1100">
+                <a:solidFill>
+                  <a:srgbClr val="1F2A44"/>
+                </a:solidFill>
+                <a:latin typeface="Calibri"/>
+              </a:rPr>
+              <a:t>•  —</a:t>
+            </a:r>
+          </a:p>
+          <a:p>
+            <a:pPr algn="l">
+              <a:spcAft>
+                <a:spcPts val="500"/>
+              </a:spcAft>
+            </a:pPr>
+            <a:r>
+              <a:rPr sz="1100">
+                <a:solidFill>
+                  <a:srgbClr val="1F2A44"/>
+                </a:solidFill>
+                <a:latin typeface="Calibri"/>
+              </a:rPr>
+              <a:t>•  Drift: pinned-input integration test.</a:t>
+            </a:r>
+          </a:p>
+          <a:p>
+            <a:pPr algn="l">
+              <a:spcAft>
+                <a:spcPts val="500"/>
+              </a:spcAft>
+            </a:pPr>
+            <a:r>
+              <a:rPr sz="1100">
+                <a:solidFill>
+                  <a:srgbClr val="1F2A44"/>
+                </a:solidFill>
+                <a:latin typeface="Calibri"/>
+              </a:rPr>
+              <a:t>•  Owner: platform / framework.</a:t>
+            </a:r>
+          </a:p>
+          <a:p>
+            <a:pPr algn="l">
+              <a:spcAft>
+                <a:spcPts val="500"/>
+              </a:spcAft>
+            </a:pPr>
+            <a:r>
+              <a:rPr sz="1100">
+                <a:solidFill>
+                  <a:srgbClr val="1F2A44"/>
+                </a:solidFill>
+                <a:latin typeface="Calibri"/>
+              </a:rPr>
+              <a:t>•  Default tool: subagent definition.</a:t>
+            </a:r>
+          </a:p>
+        </p:txBody>
+      </p:sp>
+      <p:sp>
+        <p:nvSpPr>
+          <p:cNvPr id="16" name="Rounded Rectangle 15"/>
+          <p:cNvSpPr/>
+          <p:nvPr/>
+        </p:nvSpPr>
+        <p:spPr>
+          <a:xfrm>
+            <a:off x="9006840" y="1417320"/>
+            <a:ext cx="2670048" cy="4206240"/>
+          </a:xfrm>
+          <a:prstGeom prst="roundRect">
+            <a:avLst/>
+          </a:prstGeom>
+          <a:solidFill>
+            <a:srgbClr val="ECF3FF"/>
+          </a:solidFill>
+          <a:ln w="15875">
+            <a:solidFill>
+              <a:srgbClr val="1B55E0"/>
+            </a:solidFill>
+          </a:ln>
+        </p:spPr>
+        <p:style>
+          <a:lnRef idx="1">
+            <a:schemeClr val="accent1"/>
+          </a:lnRef>
+          <a:fillRef idx="3">
+            <a:schemeClr val="accent1"/>
+          </a:fillRef>
+          <a:effectRef idx="2">
+            <a:schemeClr val="accent1"/>
+          </a:effectRef>
+          <a:fontRef idx="minor">
+            <a:schemeClr val="lt1"/>
+          </a:fontRef>
+        </p:style>
+        <p:txBody>
+          <a:bodyPr rtlCol="0" anchor="ctr"/>
+          <a:lstStyle/>
+          <a:p>
+            <a:pPr algn="ctr"/>
+          </a:p>
+        </p:txBody>
+      </p:sp>
+      <p:sp>
+        <p:nvSpPr>
+          <p:cNvPr id="17" name="TextBox 16"/>
+          <p:cNvSpPr txBox="1"/>
+          <p:nvPr/>
+        </p:nvSpPr>
+        <p:spPr>
+          <a:xfrm>
+            <a:off x="9171432" y="1527048"/>
+            <a:ext cx="2395728" cy="365760"/>
+          </a:xfrm>
+          <a:prstGeom prst="rect">
+            <a:avLst/>
+          </a:prstGeom>
+          <a:noFill/>
+        </p:spPr>
+        <p:txBody>
+          <a:bodyPr wrap="square" anchor="t" lIns="0" rIns="0" tIns="0" bIns="0">
+            <a:spAutoFit/>
+          </a:bodyPr>
+          <a:lstStyle/>
+          <a:p>
+            <a:pPr algn="l"/>
+            <a:r>
+              <a:rPr sz="1400" b="1">
+                <a:solidFill>
+                  <a:srgbClr val="1B55E0"/>
+                </a:solidFill>
+                <a:latin typeface="Calibri"/>
+              </a:rPr>
+              <a:t>Volatile-knowledge layer</a:t>
+            </a:r>
+          </a:p>
+        </p:txBody>
+      </p:sp>
+      <p:sp>
+        <p:nvSpPr>
+          <p:cNvPr id="18" name="TextBox 17"/>
+          <p:cNvSpPr txBox="1"/>
+          <p:nvPr/>
+        </p:nvSpPr>
+        <p:spPr>
+          <a:xfrm>
+            <a:off x="9171432" y="1920240"/>
+            <a:ext cx="2395728" cy="3566160"/>
+          </a:xfrm>
+          <a:prstGeom prst="rect">
+            <a:avLst/>
+          </a:prstGeom>
+          <a:noFill/>
+        </p:spPr>
+        <p:txBody>
+          <a:bodyPr wrap="square" lIns="0" rIns="0" tIns="0" bIns="0">
+            <a:spAutoFit/>
+          </a:bodyPr>
+          <a:lstStyle/>
+          <a:p>
+            <a:pPr algn="l">
+              <a:spcAft>
+                <a:spcPts val="500"/>
+              </a:spcAft>
+            </a:pPr>
+            <a:r>
+              <a:rPr sz="1100">
+                <a:solidFill>
+                  <a:srgbClr val="1F2A44"/>
+                </a:solidFill>
+                <a:latin typeface="Calibri"/>
+              </a:rPr>
+              <a:t>•  RAG / catalog / graph.</a:t>
+            </a:r>
+          </a:p>
+          <a:p>
+            <a:pPr algn="l">
+              <a:spcAft>
+                <a:spcPts val="500"/>
+              </a:spcAft>
+            </a:pPr>
+            <a:r>
+              <a:rPr sz="1100">
+                <a:solidFill>
+                  <a:srgbClr val="1F2A44"/>
+                </a:solidFill>
+                <a:latin typeface="Calibri"/>
+              </a:rPr>
+              <a:t>•  ADRs, runbooks, incidents.</a:t>
+            </a:r>
+          </a:p>
+          <a:p>
+            <a:pPr algn="l">
+              <a:spcAft>
+                <a:spcPts val="500"/>
+              </a:spcAft>
+            </a:pPr>
+            <a:r>
+              <a:rPr sz="1100">
+                <a:solidFill>
+                  <a:srgbClr val="1F2A44"/>
+                </a:solidFill>
+                <a:latin typeface="Calibri"/>
+              </a:rPr>
+              <a:t>•  Live ontology + bindings.</a:t>
+            </a:r>
+          </a:p>
+          <a:p>
+            <a:pPr algn="l">
+              <a:spcAft>
+                <a:spcPts val="500"/>
+              </a:spcAft>
+            </a:pPr>
+            <a:r>
+              <a:rPr sz="1100">
+                <a:solidFill>
+                  <a:srgbClr val="1F2A44"/>
+                </a:solidFill>
+                <a:latin typeface="Calibri"/>
+              </a:rPr>
+              <a:t>•  Domain corpora.</a:t>
+            </a:r>
+          </a:p>
+          <a:p>
+            <a:pPr algn="l">
+              <a:spcAft>
+                <a:spcPts val="500"/>
+              </a:spcAft>
+            </a:pPr>
+            <a:r>
+              <a:rPr sz="1100">
+                <a:solidFill>
+                  <a:srgbClr val="1F2A44"/>
+                </a:solidFill>
+                <a:latin typeface="Calibri"/>
+              </a:rPr>
+              <a:t>•  —</a:t>
+            </a:r>
+          </a:p>
+          <a:p>
+            <a:pPr algn="l">
+              <a:spcAft>
+                <a:spcPts val="500"/>
+              </a:spcAft>
+            </a:pPr>
+            <a:r>
+              <a:rPr sz="1100">
+                <a:solidFill>
+                  <a:srgbClr val="1F2A44"/>
+                </a:solidFill>
+                <a:latin typeface="Calibri"/>
+              </a:rPr>
+              <a:t>•  Drift: indexer SLO + eval set.</a:t>
+            </a:r>
+          </a:p>
+          <a:p>
+            <a:pPr algn="l">
+              <a:spcAft>
+                <a:spcPts val="500"/>
+              </a:spcAft>
+            </a:pPr>
+            <a:r>
+              <a:rPr sz="1100">
+                <a:solidFill>
+                  <a:srgbClr val="1F2A44"/>
+                </a:solidFill>
+                <a:latin typeface="Calibri"/>
+              </a:rPr>
+              <a:t>•  Owner: a data team.</a:t>
+            </a:r>
+          </a:p>
+          <a:p>
+            <a:pPr algn="l">
+              <a:spcAft>
+                <a:spcPts val="500"/>
+              </a:spcAft>
+            </a:pPr>
+            <a:r>
+              <a:rPr sz="1100">
+                <a:solidFill>
+                  <a:srgbClr val="1F2A44"/>
+                </a:solidFill>
+                <a:latin typeface="Calibri"/>
+              </a:rPr>
+              <a:t>•  Default tool: query, not encode.</a:t>
+            </a:r>
+          </a:p>
+        </p:txBody>
+      </p:sp>
+      <p:sp>
+        <p:nvSpPr>
+          <p:cNvPr id="19" name="Rounded Rectangle 18"/>
+          <p:cNvSpPr/>
+          <p:nvPr/>
+        </p:nvSpPr>
+        <p:spPr>
+          <a:xfrm>
+            <a:off x="502920" y="5806440"/>
+            <a:ext cx="11155680" cy="548640"/>
+          </a:xfrm>
+          <a:prstGeom prst="roundRect">
+            <a:avLst/>
+          </a:prstGeom>
+          <a:solidFill>
+            <a:srgbClr val="ECF3FF"/>
+          </a:solidFill>
+          <a:ln w="12700">
+            <a:solidFill>
+              <a:srgbClr val="1B55E0"/>
+            </a:solidFill>
+          </a:ln>
+        </p:spPr>
+        <p:style>
+          <a:lnRef idx="1">
+            <a:schemeClr val="accent1"/>
+          </a:lnRef>
+          <a:fillRef idx="3">
+            <a:schemeClr val="accent1"/>
+          </a:fillRef>
+          <a:effectRef idx="2">
+            <a:schemeClr val="accent1"/>
+          </a:effectRef>
+          <a:fontRef idx="minor">
+            <a:schemeClr val="lt1"/>
+          </a:fontRef>
+        </p:style>
+        <p:txBody>
+          <a:bodyPr rtlCol="0" anchor="ctr"/>
+          <a:lstStyle/>
+          <a:p>
+            <a:pPr algn="ctr"/>
+          </a:p>
+        </p:txBody>
+      </p:sp>
+      <p:sp>
+        <p:nvSpPr>
+          <p:cNvPr id="20" name="TextBox 19"/>
+          <p:cNvSpPr txBox="1"/>
+          <p:nvPr/>
+        </p:nvSpPr>
+        <p:spPr>
+          <a:xfrm>
+            <a:off x="777240" y="5897880"/>
+            <a:ext cx="10607040" cy="457200"/>
+          </a:xfrm>
+          <a:prstGeom prst="rect">
+            <a:avLst/>
+          </a:prstGeom>
+          <a:noFill/>
+        </p:spPr>
+        <p:txBody>
+          <a:bodyPr wrap="square" anchor="t" lIns="0" rIns="0" tIns="0" bIns="0">
+            <a:spAutoFit/>
+          </a:bodyPr>
+          <a:lstStyle/>
+          <a:p>
+            <a:pPr algn="l"/>
+            <a:r>
+              <a:rPr sz="1200" b="1">
+                <a:solidFill>
+                  <a:srgbClr val="1440A8"/>
+                </a:solidFill>
+                <a:latin typeface="Calibri"/>
+              </a:rPr>
+              <a:t>PMOS already does three of these — scripts in /scripts, ontology + RAG queryable. The four-layer trap: letting the skill or subagent layer sprawl into the others.</a:t>
+            </a:r>
+          </a:p>
+        </p:txBody>
+      </p:sp>
+    </p:spTree>
+  </p:cSld>
+  <p:clrMapOvr>
+    <a:masterClrMapping/>
+  </p:clrMapOvr>
+</p:sld>
+</file>
+
+<file path=ppt/slides/slide13.xml><?xml version="1.0" encoding="utf-8"?>
+<p:sld xmlns:a="http://schemas.openxmlformats.org/drawingml/2006/main" xmlns:p="http://schemas.openxmlformats.org/presentationml/2006/main" xmlns:r="http://schemas.openxmlformats.org/officeDocument/2006/relationships">
+  <p:cSld>
+    <p:bg>
+      <p:bgPr>
+        <a:solidFill>
+          <a:srgbClr val="FFFFFF"/>
+        </a:solidFill>
+        <a:effectLst/>
+      </p:bgPr>
+    </p:bg>
+    <p:spTree>
+      <p:nvGrpSpPr>
+        <p:cNvPr id="1" name=""/>
+        <p:cNvGrpSpPr/>
+        <p:nvPr/>
+      </p:nvGrpSpPr>
+      <p:grpSpPr/>
+      <p:sp>
+        <p:nvSpPr>
+          <p:cNvPr id="2" name="Rectangle 1"/>
+          <p:cNvSpPr/>
+          <p:nvPr/>
+        </p:nvSpPr>
+        <p:spPr>
+          <a:xfrm>
+            <a:off x="0" y="0"/>
+            <a:ext cx="12191695" cy="164592"/>
+          </a:xfrm>
+          <a:prstGeom prst="rect">
+            <a:avLst/>
+          </a:prstGeom>
+          <a:solidFill>
+            <a:srgbClr val="1B55E0"/>
+          </a:solidFill>
+          <a:ln>
+            <a:noFill/>
+          </a:ln>
+        </p:spPr>
+        <p:style>
+          <a:lnRef idx="1">
+            <a:schemeClr val="accent1"/>
+          </a:lnRef>
+          <a:fillRef idx="3">
+            <a:schemeClr val="accent1"/>
+          </a:fillRef>
+          <a:effectRef idx="2">
+            <a:schemeClr val="accent1"/>
+          </a:effectRef>
+          <a:fontRef idx="minor">
+            <a:schemeClr val="lt1"/>
+          </a:fontRef>
+        </p:style>
+        <p:txBody>
+          <a:bodyPr rtlCol="0" anchor="ctr"/>
+          <a:lstStyle/>
+          <a:p>
+            <a:pPr algn="ctr"/>
+          </a:p>
+        </p:txBody>
+      </p:sp>
+      <p:sp>
+        <p:nvSpPr>
+          <p:cNvPr id="3" name="TextBox 2"/>
+          <p:cNvSpPr txBox="1"/>
+          <p:nvPr/>
+        </p:nvSpPr>
+        <p:spPr>
+          <a:xfrm>
+            <a:off x="502920" y="292608"/>
+            <a:ext cx="10058400" cy="548640"/>
+          </a:xfrm>
+          <a:prstGeom prst="rect">
+            <a:avLst/>
+          </a:prstGeom>
+          <a:noFill/>
+        </p:spPr>
+        <p:txBody>
+          <a:bodyPr wrap="square" anchor="t" lIns="0" rIns="0" tIns="0" bIns="0">
+            <a:spAutoFit/>
+          </a:bodyPr>
+          <a:lstStyle/>
+          <a:p>
+            <a:pPr algn="l"/>
+            <a:r>
+              <a:rPr sz="2800" b="1">
+                <a:solidFill>
+                  <a:srgbClr val="1F2A44"/>
+                </a:solidFill>
+                <a:latin typeface="Calibri"/>
+              </a:rPr>
+              <a:t>Anti-Patterns to Avoid</a:t>
+            </a:r>
+          </a:p>
+        </p:txBody>
+      </p:sp>
+      <p:sp>
+        <p:nvSpPr>
+          <p:cNvPr id="4" name="TextBox 3"/>
+          <p:cNvSpPr txBox="1"/>
+          <p:nvPr/>
+        </p:nvSpPr>
+        <p:spPr>
+          <a:xfrm>
+            <a:off x="502920" y="777240"/>
+            <a:ext cx="10058400" cy="365760"/>
+          </a:xfrm>
+          <a:prstGeom prst="rect">
+            <a:avLst/>
+          </a:prstGeom>
+          <a:noFill/>
+        </p:spPr>
+        <p:txBody>
+          <a:bodyPr wrap="square" anchor="t" lIns="0" rIns="0" tIns="0" bIns="0">
+            <a:spAutoFit/>
+          </a:bodyPr>
+          <a:lstStyle/>
+          <a:p>
+            <a:pPr algn="l"/>
+            <a:r>
+              <a:rPr sz="1400" b="0">
+                <a:solidFill>
+                  <a:srgbClr val="55607A"/>
+                </a:solidFill>
+                <a:latin typeface="Calibri"/>
+              </a:rPr>
+              <a:t>Six common ways teams over-spend on the wrong layer.</a:t>
+            </a:r>
+          </a:p>
+        </p:txBody>
+      </p:sp>
+      <p:sp>
+        <p:nvSpPr>
+          <p:cNvPr id="5" name="TextBox 4"/>
+          <p:cNvSpPr txBox="1"/>
+          <p:nvPr/>
+        </p:nvSpPr>
+        <p:spPr>
+          <a:xfrm>
+            <a:off x="11430000" y="6446520"/>
+            <a:ext cx="640080" cy="274320"/>
+          </a:xfrm>
+          <a:prstGeom prst="rect">
+            <a:avLst/>
+          </a:prstGeom>
+          <a:noFill/>
+        </p:spPr>
+        <p:txBody>
+          <a:bodyPr wrap="square" anchor="t" lIns="0" rIns="0" tIns="0" bIns="0">
+            <a:spAutoFit/>
+          </a:bodyPr>
+          <a:lstStyle/>
+          <a:p>
+            <a:pPr algn="r"/>
+            <a:r>
+              <a:rPr sz="1000" b="0">
+                <a:solidFill>
+                  <a:srgbClr val="55607A"/>
+                </a:solidFill>
+                <a:latin typeface="Calibri"/>
+              </a:rPr>
+              <a:t>13</a:t>
+            </a:r>
+          </a:p>
+        </p:txBody>
+      </p:sp>
+      <p:sp>
+        <p:nvSpPr>
+          <p:cNvPr id="6" name="Rectangle 5"/>
+          <p:cNvSpPr/>
+          <p:nvPr/>
+        </p:nvSpPr>
+        <p:spPr>
+          <a:xfrm>
+            <a:off x="502920" y="6400800"/>
+            <a:ext cx="11155680" cy="18288"/>
+          </a:xfrm>
+          <a:prstGeom prst="rect">
+            <a:avLst/>
+          </a:prstGeom>
+          <a:solidFill>
+            <a:srgbClr val="E3E7EF"/>
+          </a:solidFill>
+          <a:ln>
+            <a:noFill/>
+          </a:ln>
+        </p:spPr>
+        <p:style>
+          <a:lnRef idx="1">
+            <a:schemeClr val="accent1"/>
+          </a:lnRef>
+          <a:fillRef idx="3">
+            <a:schemeClr val="accent1"/>
+          </a:fillRef>
+          <a:effectRef idx="2">
+            <a:schemeClr val="accent1"/>
+          </a:effectRef>
+          <a:fontRef idx="minor">
+            <a:schemeClr val="lt1"/>
+          </a:fontRef>
+        </p:style>
+        <p:txBody>
+          <a:bodyPr rtlCol="0" anchor="ctr"/>
+          <a:lstStyle/>
+          <a:p>
+            <a:pPr algn="ctr"/>
+          </a:p>
+        </p:txBody>
+      </p:sp>
+      <p:graphicFrame>
+        <p:nvGraphicFramePr>
+          <p:cNvPr id="7" name="Table 6"/>
+          <p:cNvGraphicFramePr>
+            <a:graphicFrameLocks noGrp="1"/>
+          </p:cNvGraphicFramePr>
+          <p:nvPr/>
+        </p:nvGraphicFramePr>
+        <p:xfrm>
+          <a:off x="502920" y="1417320"/>
+          <a:ext cx="11155680" cy="4572000"/>
+        </p:xfrm>
+        <a:graphic>
+          <a:graphicData uri="http://schemas.openxmlformats.org/drawingml/2006/table">
+            <a:tbl>
+              <a:tblPr firstRow="1" bandRow="1">
+                <a:tableStyleId>{5C22544A-7EE6-4342-B048-85BDC9FD1C3A}</a:tableStyleId>
+              </a:tblPr>
+              <a:tblGrid>
+                <a:gridCol w="2377440"/>
+                <a:gridCol w="4937760"/>
+                <a:gridCol w="3840480"/>
+              </a:tblGrid>
+              <a:tr h="653142">
+                <a:tc>
+                  <a:txBody>
+                    <a:bodyPr lIns="60000" rIns="60000" tIns="40000" bIns="40000"/>
+                    <a:lstStyle/>
+                    <a:p>
+                      <a:pPr algn="l"/>
+                      <a:r>
+                        <a:rPr sz="1200" b="1">
+                          <a:solidFill>
+                            <a:srgbClr val="FFFFFF"/>
+                          </a:solidFill>
+                          <a:latin typeface="Calibri"/>
+                        </a:rPr>
+                        <a:t>Anti-pattern</a:t>
+                      </a:r>
+                    </a:p>
+                  </a:txBody>
+                  <a:tcPr>
+                    <a:solidFill>
+                      <a:srgbClr val="1F2A44"/>
+                    </a:solidFill>
+                  </a:tcPr>
+                </a:tc>
+                <a:tc>
+                  <a:txBody>
+                    <a:bodyPr lIns="60000" rIns="60000" tIns="40000" bIns="40000"/>
+                    <a:lstStyle/>
+                    <a:p>
+                      <a:pPr algn="l"/>
+                      <a:r>
+                        <a:rPr sz="1200" b="1">
+                          <a:solidFill>
+                            <a:srgbClr val="FFFFFF"/>
+                          </a:solidFill>
+                          <a:latin typeface="Calibri"/>
+                        </a:rPr>
+                        <a:t>What it looks like</a:t>
+                      </a:r>
+                    </a:p>
+                  </a:txBody>
+                  <a:tcPr>
+                    <a:solidFill>
+                      <a:srgbClr val="1F2A44"/>
+                    </a:solidFill>
+                  </a:tcPr>
+                </a:tc>
+                <a:tc>
+                  <a:txBody>
+                    <a:bodyPr lIns="60000" rIns="60000" tIns="40000" bIns="40000"/>
+                    <a:lstStyle/>
+                    <a:p>
+                      <a:pPr algn="l"/>
+                      <a:r>
+                        <a:rPr sz="1200" b="1">
+                          <a:solidFill>
+                            <a:srgbClr val="FFFFFF"/>
+                          </a:solidFill>
+                          <a:latin typeface="Calibri"/>
+                        </a:rPr>
+                        <a:t>What to do instead</a:t>
+                      </a:r>
+                    </a:p>
+                  </a:txBody>
+                  <a:tcPr>
+                    <a:solidFill>
+                      <a:srgbClr val="1F2A44"/>
+                    </a:solidFill>
+                  </a:tcPr>
+                </a:tc>
+              </a:tr>
+              <a:tr h="653142">
+                <a:tc>
+                  <a:txBody>
+                    <a:bodyPr lIns="60000" rIns="60000" tIns="30000" bIns="30000" wrap="square"/>
+                    <a:lstStyle/>
+                    <a:p>
+                      <a:pPr algn="l"/>
+                      <a:r>
+                        <a:rPr sz="1100">
+                          <a:solidFill>
+                            <a:srgbClr val="1F2A44"/>
+                          </a:solidFill>
+                          <a:latin typeface="Calibri"/>
+                        </a:rPr>
+                        <a:t>Skill-for-everything</a:t>
+                      </a:r>
+                    </a:p>
+                  </a:txBody>
+                  <a:tcPr>
+                    <a:solidFill>
+                      <a:srgbClr val="FFFFFF"/>
+                    </a:solidFill>
+                  </a:tcPr>
+                </a:tc>
+                <a:tc>
+                  <a:txBody>
+                    <a:bodyPr lIns="60000" rIns="60000" tIns="30000" bIns="30000" wrap="square"/>
+                    <a:lstStyle/>
+                    <a:p>
+                      <a:pPr algn="l"/>
+                      <a:r>
+                        <a:rPr sz="1100">
+                          <a:solidFill>
+                            <a:srgbClr val="1F2A44"/>
+                          </a:solidFill>
+                          <a:latin typeface="Calibri"/>
+                        </a:rPr>
+                        <a:t>A markdown for "how to deploy," "how to run tests," "how to seed data."</a:t>
+                      </a:r>
+                    </a:p>
+                  </a:txBody>
+                  <a:tcPr>
+                    <a:solidFill>
+                      <a:srgbClr val="FFFFFF"/>
+                    </a:solidFill>
+                  </a:tcPr>
+                </a:tc>
+                <a:tc>
+                  <a:txBody>
+                    <a:bodyPr lIns="60000" rIns="60000" tIns="30000" bIns="30000" wrap="square"/>
+                    <a:lstStyle/>
+                    <a:p>
+                      <a:pPr algn="l"/>
+                      <a:r>
+                        <a:rPr sz="1100">
+                          <a:solidFill>
+                            <a:srgbClr val="1F2A44"/>
+                          </a:solidFill>
+                          <a:latin typeface="Calibri"/>
+                        </a:rPr>
+                        <a:t>Write the script. The skill, if needed, just says "run scripts/X."</a:t>
+                      </a:r>
+                    </a:p>
+                  </a:txBody>
+                  <a:tcPr>
+                    <a:solidFill>
+                      <a:srgbClr val="FFFFFF"/>
+                    </a:solidFill>
+                  </a:tcPr>
+                </a:tc>
+              </a:tr>
+              <a:tr h="653142">
+                <a:tc>
+                  <a:txBody>
+                    <a:bodyPr lIns="60000" rIns="60000" tIns="30000" bIns="30000" wrap="square"/>
+                    <a:lstStyle/>
+                    <a:p>
+                      <a:pPr algn="l"/>
+                      <a:r>
+                        <a:rPr sz="1100">
+                          <a:solidFill>
+                            <a:srgbClr val="1F2A44"/>
+                          </a:solidFill>
+                          <a:latin typeface="Calibri"/>
+                        </a:rPr>
+                        <a:t>Confluence-as-a-skill</a:t>
+                      </a:r>
+                    </a:p>
+                  </a:txBody>
+                  <a:tcPr>
+                    <a:solidFill>
+                      <a:srgbClr val="F5F7FB"/>
+                    </a:solidFill>
+                  </a:tcPr>
+                </a:tc>
+                <a:tc>
+                  <a:txBody>
+                    <a:bodyPr lIns="60000" rIns="60000" tIns="30000" bIns="30000" wrap="square"/>
+                    <a:lstStyle/>
+                    <a:p>
+                      <a:pPr algn="l"/>
+                      <a:r>
+                        <a:rPr sz="1100">
+                          <a:solidFill>
+                            <a:srgbClr val="1F2A44"/>
+                          </a:solidFill>
+                          <a:latin typeface="Calibri"/>
+                        </a:rPr>
+                        <a:t>Documentation ported into a /skills folder — no decision authority, no actions.</a:t>
+                      </a:r>
+                    </a:p>
+                  </a:txBody>
+                  <a:tcPr>
+                    <a:solidFill>
+                      <a:srgbClr val="F5F7FB"/>
+                    </a:solidFill>
+                  </a:tcPr>
+                </a:tc>
+                <a:tc>
+                  <a:txBody>
+                    <a:bodyPr lIns="60000" rIns="60000" tIns="30000" bIns="30000" wrap="square"/>
+                    <a:lstStyle/>
+                    <a:p>
+                      <a:pPr algn="l"/>
+                      <a:r>
+                        <a:rPr sz="1100">
+                          <a:solidFill>
+                            <a:srgbClr val="1F2A44"/>
+                          </a:solidFill>
+                          <a:latin typeface="Calibri"/>
+                        </a:rPr>
+                        <a:t>Leave it as documentation. Skills are for the agent, not for humans.</a:t>
+                      </a:r>
+                    </a:p>
+                  </a:txBody>
+                  <a:tcPr>
+                    <a:solidFill>
+                      <a:srgbClr val="F5F7FB"/>
+                    </a:solidFill>
+                  </a:tcPr>
+                </a:tc>
+              </a:tr>
+              <a:tr h="653142">
+                <a:tc>
+                  <a:txBody>
+                    <a:bodyPr lIns="60000" rIns="60000" tIns="30000" bIns="30000" wrap="square"/>
+                    <a:lstStyle/>
+                    <a:p>
+                      <a:pPr algn="l"/>
+                      <a:r>
+                        <a:rPr sz="1100">
+                          <a:solidFill>
+                            <a:srgbClr val="1F2A44"/>
+                          </a:solidFill>
+                          <a:latin typeface="Calibri"/>
+                        </a:rPr>
+                        <a:t>Subagent-for-everything</a:t>
+                      </a:r>
+                    </a:p>
+                  </a:txBody>
+                  <a:tcPr>
+                    <a:solidFill>
+                      <a:srgbClr val="FFFFFF"/>
+                    </a:solidFill>
+                  </a:tcPr>
+                </a:tc>
+                <a:tc>
+                  <a:txBody>
+                    <a:bodyPr lIns="60000" rIns="60000" tIns="30000" bIns="30000" wrap="square"/>
+                    <a:lstStyle/>
+                    <a:p>
+                      <a:pPr algn="l"/>
+                      <a:r>
+                        <a:rPr sz="1100">
+                          <a:solidFill>
+                            <a:srgbClr val="1F2A44"/>
+                          </a:solidFill>
+                          <a:latin typeface="Calibri"/>
+                        </a:rPr>
+                        <a:t>Spawning a subagent for trivial tasks — adds latency + briefing overhead with no isolation win.</a:t>
+                      </a:r>
+                    </a:p>
+                  </a:txBody>
+                  <a:tcPr>
+                    <a:solidFill>
+                      <a:srgbClr val="FFFFFF"/>
+                    </a:solidFill>
+                  </a:tcPr>
+                </a:tc>
+                <a:tc>
+                  <a:txBody>
+                    <a:bodyPr lIns="60000" rIns="60000" tIns="30000" bIns="30000" wrap="square"/>
+                    <a:lstStyle/>
+                    <a:p>
+                      <a:pPr algn="l"/>
+                      <a:r>
+                        <a:rPr sz="1100">
+                          <a:solidFill>
+                            <a:srgbClr val="1F2A44"/>
+                          </a:solidFill>
+                          <a:latin typeface="Calibri"/>
+                        </a:rPr>
+                        <a:t>Inline the work, or call a tool directly. Subagents earn their keep on heavy or scoped work.</a:t>
+                      </a:r>
+                    </a:p>
+                  </a:txBody>
+                  <a:tcPr>
+                    <a:solidFill>
+                      <a:srgbClr val="FFFFFF"/>
+                    </a:solidFill>
+                  </a:tcPr>
+                </a:tc>
+              </a:tr>
+              <a:tr h="653142">
+                <a:tc>
+                  <a:txBody>
+                    <a:bodyPr lIns="60000" rIns="60000" tIns="30000" bIns="30000" wrap="square"/>
+                    <a:lstStyle/>
+                    <a:p>
+                      <a:pPr algn="l"/>
+                      <a:r>
+                        <a:rPr sz="1100">
+                          <a:solidFill>
+                            <a:srgbClr val="1F2A44"/>
+                          </a:solidFill>
+                          <a:latin typeface="Calibri"/>
+                        </a:rPr>
+                        <a:t>Subagent without guardrails</a:t>
+                      </a:r>
+                    </a:p>
+                  </a:txBody>
+                  <a:tcPr>
+                    <a:solidFill>
+                      <a:srgbClr val="F5F7FB"/>
+                    </a:solidFill>
+                  </a:tcPr>
+                </a:tc>
+                <a:tc>
+                  <a:txBody>
+                    <a:bodyPr lIns="60000" rIns="60000" tIns="30000" bIns="30000" wrap="square"/>
+                    <a:lstStyle/>
+                    <a:p>
+                      <a:pPr algn="l"/>
+                      <a:r>
+                        <a:rPr sz="1100">
+                          <a:solidFill>
+                            <a:srgbClr val="1F2A44"/>
+                          </a:solidFill>
+                          <a:latin typeface="Calibri"/>
+                        </a:rPr>
+                        <a:t>Subagent definition with the full tool allowlist of its parent — same toolset, just slower.</a:t>
+                      </a:r>
+                    </a:p>
+                  </a:txBody>
+                  <a:tcPr>
+                    <a:solidFill>
+                      <a:srgbClr val="F5F7FB"/>
+                    </a:solidFill>
+                  </a:tcPr>
+                </a:tc>
+                <a:tc>
+                  <a:txBody>
+                    <a:bodyPr lIns="60000" rIns="60000" tIns="30000" bIns="30000" wrap="square"/>
+                    <a:lstStyle/>
+                    <a:p>
+                      <a:pPr algn="l"/>
+                      <a:r>
+                        <a:rPr sz="1100">
+                          <a:solidFill>
+                            <a:srgbClr val="1F2A44"/>
+                          </a:solidFill>
+                          <a:latin typeface="Calibri"/>
+                        </a:rPr>
+                        <a:t>If you are not narrowing tools or isolating context, do not use a subagent.</a:t>
+                      </a:r>
+                    </a:p>
+                  </a:txBody>
+                  <a:tcPr>
+                    <a:solidFill>
+                      <a:srgbClr val="F5F7FB"/>
+                    </a:solidFill>
+                  </a:tcPr>
+                </a:tc>
+              </a:tr>
+              <a:tr h="653142">
+                <a:tc>
+                  <a:txBody>
+                    <a:bodyPr lIns="60000" rIns="60000" tIns="30000" bIns="30000" wrap="square"/>
+                    <a:lstStyle/>
+                    <a:p>
+                      <a:pPr algn="l"/>
+                      <a:r>
+                        <a:rPr sz="1100">
+                          <a:solidFill>
+                            <a:srgbClr val="1F2A44"/>
+                          </a:solidFill>
+                          <a:latin typeface="Calibri"/>
+                        </a:rPr>
+                        <a:t>RAG over the source code</a:t>
+                      </a:r>
+                    </a:p>
+                  </a:txBody>
+                  <a:tcPr>
+                    <a:solidFill>
+                      <a:srgbClr val="FFFFFF"/>
+                    </a:solidFill>
+                  </a:tcPr>
+                </a:tc>
+                <a:tc>
+                  <a:txBody>
+                    <a:bodyPr lIns="60000" rIns="60000" tIns="30000" bIns="30000" wrap="square"/>
+                    <a:lstStyle/>
+                    <a:p>
+                      <a:pPr algn="l"/>
+                      <a:r>
+                        <a:rPr sz="1100">
+                          <a:solidFill>
+                            <a:srgbClr val="1F2A44"/>
+                          </a:solidFill>
+                          <a:latin typeface="Calibri"/>
+                        </a:rPr>
+                        <a:t>Indexing the repo to answer code questions — the IDE already does this better.</a:t>
+                      </a:r>
+                    </a:p>
+                  </a:txBody>
+                  <a:tcPr>
+                    <a:solidFill>
+                      <a:srgbClr val="FFFFFF"/>
+                    </a:solidFill>
+                  </a:tcPr>
+                </a:tc>
+                <a:tc>
+                  <a:txBody>
+                    <a:bodyPr lIns="60000" rIns="60000" tIns="30000" bIns="30000" wrap="square"/>
+                    <a:lstStyle/>
+                    <a:p>
+                      <a:pPr algn="l"/>
+                      <a:r>
+                        <a:rPr sz="1100">
+                          <a:solidFill>
+                            <a:srgbClr val="1F2A44"/>
+                          </a:solidFill>
+                          <a:latin typeface="Calibri"/>
+                        </a:rPr>
+                        <a:t>Use the IDE / language server. Reserve RAG for non-code corpora.</a:t>
+                      </a:r>
+                    </a:p>
+                  </a:txBody>
+                  <a:tcPr>
+                    <a:solidFill>
+                      <a:srgbClr val="FFFFFF"/>
+                    </a:solidFill>
+                  </a:tcPr>
+                </a:tc>
+              </a:tr>
+              <a:tr h="653148">
+                <a:tc>
+                  <a:txBody>
+                    <a:bodyPr lIns="60000" rIns="60000" tIns="30000" bIns="30000" wrap="square"/>
+                    <a:lstStyle/>
+                    <a:p>
+                      <a:pPr algn="l"/>
+                      <a:r>
+                        <a:rPr sz="1100">
+                          <a:solidFill>
+                            <a:srgbClr val="1F2A44"/>
+                          </a:solidFill>
+                          <a:latin typeface="Calibri"/>
+                        </a:rPr>
+                        <a:t>Script-for-judgment</a:t>
+                      </a:r>
+                    </a:p>
+                  </a:txBody>
+                  <a:tcPr>
+                    <a:solidFill>
+                      <a:srgbClr val="F5F7FB"/>
+                    </a:solidFill>
+                  </a:tcPr>
+                </a:tc>
+                <a:tc>
+                  <a:txBody>
+                    <a:bodyPr lIns="60000" rIns="60000" tIns="30000" bIns="30000" wrap="square"/>
+                    <a:lstStyle/>
+                    <a:p>
+                      <a:pPr algn="l"/>
+                      <a:r>
+                        <a:rPr sz="1100">
+                          <a:solidFill>
+                            <a:srgbClr val="1F2A44"/>
+                          </a:solidFill>
+                          <a:latin typeface="Calibri"/>
+                        </a:rPr>
+                        <a:t>review.py that grades code with regexes; estimate.py by file count.</a:t>
+                      </a:r>
+                    </a:p>
+                  </a:txBody>
+                  <a:tcPr>
+                    <a:solidFill>
+                      <a:srgbClr val="F5F7FB"/>
+                    </a:solidFill>
+                  </a:tcPr>
+                </a:tc>
+                <a:tc>
+                  <a:txBody>
+                    <a:bodyPr lIns="60000" rIns="60000" tIns="30000" bIns="30000" wrap="square"/>
+                    <a:lstStyle/>
+                    <a:p>
+                      <a:pPr algn="l"/>
+                      <a:r>
+                        <a:rPr sz="1100">
+                          <a:solidFill>
+                            <a:srgbClr val="1F2A44"/>
+                          </a:solidFill>
+                          <a:latin typeface="Calibri"/>
+                        </a:rPr>
+                        <a:t>Promote to a skill or subagent — the agent can apply judgment regex cannot.</a:t>
+                      </a:r>
+                    </a:p>
+                  </a:txBody>
+                  <a:tcPr>
+                    <a:solidFill>
+                      <a:srgbClr val="F5F7FB"/>
+                    </a:solidFill>
+                  </a:tcPr>
+                </a:tc>
+              </a:tr>
+            </a:tbl>
+          </a:graphicData>
+        </a:graphic>
+      </p:graphicFrame>
+      <p:sp>
+        <p:nvSpPr>
+          <p:cNvPr id="8" name="Rounded Rectangle 7"/>
+          <p:cNvSpPr/>
+          <p:nvPr/>
+        </p:nvSpPr>
+        <p:spPr>
+          <a:xfrm>
+            <a:off x="502920" y="6126480"/>
+            <a:ext cx="11155680" cy="411480"/>
+          </a:xfrm>
+          <a:prstGeom prst="roundRect">
+            <a:avLst/>
+          </a:prstGeom>
+          <a:solidFill>
+            <a:srgbClr val="FEF6E6"/>
+          </a:solidFill>
+          <a:ln w="12700">
+            <a:solidFill>
+              <a:srgbClr val="C1462C"/>
+            </a:solidFill>
+          </a:ln>
+        </p:spPr>
+        <p:style>
+          <a:lnRef idx="1">
+            <a:schemeClr val="accent1"/>
+          </a:lnRef>
+          <a:fillRef idx="3">
+            <a:schemeClr val="accent1"/>
+          </a:fillRef>
+          <a:effectRef idx="2">
+            <a:schemeClr val="accent1"/>
+          </a:effectRef>
+          <a:fontRef idx="minor">
+            <a:schemeClr val="lt1"/>
+          </a:fontRef>
+        </p:style>
+        <p:txBody>
+          <a:bodyPr rtlCol="0" anchor="ctr"/>
+          <a:lstStyle/>
+          <a:p>
+            <a:pPr algn="ctr"/>
+          </a:p>
+        </p:txBody>
+      </p:sp>
+      <p:sp>
+        <p:nvSpPr>
+          <p:cNvPr id="9" name="TextBox 8"/>
+          <p:cNvSpPr txBox="1"/>
+          <p:nvPr/>
+        </p:nvSpPr>
+        <p:spPr>
+          <a:xfrm>
+            <a:off x="777240" y="6172200"/>
+            <a:ext cx="10607040" cy="365760"/>
+          </a:xfrm>
+          <a:prstGeom prst="rect">
+            <a:avLst/>
+          </a:prstGeom>
+          <a:noFill/>
+        </p:spPr>
+        <p:txBody>
+          <a:bodyPr wrap="square" anchor="t" lIns="0" rIns="0" tIns="0" bIns="0">
+            <a:spAutoFit/>
+          </a:bodyPr>
+          <a:lstStyle/>
+          <a:p>
+            <a:pPr algn="l"/>
+            <a:r>
+              <a:rPr sz="1200" b="1">
+                <a:solidFill>
+                  <a:srgbClr val="C1462C"/>
+                </a:solidFill>
+                <a:latin typeface="Calibri"/>
+              </a:rPr>
+              <a:t>All six share the same root cause: picking the layer that feels easy to author rather than the one that fits the task.</a:t>
+            </a:r>
+          </a:p>
+        </p:txBody>
+      </p:sp>
+    </p:spTree>
+  </p:cSld>
+  <p:clrMapOvr>
+    <a:masterClrMapping/>
+  </p:clrMapOvr>
+</p:sld>
+</file>
+
+<file path=ppt/slides/slide14.xml><?xml version="1.0" encoding="utf-8"?>
+<p:sld xmlns:a="http://schemas.openxmlformats.org/drawingml/2006/main" xmlns:p="http://schemas.openxmlformats.org/presentationml/2006/main" xmlns:r="http://schemas.openxmlformats.org/officeDocument/2006/relationships">
+  <p:cSld>
+    <p:bg>
+      <p:bgPr>
+        <a:solidFill>
+          <a:srgbClr val="FFFFFF"/>
+        </a:solidFill>
+        <a:effectLst/>
+      </p:bgPr>
+    </p:bg>
+    <p:spTree>
+      <p:nvGrpSpPr>
+        <p:cNvPr id="1" name=""/>
+        <p:cNvGrpSpPr/>
+        <p:nvPr/>
+      </p:nvGrpSpPr>
+      <p:grpSpPr/>
+      <p:sp>
+        <p:nvSpPr>
+          <p:cNvPr id="2" name="Rectangle 1"/>
+          <p:cNvSpPr/>
+          <p:nvPr/>
+        </p:nvSpPr>
+        <p:spPr>
+          <a:xfrm>
+            <a:off x="0" y="0"/>
+            <a:ext cx="12191695" cy="164592"/>
+          </a:xfrm>
+          <a:prstGeom prst="rect">
+            <a:avLst/>
+          </a:prstGeom>
+          <a:solidFill>
+            <a:srgbClr val="1B55E0"/>
+          </a:solidFill>
+          <a:ln>
+            <a:noFill/>
+          </a:ln>
+        </p:spPr>
+        <p:style>
+          <a:lnRef idx="1">
+            <a:schemeClr val="accent1"/>
+          </a:lnRef>
+          <a:fillRef idx="3">
+            <a:schemeClr val="accent1"/>
+          </a:fillRef>
+          <a:effectRef idx="2">
+            <a:schemeClr val="accent1"/>
+          </a:effectRef>
+          <a:fontRef idx="minor">
+            <a:schemeClr val="lt1"/>
+          </a:fontRef>
+        </p:style>
+        <p:txBody>
+          <a:bodyPr rtlCol="0" anchor="ctr"/>
+          <a:lstStyle/>
+          <a:p>
+            <a:pPr algn="ctr"/>
+          </a:p>
+        </p:txBody>
+      </p:sp>
+      <p:sp>
+        <p:nvSpPr>
+          <p:cNvPr id="3" name="TextBox 2"/>
+          <p:cNvSpPr txBox="1"/>
+          <p:nvPr/>
+        </p:nvSpPr>
+        <p:spPr>
+          <a:xfrm>
+            <a:off x="502920" y="292608"/>
+            <a:ext cx="10058400" cy="548640"/>
+          </a:xfrm>
+          <a:prstGeom prst="rect">
+            <a:avLst/>
+          </a:prstGeom>
+          <a:noFill/>
+        </p:spPr>
+        <p:txBody>
+          <a:bodyPr wrap="square" anchor="t" lIns="0" rIns="0" tIns="0" bIns="0">
+            <a:spAutoFit/>
+          </a:bodyPr>
+          <a:lstStyle/>
+          <a:p>
+            <a:pPr algn="l"/>
+            <a:r>
+              <a:rPr sz="2800" b="1">
+                <a:solidFill>
+                  <a:srgbClr val="1F2A44"/>
+                </a:solidFill>
+                <a:latin typeface="Calibri"/>
+              </a:rPr>
+              <a:t>Recommendation</a:t>
+            </a:r>
+          </a:p>
+        </p:txBody>
+      </p:sp>
+      <p:sp>
+        <p:nvSpPr>
+          <p:cNvPr id="4" name="TextBox 3"/>
+          <p:cNvSpPr txBox="1"/>
+          <p:nvPr/>
+        </p:nvSpPr>
+        <p:spPr>
+          <a:xfrm>
+            <a:off x="502920" y="777240"/>
+            <a:ext cx="10058400" cy="365760"/>
+          </a:xfrm>
+          <a:prstGeom prst="rect">
+            <a:avLst/>
+          </a:prstGeom>
+          <a:noFill/>
+        </p:spPr>
+        <p:txBody>
+          <a:bodyPr wrap="square" anchor="t" lIns="0" rIns="0" tIns="0" bIns="0">
+            <a:spAutoFit/>
+          </a:bodyPr>
+          <a:lstStyle/>
+          <a:p>
+            <a:pPr algn="l"/>
+            <a:r>
+              <a:rPr sz="1400" b="0">
+                <a:solidFill>
+                  <a:srgbClr val="55607A"/>
+                </a:solidFill>
+                <a:latin typeface="Calibri"/>
+              </a:rPr>
+              <a:t>What this means for how the team writes things going forward.</a:t>
+            </a:r>
+          </a:p>
+        </p:txBody>
+      </p:sp>
+      <p:sp>
+        <p:nvSpPr>
+          <p:cNvPr id="5" name="TextBox 4"/>
+          <p:cNvSpPr txBox="1"/>
+          <p:nvPr/>
+        </p:nvSpPr>
+        <p:spPr>
+          <a:xfrm>
+            <a:off x="11430000" y="6446520"/>
+            <a:ext cx="640080" cy="274320"/>
+          </a:xfrm>
+          <a:prstGeom prst="rect">
+            <a:avLst/>
+          </a:prstGeom>
+          <a:noFill/>
+        </p:spPr>
+        <p:txBody>
+          <a:bodyPr wrap="square" anchor="t" lIns="0" rIns="0" tIns="0" bIns="0">
+            <a:spAutoFit/>
+          </a:bodyPr>
+          <a:lstStyle/>
+          <a:p>
+            <a:pPr algn="r"/>
+            <a:r>
+              <a:rPr sz="1000" b="0">
+                <a:solidFill>
+                  <a:srgbClr val="55607A"/>
+                </a:solidFill>
+                <a:latin typeface="Calibri"/>
+              </a:rPr>
+              <a:t>14</a:t>
+            </a:r>
+          </a:p>
+        </p:txBody>
+      </p:sp>
+      <p:sp>
+        <p:nvSpPr>
+          <p:cNvPr id="6" name="Rectangle 5"/>
+          <p:cNvSpPr/>
+          <p:nvPr/>
+        </p:nvSpPr>
+        <p:spPr>
+          <a:xfrm>
+            <a:off x="502920" y="6400800"/>
+            <a:ext cx="11155680" cy="18288"/>
+          </a:xfrm>
+          <a:prstGeom prst="rect">
+            <a:avLst/>
+          </a:prstGeom>
+          <a:solidFill>
+            <a:srgbClr val="E3E7EF"/>
+          </a:solidFill>
+          <a:ln>
+            <a:noFill/>
+          </a:ln>
+        </p:spPr>
+        <p:style>
+          <a:lnRef idx="1">
+            <a:schemeClr val="accent1"/>
+          </a:lnRef>
+          <a:fillRef idx="3">
+            <a:schemeClr val="accent1"/>
+          </a:fillRef>
+          <a:effectRef idx="2">
+            <a:schemeClr val="accent1"/>
+          </a:effectRef>
+          <a:fontRef idx="minor">
+            <a:schemeClr val="lt1"/>
+          </a:fontRef>
+        </p:style>
+        <p:txBody>
+          <a:bodyPr rtlCol="0" anchor="ctr"/>
+          <a:lstStyle/>
+          <a:p>
+            <a:pPr algn="ctr"/>
+          </a:p>
+        </p:txBody>
+      </p:sp>
+      <p:sp>
+        <p:nvSpPr>
+          <p:cNvPr id="7" name="TextBox 6"/>
+          <p:cNvSpPr txBox="1"/>
+          <p:nvPr/>
+        </p:nvSpPr>
+        <p:spPr>
+          <a:xfrm>
+            <a:off x="502920" y="1280160"/>
+            <a:ext cx="11155680" cy="365760"/>
+          </a:xfrm>
+          <a:prstGeom prst="rect">
+            <a:avLst/>
+          </a:prstGeom>
+          <a:noFill/>
+        </p:spPr>
+        <p:txBody>
+          <a:bodyPr wrap="square" anchor="t" lIns="0" rIns="0" tIns="0" bIns="0">
+            <a:spAutoFit/>
+          </a:bodyPr>
+          <a:lstStyle/>
+          <a:p>
+            <a:pPr algn="l"/>
+            <a:r>
+              <a:rPr sz="1600" b="1">
+                <a:solidFill>
+                  <a:srgbClr val="1440A8"/>
+                </a:solidFill>
+                <a:latin typeface="Calibri"/>
+              </a:rPr>
+              <a:t>Default rule</a:t>
+            </a:r>
+          </a:p>
+        </p:txBody>
+      </p:sp>
+      <p:sp>
+        <p:nvSpPr>
+          <p:cNvPr id="8" name="Rounded Rectangle 7"/>
+          <p:cNvSpPr/>
+          <p:nvPr/>
+        </p:nvSpPr>
+        <p:spPr>
+          <a:xfrm>
+            <a:off x="502920" y="1645920"/>
+            <a:ext cx="11155680" cy="640080"/>
+          </a:xfrm>
+          <a:prstGeom prst="roundRect">
+            <a:avLst/>
+          </a:prstGeom>
+          <a:solidFill>
+            <a:srgbClr val="E9F5EE"/>
+          </a:solidFill>
+          <a:ln w="15875">
+            <a:solidFill>
+              <a:srgbClr val="1F8055"/>
+            </a:solidFill>
+          </a:ln>
+        </p:spPr>
+        <p:style>
+          <a:lnRef idx="1">
+            <a:schemeClr val="accent1"/>
+          </a:lnRef>
+          <a:fillRef idx="3">
+            <a:schemeClr val="accent1"/>
+          </a:fillRef>
+          <a:effectRef idx="2">
+            <a:schemeClr val="accent1"/>
+          </a:effectRef>
+          <a:fontRef idx="minor">
+            <a:schemeClr val="lt1"/>
+          </a:fontRef>
+        </p:style>
+        <p:txBody>
+          <a:bodyPr rtlCol="0" anchor="ctr"/>
+          <a:lstStyle/>
+          <a:p>
+            <a:pPr algn="ctr"/>
+          </a:p>
+        </p:txBody>
+      </p:sp>
+      <p:sp>
+        <p:nvSpPr>
+          <p:cNvPr id="9" name="TextBox 8"/>
+          <p:cNvSpPr txBox="1"/>
+          <p:nvPr/>
+        </p:nvSpPr>
+        <p:spPr>
+          <a:xfrm>
+            <a:off x="777240" y="1737360"/>
+            <a:ext cx="10607040" cy="502920"/>
+          </a:xfrm>
+          <a:prstGeom prst="rect">
+            <a:avLst/>
+          </a:prstGeom>
+          <a:noFill/>
+        </p:spPr>
+        <p:txBody>
+          <a:bodyPr wrap="square" anchor="t" lIns="0" rIns="0" tIns="0" bIns="0">
+            <a:spAutoFit/>
+          </a:bodyPr>
+          <a:lstStyle/>
+          <a:p>
+            <a:pPr algn="l"/>
+            <a:r>
+              <a:rPr sz="1300" b="1">
+                <a:solidFill>
+                  <a:srgbClr val="1F2A44"/>
+                </a:solidFill>
+                <a:latin typeface="Calibri"/>
+              </a:rPr>
+              <a:t>If you can write a script, write the script. Promote to a skill only when judgment is required. Promote to a subagent only when context isolation or tool guardrails are the constraint. Reach for RAG only when corpus size or volatility forces it.</a:t>
+            </a:r>
+          </a:p>
+        </p:txBody>
+      </p:sp>
+      <p:sp>
+        <p:nvSpPr>
+          <p:cNvPr id="10" name="TextBox 9"/>
+          <p:cNvSpPr txBox="1"/>
+          <p:nvPr/>
+        </p:nvSpPr>
+        <p:spPr>
+          <a:xfrm>
+            <a:off x="502920" y="2514600"/>
+            <a:ext cx="11155680" cy="365760"/>
+          </a:xfrm>
+          <a:prstGeom prst="rect">
+            <a:avLst/>
+          </a:prstGeom>
+          <a:noFill/>
+        </p:spPr>
+        <p:txBody>
+          <a:bodyPr wrap="square" anchor="t" lIns="0" rIns="0" tIns="0" bIns="0">
+            <a:spAutoFit/>
+          </a:bodyPr>
+          <a:lstStyle/>
+          <a:p>
+            <a:pPr algn="l"/>
+            <a:r>
+              <a:rPr sz="1600" b="1">
+                <a:solidFill>
+                  <a:srgbClr val="1440A8"/>
+                </a:solidFill>
+                <a:latin typeface="Calibri"/>
+              </a:rPr>
+              <a:t>Four rules of thumb that follow</a:t>
+            </a:r>
+          </a:p>
+        </p:txBody>
+      </p:sp>
+      <p:sp>
+        <p:nvSpPr>
+          <p:cNvPr id="11" name="TextBox 10"/>
+          <p:cNvSpPr txBox="1"/>
+          <p:nvPr/>
+        </p:nvSpPr>
+        <p:spPr>
+          <a:xfrm>
+            <a:off x="640080" y="2880360"/>
+            <a:ext cx="10972800" cy="2194560"/>
+          </a:xfrm>
+          <a:prstGeom prst="rect">
+            <a:avLst/>
+          </a:prstGeom>
+          <a:noFill/>
+        </p:spPr>
+        <p:txBody>
+          <a:bodyPr wrap="square" lIns="0" rIns="0" tIns="0" bIns="0">
+            <a:spAutoFit/>
+          </a:bodyPr>
+          <a:lstStyle/>
+          <a:p>
+            <a:pPr algn="l">
+              <a:spcAft>
+                <a:spcPts val="500"/>
+              </a:spcAft>
+            </a:pPr>
+            <a:r>
               <a:rPr sz="1300">
                 <a:solidFill>
                   <a:srgbClr val="1F2A44"/>
                 </a:solidFill>
                 <a:latin typeface="Calibri"/>
               </a:rPr>
-              <a:t>•  Reserve RAG for live, queryable, evolving corpora — do not use it as a staleness fix for skills.</a:t>
+              <a:t>•  Fewer skills, sharper skills. Every skill should answer "what judgment am I teaching here?" — if the answer is a sequence of steps, write a script.</a:t>
+            </a:r>
+          </a:p>
+          <a:p>
+            <a:pPr algn="l">
+              <a:spcAft>
+                <a:spcPts val="500"/>
+              </a:spcAft>
+            </a:pPr>
+            <a:r>
+              <a:rPr sz="1300">
+                <a:solidFill>
+                  <a:srgbClr val="1F2A44"/>
+                </a:solidFill>
+                <a:latin typeface="Calibri"/>
+              </a:rPr>
+              <a:t>•  Subagents earn their slot when context isolation OR tool scoping is the actual constraint. Otherwise they add indirection without value.</a:t>
+            </a:r>
+          </a:p>
+          <a:p>
+            <a:pPr algn="l">
+              <a:spcAft>
+                <a:spcPts val="500"/>
+              </a:spcAft>
+            </a:pPr>
+            <a:r>
+              <a:rPr sz="1300">
+                <a:solidFill>
+                  <a:srgbClr val="1F2A44"/>
+                </a:solidFill>
+                <a:latin typeface="Calibri"/>
+              </a:rPr>
+              <a:t>•  Treat skills + subagent definitions like code. Version with the repo, link to live paths, add a CI test that catches drift.</a:t>
+            </a:r>
+          </a:p>
+          <a:p>
+            <a:pPr algn="l">
+              <a:spcAft>
+                <a:spcPts val="500"/>
+              </a:spcAft>
+            </a:pPr>
+            <a:r>
+              <a:rPr sz="1300">
+                <a:solidFill>
+                  <a:srgbClr val="1F2A44"/>
+                </a:solidFill>
+                <a:latin typeface="Calibri"/>
+              </a:rPr>
+              <a:t>•  RAG only when no API exists. If data lives in a DB / catalog / graph, query it directly; RAG is the option of last resort for unstructured corpora.</a:t>
+            </a:r>
+          </a:p>
+        </p:txBody>
+      </p:sp>
+      <p:sp>
+        <p:nvSpPr>
+          <p:cNvPr id="12" name="TextBox 11"/>
+          <p:cNvSpPr txBox="1"/>
+          <p:nvPr/>
+        </p:nvSpPr>
+        <p:spPr>
+          <a:xfrm>
+            <a:off x="502920" y="5212080"/>
+            <a:ext cx="11155680" cy="365760"/>
+          </a:xfrm>
+          <a:prstGeom prst="rect">
+            <a:avLst/>
+          </a:prstGeom>
+          <a:noFill/>
+        </p:spPr>
+        <p:txBody>
+          <a:bodyPr wrap="square" anchor="t" lIns="0" rIns="0" tIns="0" bIns="0">
+            <a:spAutoFit/>
+          </a:bodyPr>
+          <a:lstStyle/>
+          <a:p>
+            <a:pPr algn="l"/>
+            <a:r>
+              <a:rPr sz="1600" b="1">
+                <a:solidFill>
+                  <a:srgbClr val="1440A8"/>
+                </a:solidFill>
+                <a:latin typeface="Calibri"/>
+              </a:rPr>
+              <a:t>What this means for our work</a:t>
+            </a:r>
+          </a:p>
+        </p:txBody>
+      </p:sp>
+      <p:sp>
+        <p:nvSpPr>
+          <p:cNvPr id="13" name="TextBox 12"/>
+          <p:cNvSpPr txBox="1"/>
+          <p:nvPr/>
+        </p:nvSpPr>
+        <p:spPr>
+          <a:xfrm>
+            <a:off x="640080" y="5577840"/>
+            <a:ext cx="10972800" cy="914400"/>
+          </a:xfrm>
+          <a:prstGeom prst="rect">
+            <a:avLst/>
+          </a:prstGeom>
+          <a:noFill/>
+        </p:spPr>
+        <p:txBody>
+          <a:bodyPr wrap="square" lIns="0" rIns="0" tIns="0" bIns="0">
+            <a:spAutoFit/>
+          </a:bodyPr>
+          <a:lstStyle/>
+          <a:p>
+            <a:pPr algn="l">
+              <a:spcAft>
+                <a:spcPts val="500"/>
+              </a:spcAft>
+            </a:pPr>
+            <a:r>
+              <a:rPr sz="1300">
+                <a:solidFill>
+                  <a:srgbClr val="1F2A44"/>
+                </a:solidFill>
+                <a:latin typeface="Calibri"/>
+              </a:rPr>
+              <a:t>•  Audit existing skills + subagents — most skills demote to scripts; most subagents either tighten their tool allowlist or merge back into a skill.</a:t>
+            </a:r>
+          </a:p>
+          <a:p>
+            <a:pPr algn="l">
+              <a:spcAft>
+                <a:spcPts val="500"/>
+              </a:spcAft>
+            </a:pPr>
+            <a:r>
+              <a:rPr sz="1300">
+                <a:solidFill>
+                  <a:srgbClr val="1F2A44"/>
+                </a:solidFill>
+                <a:latin typeface="Calibri"/>
+              </a:rPr>
+              <a:t>•  Keep growing the script library — cheapest, most durable, loudest on drift.</a:t>
             </a:r>
           </a:p>
         </p:txBody>
@@ -6197,7 +8107,7 @@
                 </a:solidFill>
                 <a:latin typeface="Calibri"/>
               </a:rPr>
-              <a:t>Three Approaches at a Glance</a:t>
+              <a:t>Four Approaches at a Glance</a:t>
             </a:r>
           </a:p>
         </p:txBody>
@@ -6232,7 +8142,7 @@
                 </a:solidFill>
                 <a:latin typeface="Calibri"/>
               </a:rPr>
-              <a:t>Same goal — giving the agent domain knowledge. Different shapes of knowledge.</a:t>
+              <a:t>Same goal — giving the agent capability or knowledge. Four different shapes.</a:t>
             </a:r>
           </a:p>
         </p:txBody>
@@ -6324,8 +8234,8 @@
           <p:nvPr/>
         </p:nvGraphicFramePr>
         <p:xfrm>
-          <a:off x="502920" y="1463040"/>
-          <a:ext cx="11155680" cy="3291840"/>
+          <a:off x="502920" y="1417320"/>
+          <a:ext cx="11155680" cy="4023360"/>
         </p:xfrm>
         <a:graphic>
           <a:graphicData uri="http://schemas.openxmlformats.org/drawingml/2006/table">
@@ -6334,12 +8244,12 @@
                 <a:tableStyleId>{5C22544A-7EE6-4342-B048-85BDC9FD1C3A}</a:tableStyleId>
               </a:tblPr>
               <a:tblGrid>
-                <a:gridCol w="2377440"/>
-                <a:gridCol w="3657600"/>
+                <a:gridCol w="2194560"/>
+                <a:gridCol w="3840480"/>
                 <a:gridCol w="2377440"/>
                 <a:gridCol w="2743200"/>
               </a:tblGrid>
-              <a:tr h="822960">
+              <a:tr h="804672">
                 <a:tc>
                   <a:txBody>
                     <a:bodyPr lIns="60000" rIns="60000" tIns="40000" bIns="40000"/>
@@ -6347,7 +8257,7 @@
                     <a:p>
                       <a:pPr algn="l"/>
                       <a:r>
-                        <a:rPr sz="1300" b="1">
+                        <a:rPr sz="1200" b="1">
                           <a:solidFill>
                             <a:srgbClr val="FFFFFF"/>
                           </a:solidFill>
@@ -6370,13 +8280,13 @@
                     <a:p>
                       <a:pPr algn="l"/>
                       <a:r>
-                        <a:rPr sz="1300" b="1">
+                        <a:rPr sz="1200" b="1">
                           <a:solidFill>
                             <a:srgbClr val="FFFFFF"/>
                           </a:solidFill>
                           <a:latin typeface="Calibri"/>
                         </a:rPr>
-                        <a:t>Shape of knowledge</a:t>
+                        <a:t>Shape</a:t>
                       </a:r>
                     </a:p>
                   </a:txBody>
@@ -6393,7 +8303,7 @@
                     <a:p>
                       <a:pPr algn="l"/>
                       <a:r>
-                        <a:rPr sz="1300" b="1">
+                        <a:rPr sz="1200" b="1">
                           <a:solidFill>
                             <a:srgbClr val="FFFFFF"/>
                           </a:solidFill>
@@ -6416,7 +8326,7 @@
                     <a:p>
                       <a:pPr algn="l"/>
                       <a:r>
-                        <a:rPr sz="1300" b="1">
+                        <a:rPr sz="1200" b="1">
                           <a:solidFill>
                             <a:srgbClr val="FFFFFF"/>
                           </a:solidFill>
@@ -6428,12 +8338,12 @@
                   </a:txBody>
                   <a:tcPr>
                     <a:solidFill>
-                      <a:srgbClr val="1B55E0"/>
+                      <a:srgbClr val="6B3DB5"/>
                     </a:solidFill>
                   </a:tcPr>
                 </a:tc>
               </a:tr>
-              <a:tr h="822960">
+              <a:tr h="804672">
                 <a:tc>
                   <a:txBody>
                     <a:bodyPr lIns="60000" rIns="60000" tIns="30000" bIns="30000" wrap="square"/>
@@ -6441,7 +8351,7 @@
                     <a:p>
                       <a:pPr algn="l"/>
                       <a:r>
-                        <a:rPr sz="1200">
+                        <a:rPr sz="1100">
                           <a:solidFill>
                             <a:srgbClr val="1F2A44"/>
                           </a:solidFill>
@@ -6464,7 +8374,7 @@
                     <a:p>
                       <a:pPr algn="l"/>
                       <a:r>
-                        <a:rPr sz="1200">
+                        <a:rPr sz="1100">
                           <a:solidFill>
                             <a:srgbClr val="1F2A44"/>
                           </a:solidFill>
@@ -6487,7 +8397,7 @@
                     <a:p>
                       <a:pPr algn="l"/>
                       <a:r>
-                        <a:rPr sz="1200">
+                        <a:rPr sz="1100">
                           <a:solidFill>
                             <a:srgbClr val="1F2A44"/>
                           </a:solidFill>
@@ -6510,7 +8420,7 @@
                     <a:p>
                       <a:pPr algn="l"/>
                       <a:r>
-                        <a:rPr sz="1200">
+                        <a:rPr sz="1100">
                           <a:solidFill>
                             <a:srgbClr val="1F2A44"/>
                           </a:solidFill>
@@ -6527,7 +8437,7 @@
                   </a:tcPr>
                 </a:tc>
               </a:tr>
-              <a:tr h="822960">
+              <a:tr h="804672">
                 <a:tc>
                   <a:txBody>
                     <a:bodyPr lIns="60000" rIns="60000" tIns="30000" bIns="30000" wrap="square"/>
@@ -6535,7 +8445,7 @@
                     <a:p>
                       <a:pPr algn="l"/>
                       <a:r>
-                        <a:rPr sz="1200">
+                        <a:rPr sz="1100">
                           <a:solidFill>
                             <a:srgbClr val="1F2A44"/>
                           </a:solidFill>
@@ -6558,13 +8468,13 @@
                     <a:p>
                       <a:pPr algn="l"/>
                       <a:r>
-                        <a:rPr sz="1200">
+                        <a:rPr sz="1100">
                           <a:solidFill>
                             <a:srgbClr val="1F2A44"/>
                           </a:solidFill>
                           <a:latin typeface="Calibri"/>
                         </a:rPr>
-                        <a:t>Pattern of decisions, composable building blocks</a:t>
+                        <a:t>Pattern of decisions, composable building blocks merged into the calling agent's prompt</a:t>
                       </a:r>
                     </a:p>
                   </a:txBody>
@@ -6581,13 +8491,13 @@
                     <a:p>
                       <a:pPr algn="l"/>
                       <a:r>
-                        <a:rPr sz="1200">
+                        <a:rPr sz="1100">
                           <a:solidFill>
                             <a:srgbClr val="1F2A44"/>
                           </a:solidFill>
                           <a:latin typeface="Calibri"/>
                         </a:rPr>
-                        <a:t>Probabilistic at selection — fixed once selected</a:t>
+                        <a:t>Probabilistic at selection — fixed once injected</a:t>
                       </a:r>
                     </a:p>
                   </a:txBody>
@@ -6604,13 +8514,13 @@
                     <a:p>
                       <a:pPr algn="l"/>
                       <a:r>
-                        <a:rPr sz="1200">
+                        <a:rPr sz="1100">
                           <a:solidFill>
                             <a:srgbClr val="1F2A44"/>
                           </a:solidFill>
                           <a:latin typeface="Calibri"/>
                         </a:rPr>
-                        <a:t>Tasks needing judgment + composition</a:t>
+                        <a:t>Judgment + composition inside the main thread</a:t>
                       </a:r>
                     </a:p>
                   </a:txBody>
@@ -6621,7 +8531,7 @@
                   </a:tcPr>
                 </a:tc>
               </a:tr>
-              <a:tr h="822960">
+              <a:tr h="804672">
                 <a:tc>
                   <a:txBody>
                     <a:bodyPr lIns="60000" rIns="60000" tIns="30000" bIns="30000" wrap="square"/>
@@ -6629,13 +8539,13 @@
                     <a:p>
                       <a:pPr algn="l"/>
                       <a:r>
-                        <a:rPr sz="1200">
+                        <a:rPr sz="1100">
                           <a:solidFill>
                             <a:srgbClr val="1F2A44"/>
                           </a:solidFill>
                           <a:latin typeface="Calibri"/>
                         </a:rPr>
-                        <a:t>RAG / knowledge base</a:t>
+                        <a:t>Subagent (isolated session)</a:t>
                       </a:r>
                     </a:p>
                   </a:txBody>
@@ -6652,13 +8562,13 @@
                     <a:p>
                       <a:pPr algn="l"/>
                       <a:r>
-                        <a:rPr sz="1200">
+                        <a:rPr sz="1100">
                           <a:solidFill>
                             <a:srgbClr val="1F2A44"/>
                           </a:solidFill>
                           <a:latin typeface="Calibri"/>
                         </a:rPr>
-                        <a:t>Large corpus indexed for similarity recall</a:t>
+                        <a:t>Specialist with its own context, tool allowlist, and model — invoked as a tool</a:t>
                       </a:r>
                     </a:p>
                   </a:txBody>
@@ -6675,13 +8585,13 @@
                     <a:p>
                       <a:pPr algn="l"/>
                       <a:r>
-                        <a:rPr sz="1200">
+                        <a:rPr sz="1100">
                           <a:solidFill>
                             <a:srgbClr val="1F2A44"/>
                           </a:solidFill>
                           <a:latin typeface="Calibri"/>
                         </a:rPr>
-                        <a:t>Probabilistic at retrieval (most uncertain of the three)</a:t>
+                        <a:t>Probabilistic at selection AND inside the subagent's own decisions</a:t>
                       </a:r>
                     </a:p>
                   </a:txBody>
@@ -6698,7 +8608,101 @@
                     <a:p>
                       <a:pPr algn="l"/>
                       <a:r>
-                        <a:rPr sz="1200">
+                        <a:rPr sz="1100">
+                          <a:solidFill>
+                            <a:srgbClr val="1F2A44"/>
+                          </a:solidFill>
+                          <a:latin typeface="Calibri"/>
+                        </a:rPr>
+                        <a:t>Heavy intermediate work, tool guardrails, parallelism</a:t>
+                      </a:r>
+                    </a:p>
+                  </a:txBody>
+                  <a:tcPr>
+                    <a:solidFill>
+                      <a:srgbClr val="FFFFFF"/>
+                    </a:solidFill>
+                  </a:tcPr>
+                </a:tc>
+              </a:tr>
+              <a:tr h="804672">
+                <a:tc>
+                  <a:txBody>
+                    <a:bodyPr lIns="60000" rIns="60000" tIns="30000" bIns="30000" wrap="square"/>
+                    <a:lstStyle/>
+                    <a:p>
+                      <a:pPr algn="l"/>
+                      <a:r>
+                        <a:rPr sz="1100">
+                          <a:solidFill>
+                            <a:srgbClr val="1F2A44"/>
+                          </a:solidFill>
+                          <a:latin typeface="Calibri"/>
+                        </a:rPr>
+                        <a:t>RAG / knowledge base</a:t>
+                      </a:r>
+                    </a:p>
+                  </a:txBody>
+                  <a:tcPr>
+                    <a:solidFill>
+                      <a:srgbClr val="F5F7FB"/>
+                    </a:solidFill>
+                  </a:tcPr>
+                </a:tc>
+                <a:tc>
+                  <a:txBody>
+                    <a:bodyPr lIns="60000" rIns="60000" tIns="30000" bIns="30000" wrap="square"/>
+                    <a:lstStyle/>
+                    <a:p>
+                      <a:pPr algn="l"/>
+                      <a:r>
+                        <a:rPr sz="1100">
+                          <a:solidFill>
+                            <a:srgbClr val="1F2A44"/>
+                          </a:solidFill>
+                          <a:latin typeface="Calibri"/>
+                        </a:rPr>
+                        <a:t>Large corpus indexed for similarity recall</a:t>
+                      </a:r>
+                    </a:p>
+                  </a:txBody>
+                  <a:tcPr>
+                    <a:solidFill>
+                      <a:srgbClr val="F5F7FB"/>
+                    </a:solidFill>
+                  </a:tcPr>
+                </a:tc>
+                <a:tc>
+                  <a:txBody>
+                    <a:bodyPr lIns="60000" rIns="60000" tIns="30000" bIns="30000" wrap="square"/>
+                    <a:lstStyle/>
+                    <a:p>
+                      <a:pPr algn="l"/>
+                      <a:r>
+                        <a:rPr sz="1100">
+                          <a:solidFill>
+                            <a:srgbClr val="1F2A44"/>
+                          </a:solidFill>
+                          <a:latin typeface="Calibri"/>
+                        </a:rPr>
+                        <a:t>Probabilistic at retrieval (most uncertain of the four)</a:t>
+                      </a:r>
+                    </a:p>
+                  </a:txBody>
+                  <a:tcPr>
+                    <a:solidFill>
+                      <a:srgbClr val="F5F7FB"/>
+                    </a:solidFill>
+                  </a:tcPr>
+                </a:tc>
+                <a:tc>
+                  <a:txBody>
+                    <a:bodyPr lIns="60000" rIns="60000" tIns="30000" bIns="30000" wrap="square"/>
+                    <a:lstStyle/>
+                    <a:p>
+                      <a:pPr algn="l"/>
+                      <a:r>
+                        <a:rPr sz="1100">
                           <a:solidFill>
                             <a:srgbClr val="1F2A44"/>
                           </a:solidFill>
@@ -6710,7 +8714,7 @@
                   </a:txBody>
                   <a:tcPr>
                     <a:solidFill>
-                      <a:srgbClr val="FFFFFF"/>
+                      <a:srgbClr val="F5F7FB"/>
                     </a:solidFill>
                   </a:tcPr>
                 </a:tc>
@@ -6727,8 +8731,216 @@
         </p:nvSpPr>
         <p:spPr>
           <a:xfrm>
-            <a:off x="502920" y="5120640"/>
-            <a:ext cx="11155680" cy="914400"/>
+            <a:off x="502920" y="5577840"/>
+            <a:ext cx="1280160" cy="292608"/>
+          </a:xfrm>
+          <a:prstGeom prst="roundRect">
+            <a:avLst/>
+          </a:prstGeom>
+          <a:solidFill>
+            <a:srgbClr val="1F8055"/>
+          </a:solidFill>
+          <a:ln>
+            <a:noFill/>
+          </a:ln>
+        </p:spPr>
+        <p:style>
+          <a:lnRef idx="1">
+            <a:schemeClr val="accent1"/>
+          </a:lnRef>
+          <a:fillRef idx="3">
+            <a:schemeClr val="accent1"/>
+          </a:fillRef>
+          <a:effectRef idx="2">
+            <a:schemeClr val="accent1"/>
+          </a:effectRef>
+          <a:fontRef idx="minor">
+            <a:schemeClr val="lt1"/>
+          </a:fontRef>
+        </p:style>
+        <p:txBody>
+          <a:bodyPr rtlCol="0" anchor="ctr" lIns="80000" rIns="80000" tIns="20000" bIns="20000"/>
+          <a:lstStyle/>
+          <a:p>
+            <a:pPr algn="ctr"/>
+            <a:r>
+              <a:rPr sz="1000" b="1">
+                <a:solidFill>
+                  <a:srgbClr val="FFFFFF"/>
+                </a:solidFill>
+                <a:latin typeface="Calibri"/>
+              </a:rPr>
+              <a:t>SCRIPT</a:t>
+            </a:r>
+          </a:p>
+        </p:txBody>
+      </p:sp>
+      <p:sp>
+        <p:nvSpPr>
+          <p:cNvPr id="9" name="Rounded Rectangle 8"/>
+          <p:cNvSpPr/>
+          <p:nvPr/>
+        </p:nvSpPr>
+        <p:spPr>
+          <a:xfrm>
+            <a:off x="1874519" y="5577840"/>
+            <a:ext cx="1280160" cy="292608"/>
+          </a:xfrm>
+          <a:prstGeom prst="roundRect">
+            <a:avLst/>
+          </a:prstGeom>
+          <a:solidFill>
+            <a:srgbClr val="C26E1A"/>
+          </a:solidFill>
+          <a:ln>
+            <a:noFill/>
+          </a:ln>
+        </p:spPr>
+        <p:style>
+          <a:lnRef idx="1">
+            <a:schemeClr val="accent1"/>
+          </a:lnRef>
+          <a:fillRef idx="3">
+            <a:schemeClr val="accent1"/>
+          </a:fillRef>
+          <a:effectRef idx="2">
+            <a:schemeClr val="accent1"/>
+          </a:effectRef>
+          <a:fontRef idx="minor">
+            <a:schemeClr val="lt1"/>
+          </a:fontRef>
+        </p:style>
+        <p:txBody>
+          <a:bodyPr rtlCol="0" anchor="ctr" lIns="80000" rIns="80000" tIns="20000" bIns="20000"/>
+          <a:lstStyle/>
+          <a:p>
+            <a:pPr algn="ctr"/>
+            <a:r>
+              <a:rPr sz="1000" b="1">
+                <a:solidFill>
+                  <a:srgbClr val="FFFFFF"/>
+                </a:solidFill>
+                <a:latin typeface="Calibri"/>
+              </a:rPr>
+              <a:t>SKILL</a:t>
+            </a:r>
+          </a:p>
+        </p:txBody>
+      </p:sp>
+      <p:sp>
+        <p:nvSpPr>
+          <p:cNvPr id="10" name="Rounded Rectangle 9"/>
+          <p:cNvSpPr/>
+          <p:nvPr/>
+        </p:nvSpPr>
+        <p:spPr>
+          <a:xfrm>
+            <a:off x="3246120" y="5577840"/>
+            <a:ext cx="1463040" cy="292608"/>
+          </a:xfrm>
+          <a:prstGeom prst="roundRect">
+            <a:avLst/>
+          </a:prstGeom>
+          <a:solidFill>
+            <a:srgbClr val="6B3DB5"/>
+          </a:solidFill>
+          <a:ln>
+            <a:noFill/>
+          </a:ln>
+        </p:spPr>
+        <p:style>
+          <a:lnRef idx="1">
+            <a:schemeClr val="accent1"/>
+          </a:lnRef>
+          <a:fillRef idx="3">
+            <a:schemeClr val="accent1"/>
+          </a:fillRef>
+          <a:effectRef idx="2">
+            <a:schemeClr val="accent1"/>
+          </a:effectRef>
+          <a:fontRef idx="minor">
+            <a:schemeClr val="lt1"/>
+          </a:fontRef>
+        </p:style>
+        <p:txBody>
+          <a:bodyPr rtlCol="0" anchor="ctr" lIns="80000" rIns="80000" tIns="20000" bIns="20000"/>
+          <a:lstStyle/>
+          <a:p>
+            <a:pPr algn="ctr"/>
+            <a:r>
+              <a:rPr sz="1000" b="1">
+                <a:solidFill>
+                  <a:srgbClr val="FFFFFF"/>
+                </a:solidFill>
+                <a:latin typeface="Calibri"/>
+              </a:rPr>
+              <a:t>SUBAGENT</a:t>
+            </a:r>
+          </a:p>
+        </p:txBody>
+      </p:sp>
+      <p:sp>
+        <p:nvSpPr>
+          <p:cNvPr id="11" name="Rounded Rectangle 10"/>
+          <p:cNvSpPr/>
+          <p:nvPr/>
+        </p:nvSpPr>
+        <p:spPr>
+          <a:xfrm>
+            <a:off x="4800600" y="5577840"/>
+            <a:ext cx="1280160" cy="292608"/>
+          </a:xfrm>
+          <a:prstGeom prst="roundRect">
+            <a:avLst/>
+          </a:prstGeom>
+          <a:solidFill>
+            <a:srgbClr val="1B55E0"/>
+          </a:solidFill>
+          <a:ln>
+            <a:noFill/>
+          </a:ln>
+        </p:spPr>
+        <p:style>
+          <a:lnRef idx="1">
+            <a:schemeClr val="accent1"/>
+          </a:lnRef>
+          <a:fillRef idx="3">
+            <a:schemeClr val="accent1"/>
+          </a:fillRef>
+          <a:effectRef idx="2">
+            <a:schemeClr val="accent1"/>
+          </a:effectRef>
+          <a:fontRef idx="minor">
+            <a:schemeClr val="lt1"/>
+          </a:fontRef>
+        </p:style>
+        <p:txBody>
+          <a:bodyPr rtlCol="0" anchor="ctr" lIns="80000" rIns="80000" tIns="20000" bIns="20000"/>
+          <a:lstStyle/>
+          <a:p>
+            <a:pPr algn="ctr"/>
+            <a:r>
+              <a:rPr sz="1000" b="1">
+                <a:solidFill>
+                  <a:srgbClr val="FFFFFF"/>
+                </a:solidFill>
+                <a:latin typeface="Calibri"/>
+              </a:rPr>
+              <a:t>RAG</a:t>
+            </a:r>
+          </a:p>
+        </p:txBody>
+      </p:sp>
+      <p:sp>
+        <p:nvSpPr>
+          <p:cNvPr id="12" name="Rounded Rectangle 11"/>
+          <p:cNvSpPr/>
+          <p:nvPr/>
+        </p:nvSpPr>
+        <p:spPr>
+          <a:xfrm>
+            <a:off x="502920" y="5989320"/>
+            <a:ext cx="11155680" cy="502920"/>
           </a:xfrm>
           <a:prstGeom prst="roundRect">
             <a:avLst/>
@@ -6766,14 +8978,14 @@
       </p:sp>
       <p:sp>
         <p:nvSpPr>
-          <p:cNvPr id="9" name="TextBox 8"/>
+          <p:cNvPr id="13" name="TextBox 12"/>
           <p:cNvSpPr txBox="1"/>
           <p:nvPr/>
         </p:nvSpPr>
         <p:spPr>
           <a:xfrm>
-            <a:off x="777240" y="5257800"/>
-            <a:ext cx="10607040" cy="365760"/>
+            <a:off x="685800" y="6080760"/>
+            <a:ext cx="10835640" cy="365760"/>
           </a:xfrm>
           <a:prstGeom prst="rect">
             <a:avLst/>
@@ -6788,48 +9000,13 @@
           <a:p>
             <a:pPr algn="l"/>
             <a:r>
-              <a:rPr sz="1400" b="1">
+              <a:rPr sz="1200" b="1">
                 <a:solidFill>
                   <a:srgbClr val="1440A8"/>
                 </a:solidFill>
                 <a:latin typeface="Calibri"/>
               </a:rPr>
-              <a:t>The lens that resolves the rest of the deck</a:t>
-            </a:r>
-          </a:p>
-        </p:txBody>
-      </p:sp>
-      <p:sp>
-        <p:nvSpPr>
-          <p:cNvPr id="10" name="TextBox 9"/>
-          <p:cNvSpPr txBox="1"/>
-          <p:nvPr/>
-        </p:nvSpPr>
-        <p:spPr>
-          <a:xfrm>
-            <a:off x="777240" y="5577840"/>
-            <a:ext cx="10607040" cy="457200"/>
-          </a:xfrm>
-          <a:prstGeom prst="rect">
-            <a:avLst/>
-          </a:prstGeom>
-          <a:noFill/>
-        </p:spPr>
-        <p:txBody>
-          <a:bodyPr wrap="square" anchor="t" lIns="0" rIns="0" tIns="0" bIns="0">
-            <a:spAutoFit/>
-          </a:bodyPr>
-          <a:lstStyle/>
-          <a:p>
-            <a:pPr algn="l"/>
-            <a:r>
-              <a:rPr sz="1300" b="0">
-                <a:solidFill>
-                  <a:srgbClr val="1F2A44"/>
-                </a:solidFill>
-                <a:latin typeface="Calibri"/>
-              </a:rPr>
-              <a:t>If steps are enumerable → script. If composition under judgment → skill. If too big or too volatile to encode → RAG.</a:t>
+              <a:t>Steps enumerable → script. Judgment in-thread → skill. Heavy isolated work or tool guardrails → subagent. Volatile / large corpus → RAG.</a:t>
             </a:r>
           </a:p>
         </p:txBody>
@@ -7728,7 +9905,7 @@
                 </a:solidFill>
                 <a:latin typeface="Calibri"/>
               </a:rPr>
-              <a:t>Compressed judgment for tasks that resist deterministic encoding.</a:t>
+              <a:t>Compressed judgment merged into the calling agent's prompt.</a:t>
             </a:r>
           </a:p>
         </p:txBody>
@@ -8437,7 +10614,7 @@
                 </a:solidFill>
                 <a:latin typeface="Calibri"/>
               </a:rPr>
-              <a:t>Approach 3 — RAG / Knowledge Base</a:t>
+              <a:t>Approach 3 — Subagents</a:t>
             </a:r>
           </a:p>
         </p:txBody>
@@ -8472,7 +10649,7 @@
                 </a:solidFill>
                 <a:latin typeface="Calibri"/>
               </a:rPr>
-              <a:t>Recall over a corpus too big to fit in context and too volatile to hard-code.</a:t>
+              <a:t>An isolated specialist session invoked as a tool. Different problem than skills solve.</a:t>
             </a:r>
           </a:p>
         </p:txBody>
@@ -8564,13 +10741,13 @@
         <p:spPr>
           <a:xfrm>
             <a:off x="502920" y="1325880"/>
-            <a:ext cx="3447288" cy="292608"/>
+            <a:ext cx="2194560" cy="292608"/>
           </a:xfrm>
           <a:prstGeom prst="roundRect">
             <a:avLst/>
           </a:prstGeom>
           <a:solidFill>
-            <a:srgbClr val="1B55E0"/>
+            <a:srgbClr val="6B3DB5"/>
           </a:solidFill>
           <a:ln>
             <a:noFill/>
@@ -8602,7 +10779,7 @@
                 </a:solidFill>
                 <a:latin typeface="Calibri"/>
               </a:rPr>
-              <a:t>VOLATILE / HIGH-VOLUME RECALL</a:t>
+              <a:t>ISOLATION + GUARDRAILS</a:t>
             </a:r>
           </a:p>
         </p:txBody>
@@ -8622,11 +10799,11 @@
             <a:avLst/>
           </a:prstGeom>
           <a:solidFill>
-            <a:srgbClr val="ECF3FF"/>
+            <a:srgbClr val="F1ECF8"/>
           </a:solidFill>
           <a:ln w="15875">
             <a:solidFill>
-              <a:srgbClr val="1B55E0"/>
+              <a:srgbClr val="6B3DB5"/>
             </a:solidFill>
           </a:ln>
         </p:spPr>
@@ -8678,7 +10855,7 @@
             <a:r>
               <a:rPr sz="1500" b="1">
                 <a:solidFill>
-                  <a:srgbClr val="1B55E0"/>
+                  <a:srgbClr val="6B3DB5"/>
                 </a:solidFill>
                 <a:latin typeface="Calibri"/>
               </a:rPr>
@@ -8721,7 +10898,7 @@
                 </a:solidFill>
                 <a:latin typeface="Calibri"/>
               </a:rPr>
-              <a:t>•  Scales to large corpora the model cannot hold in context.</a:t>
+              <a:t>•  Context isolation — intermediate tool noise stays out of the main thread.</a:t>
             </a:r>
           </a:p>
           <a:p>
@@ -8737,7 +10914,7 @@
                 </a:solidFill>
                 <a:latin typeface="Calibri"/>
               </a:rPr>
-              <a:t>•  Indexer can refresh from live sources — freshness by design.</a:t>
+              <a:t>•  Tool allowlist enforced — read-only reviewer cannot accidentally edit.</a:t>
             </a:r>
           </a:p>
           <a:p>
@@ -8753,7 +10930,7 @@
                 </a:solidFill>
                 <a:latin typeface="Calibri"/>
               </a:rPr>
-              <a:t>•  Single retrieval surface across many document types.</a:t>
+              <a:t>•  Per-task model selection (cheap model for search, strong model for reasoning).</a:t>
             </a:r>
           </a:p>
           <a:p>
@@ -8769,7 +10946,23 @@
                 </a:solidFill>
                 <a:latin typeface="Calibri"/>
               </a:rPr>
-              <a:t>•  Decouples knowledge growth from prompt engineering.</a:t>
+              <a:t>•  Parallelism — multiple subagents can run simultaneously.</a:t>
+            </a:r>
+          </a:p>
+          <a:p>
+            <a:pPr algn="l">
+              <a:spcAft>
+                <a:spcPts val="500"/>
+              </a:spcAft>
+            </a:pPr>
+            <a:r>
+              <a:rPr sz="1200">
+                <a:solidFill>
+                  <a:srgbClr val="1F2A44"/>
+                </a:solidFill>
+                <a:latin typeface="Calibri"/>
+              </a:rPr>
+              <a:t>•  Reusable across calling agents.</a:t>
             </a:r>
           </a:p>
         </p:txBody>
@@ -8888,7 +11081,7 @@
                 </a:solidFill>
                 <a:latin typeface="Calibri"/>
               </a:rPr>
-              <a:t>•  Most probabilistic of the three — retrieval ranking can miss.</a:t>
+              <a:t>•  Probabilistic on TWO axes — selection AND the subagent's own decisions.</a:t>
             </a:r>
           </a:p>
           <a:p>
@@ -8904,7 +11097,7 @@
                 </a:solidFill>
                 <a:latin typeface="Calibri"/>
               </a:rPr>
-              <a:t>•  Wrong-chunk failures are silent and hard to detect downstream.</a:t>
+              <a:t>•  Briefing overhead — calling agent must write a self-contained prompt.</a:t>
             </a:r>
           </a:p>
           <a:p>
@@ -8920,7 +11113,7 @@
                 </a:solidFill>
                 <a:latin typeface="Calibri"/>
               </a:rPr>
-              <a:t>•  Infra cost: index, embed, refresh, evaluate — non-trivial.</a:t>
+              <a:t>•  Indirection — main thread sees the summary, not the steps.</a:t>
             </a:r>
           </a:p>
           <a:p>
@@ -8936,67 +11129,9 @@
                 </a:solidFill>
                 <a:latin typeface="Calibri"/>
               </a:rPr>
-              <a:t>•  Garbage-in is amplified — a stale corpus degrades every answer.</a:t>
-            </a:r>
-          </a:p>
-        </p:txBody>
-      </p:sp>
-      <p:sp>
-        <p:nvSpPr>
-          <p:cNvPr id="14" name="TextBox 13"/>
-          <p:cNvSpPr txBox="1"/>
-          <p:nvPr/>
-        </p:nvSpPr>
-        <p:spPr>
-          <a:xfrm>
-            <a:off x="502920" y="4434840"/>
-            <a:ext cx="11155680" cy="365760"/>
-          </a:xfrm>
-          <a:prstGeom prst="rect">
-            <a:avLst/>
-          </a:prstGeom>
-          <a:noFill/>
-        </p:spPr>
-        <p:txBody>
-          <a:bodyPr wrap="square" anchor="t" lIns="0" rIns="0" tIns="0" bIns="0">
-            <a:spAutoFit/>
-          </a:bodyPr>
-          <a:lstStyle/>
-          <a:p>
-            <a:pPr algn="l"/>
-            <a:r>
-              <a:rPr sz="1500" b="1">
-                <a:solidFill>
-                  <a:srgbClr val="1B55E0"/>
-                </a:solidFill>
-                <a:latin typeface="Calibri"/>
-              </a:rPr>
-              <a:t>Use when…</a:t>
-            </a:r>
-          </a:p>
-        </p:txBody>
-      </p:sp>
-      <p:sp>
-        <p:nvSpPr>
-          <p:cNvPr id="15" name="TextBox 14"/>
-          <p:cNvSpPr txBox="1"/>
-          <p:nvPr/>
-        </p:nvSpPr>
-        <p:spPr>
-          <a:xfrm>
-            <a:off x="640080" y="4800600"/>
-            <a:ext cx="10972800" cy="1371600"/>
-          </a:xfrm>
-          <a:prstGeom prst="rect">
-            <a:avLst/>
-          </a:prstGeom>
-          <a:noFill/>
-        </p:spPr>
-        <p:txBody>
-          <a:bodyPr wrap="square" lIns="0" rIns="0" tIns="0" bIns="0">
-            <a:spAutoFit/>
-          </a:bodyPr>
-          <a:lstStyle/>
+              <a:t>•  Latency cost vs inline tool use; over-spawning amplifies it.</a:t>
+            </a:r>
+          </a:p>
           <a:p>
             <a:pPr algn="l">
               <a:spcAft>
@@ -9004,15 +11139,73 @@
               </a:spcAft>
             </a:pPr>
             <a:r>
-              <a:rPr sz="1300">
+              <a:rPr sz="1200">
                 <a:solidFill>
                   <a:srgbClr val="1F2A44"/>
                 </a:solidFill>
                 <a:latin typeface="Calibri"/>
               </a:rPr>
-              <a:t>•  The knowledge surface is too large to encode statically: ADRs, runbooks, ontology, customer history.</a:t>
-            </a:r>
-          </a:p>
+              <a:t>•  Same silent-rot risk as skills if the definition drifts from reality.</a:t>
+            </a:r>
+          </a:p>
+        </p:txBody>
+      </p:sp>
+      <p:sp>
+        <p:nvSpPr>
+          <p:cNvPr id="14" name="TextBox 13"/>
+          <p:cNvSpPr txBox="1"/>
+          <p:nvPr/>
+        </p:nvSpPr>
+        <p:spPr>
+          <a:xfrm>
+            <a:off x="502920" y="4434840"/>
+            <a:ext cx="11155680" cy="365760"/>
+          </a:xfrm>
+          <a:prstGeom prst="rect">
+            <a:avLst/>
+          </a:prstGeom>
+          <a:noFill/>
+        </p:spPr>
+        <p:txBody>
+          <a:bodyPr wrap="square" anchor="t" lIns="0" rIns="0" tIns="0" bIns="0">
+            <a:spAutoFit/>
+          </a:bodyPr>
+          <a:lstStyle/>
+          <a:p>
+            <a:pPr algn="l"/>
+            <a:r>
+              <a:rPr sz="1500" b="1">
+                <a:solidFill>
+                  <a:srgbClr val="6B3DB5"/>
+                </a:solidFill>
+                <a:latin typeface="Calibri"/>
+              </a:rPr>
+              <a:t>Use when…</a:t>
+            </a:r>
+          </a:p>
+        </p:txBody>
+      </p:sp>
+      <p:sp>
+        <p:nvSpPr>
+          <p:cNvPr id="15" name="TextBox 14"/>
+          <p:cNvSpPr txBox="1"/>
+          <p:nvPr/>
+        </p:nvSpPr>
+        <p:spPr>
+          <a:xfrm>
+            <a:off x="640080" y="4800600"/>
+            <a:ext cx="10972800" cy="1371600"/>
+          </a:xfrm>
+          <a:prstGeom prst="rect">
+            <a:avLst/>
+          </a:prstGeom>
+          <a:noFill/>
+        </p:spPr>
+        <p:txBody>
+          <a:bodyPr wrap="square" lIns="0" rIns="0" tIns="0" bIns="0">
+            <a:spAutoFit/>
+          </a:bodyPr>
+          <a:lstStyle/>
           <a:p>
             <a:pPr algn="l">
               <a:spcAft>
@@ -9026,7 +11219,7 @@
                 </a:solidFill>
                 <a:latin typeface="Calibri"/>
               </a:rPr>
-              <a:t>•  The content changes faster than humans can re-curate skills or scripts.</a:t>
+              <a:t>•  The work produces heavy intermediate tool output the main thread does not need to see (codebase exploration, multi-file research).</a:t>
             </a:r>
           </a:p>
           <a:p>
@@ -9042,7 +11235,23 @@
                 </a:solidFill>
                 <a:latin typeface="Calibri"/>
               </a:rPr>
-              <a:t>•  You can wire freshness checks and retrieval-evaluation into CI — otherwise it rots like everything else.</a:t>
+              <a:t>•  You need an enforced tool guardrail — a reviewer that physically cannot Edit, an explorer that cannot Write.</a:t>
+            </a:r>
+          </a:p>
+          <a:p>
+            <a:pPr algn="l">
+              <a:spcAft>
+                <a:spcPts val="500"/>
+              </a:spcAft>
+            </a:pPr>
+            <a:r>
+              <a:rPr sz="1300">
+                <a:solidFill>
+                  <a:srgbClr val="1F2A44"/>
+                </a:solidFill>
+                <a:latin typeface="Calibri"/>
+              </a:rPr>
+              <a:t>•  You can run several in parallel and the outputs are summarizable in a few hundred tokens.</a:t>
             </a:r>
           </a:p>
         </p:txBody>
@@ -9071,13 +11280,13 @@
           <a:p>
             <a:pPr algn="l"/>
             <a:r>
-              <a:rPr sz="1100" b="1">
+              <a:rPr sz="1100" b="0">
                 <a:solidFill>
                   <a:srgbClr val="55607A"/>
                 </a:solidFill>
                 <a:latin typeface="Calibri"/>
               </a:rPr>
-              <a:t>Counter-intuitive: choosing RAG to fix "probabilistic skill retrieval" usually makes things more probabilistic, not less.</a:t>
+              <a:t>Examples: code-reviewer (Read+Grep only), explore (codebase search), security-review (read-only audit), Plan (architect-style scoping).</a:t>
             </a:r>
           </a:p>
         </p:txBody>
@@ -9181,7 +11390,7 @@
                 </a:solidFill>
                 <a:latin typeface="Calibri"/>
               </a:rPr>
-              <a:t>Decision Matrix — How to Choose</a:t>
+              <a:t>Approach 4 — RAG / Knowledge Base</a:t>
             </a:r>
           </a:p>
         </p:txBody>
@@ -9216,7 +11425,7 @@
                 </a:solidFill>
                 <a:latin typeface="Calibri"/>
               </a:rPr>
-              <a:t>A four-question gate. Default to script unless the higher-cost option earns its keep.</a:t>
+              <a:t>Recall over a corpus too big to fit in context and too volatile to hard-code.</a:t>
             </a:r>
           </a:p>
         </p:txBody>
@@ -9299,409 +11508,25 @@
           </a:p>
         </p:txBody>
       </p:sp>
-      <p:graphicFrame>
-        <p:nvGraphicFramePr>
-          <p:cNvPr id="7" name="Table 6"/>
-          <p:cNvGraphicFramePr>
-            <a:graphicFrameLocks noGrp="1"/>
-          </p:cNvGraphicFramePr>
-          <p:nvPr/>
-        </p:nvGraphicFramePr>
-        <p:xfrm>
-          <a:off x="502920" y="1463040"/>
-          <a:ext cx="11155680" cy="4023360"/>
-        </p:xfrm>
-        <a:graphic>
-          <a:graphicData uri="http://schemas.openxmlformats.org/drawingml/2006/table">
-            <a:tbl>
-              <a:tblPr firstRow="1" bandRow="1">
-                <a:tableStyleId>{5C22544A-7EE6-4342-B048-85BDC9FD1C3A}</a:tableStyleId>
-              </a:tblPr>
-              <a:tblGrid>
-                <a:gridCol w="4754880"/>
-                <a:gridCol w="3383280"/>
-                <a:gridCol w="3017520"/>
-              </a:tblGrid>
-              <a:tr h="804672">
-                <a:tc>
-                  <a:txBody>
-                    <a:bodyPr lIns="60000" rIns="60000" tIns="40000" bIns="40000"/>
-                    <a:lstStyle/>
-                    <a:p>
-                      <a:pPr algn="l"/>
-                      <a:r>
-                        <a:rPr sz="1300" b="1">
-                          <a:solidFill>
-                            <a:srgbClr val="FFFFFF"/>
-                          </a:solidFill>
-                          <a:latin typeface="Calibri"/>
-                        </a:rPr>
-                        <a:t>Question</a:t>
-                      </a:r>
-                    </a:p>
-                  </a:txBody>
-                  <a:tcPr>
-                    <a:solidFill>
-                      <a:srgbClr val="1F2A44"/>
-                    </a:solidFill>
-                  </a:tcPr>
-                </a:tc>
-                <a:tc>
-                  <a:txBody>
-                    <a:bodyPr lIns="60000" rIns="60000" tIns="40000" bIns="40000"/>
-                    <a:lstStyle/>
-                    <a:p>
-                      <a:pPr algn="l"/>
-                      <a:r>
-                        <a:rPr sz="1300" b="1">
-                          <a:solidFill>
-                            <a:srgbClr val="FFFFFF"/>
-                          </a:solidFill>
-                          <a:latin typeface="Calibri"/>
-                        </a:rPr>
-                        <a:t>If yes →</a:t>
-                      </a:r>
-                    </a:p>
-                  </a:txBody>
-                  <a:tcPr>
-                    <a:solidFill>
-                      <a:srgbClr val="1F2A44"/>
-                    </a:solidFill>
-                  </a:tcPr>
-                </a:tc>
-                <a:tc>
-                  <a:txBody>
-                    <a:bodyPr lIns="60000" rIns="60000" tIns="40000" bIns="40000"/>
-                    <a:lstStyle/>
-                    <a:p>
-                      <a:pPr algn="l"/>
-                      <a:r>
-                        <a:rPr sz="1300" b="1">
-                          <a:solidFill>
-                            <a:srgbClr val="FFFFFF"/>
-                          </a:solidFill>
-                          <a:latin typeface="Calibri"/>
-                        </a:rPr>
-                        <a:t>If no →</a:t>
-                      </a:r>
-                    </a:p>
-                  </a:txBody>
-                  <a:tcPr>
-                    <a:solidFill>
-                      <a:srgbClr val="1F2A44"/>
-                    </a:solidFill>
-                  </a:tcPr>
-                </a:tc>
-              </a:tr>
-              <a:tr h="804672">
-                <a:tc>
-                  <a:txBody>
-                    <a:bodyPr lIns="60000" rIns="60000" tIns="30000" bIns="30000" wrap="square"/>
-                    <a:lstStyle/>
-                    <a:p>
-                      <a:pPr algn="l"/>
-                      <a:r>
-                        <a:rPr sz="1200">
-                          <a:solidFill>
-                            <a:srgbClr val="1F2A44"/>
-                          </a:solidFill>
-                          <a:latin typeface="Calibri"/>
-                        </a:rPr>
-                        <a:t>1. Can the steps be enumerated as code with stable inputs and outputs?</a:t>
-                      </a:r>
-                    </a:p>
-                  </a:txBody>
-                  <a:tcPr>
-                    <a:solidFill>
-                      <a:srgbClr val="FFFFFF"/>
-                    </a:solidFill>
-                  </a:tcPr>
-                </a:tc>
-                <a:tc>
-                  <a:txBody>
-                    <a:bodyPr lIns="60000" rIns="60000" tIns="30000" bIns="30000" wrap="square"/>
-                    <a:lstStyle/>
-                    <a:p>
-                      <a:pPr algn="l"/>
-                      <a:r>
-                        <a:rPr sz="1200">
-                          <a:solidFill>
-                            <a:srgbClr val="1F2A44"/>
-                          </a:solidFill>
-                          <a:latin typeface="Calibri"/>
-                        </a:rPr>
-                        <a:t>Write a script. Stop here.</a:t>
-                      </a:r>
-                    </a:p>
-                  </a:txBody>
-                  <a:tcPr>
-                    <a:solidFill>
-                      <a:srgbClr val="FFFFFF"/>
-                    </a:solidFill>
-                  </a:tcPr>
-                </a:tc>
-                <a:tc>
-                  <a:txBody>
-                    <a:bodyPr lIns="60000" rIns="60000" tIns="30000" bIns="30000" wrap="square"/>
-                    <a:lstStyle/>
-                    <a:p>
-                      <a:pPr algn="l"/>
-                      <a:r>
-                        <a:rPr sz="1200">
-                          <a:solidFill>
-                            <a:srgbClr val="1F2A44"/>
-                          </a:solidFill>
-                          <a:latin typeface="Calibri"/>
-                        </a:rPr>
-                        <a:t>Continue.</a:t>
-                      </a:r>
-                    </a:p>
-                  </a:txBody>
-                  <a:tcPr>
-                    <a:solidFill>
-                      <a:srgbClr val="FFFFFF"/>
-                    </a:solidFill>
-                  </a:tcPr>
-                </a:tc>
-              </a:tr>
-              <a:tr h="804672">
-                <a:tc>
-                  <a:txBody>
-                    <a:bodyPr lIns="60000" rIns="60000" tIns="30000" bIns="30000" wrap="square"/>
-                    <a:lstStyle/>
-                    <a:p>
-                      <a:pPr algn="l"/>
-                      <a:r>
-                        <a:rPr sz="1200">
-                          <a:solidFill>
-                            <a:srgbClr val="1F2A44"/>
-                          </a:solidFill>
-                          <a:latin typeface="Calibri"/>
-                        </a:rPr>
-                        <a:t>2. Does the task require composition or judgment that varies by situation?</a:t>
-                      </a:r>
-                    </a:p>
-                  </a:txBody>
-                  <a:tcPr>
-                    <a:solidFill>
-                      <a:srgbClr val="F5F7FB"/>
-                    </a:solidFill>
-                  </a:tcPr>
-                </a:tc>
-                <a:tc>
-                  <a:txBody>
-                    <a:bodyPr lIns="60000" rIns="60000" tIns="30000" bIns="30000" wrap="square"/>
-                    <a:lstStyle/>
-                    <a:p>
-                      <a:pPr algn="l"/>
-                      <a:r>
-                        <a:rPr sz="1200">
-                          <a:solidFill>
-                            <a:srgbClr val="1F2A44"/>
-                          </a:solidFill>
-                          <a:latin typeface="Calibri"/>
-                        </a:rPr>
-                        <a:t>Write a skill. Link to source-of-truth files; add a drift test.</a:t>
-                      </a:r>
-                    </a:p>
-                  </a:txBody>
-                  <a:tcPr>
-                    <a:solidFill>
-                      <a:srgbClr val="F5F7FB"/>
-                    </a:solidFill>
-                  </a:tcPr>
-                </a:tc>
-                <a:tc>
-                  <a:txBody>
-                    <a:bodyPr lIns="60000" rIns="60000" tIns="30000" bIns="30000" wrap="square"/>
-                    <a:lstStyle/>
-                    <a:p>
-                      <a:pPr algn="l"/>
-                      <a:r>
-                        <a:rPr sz="1200">
-                          <a:solidFill>
-                            <a:srgbClr val="1F2A44"/>
-                          </a:solidFill>
-                          <a:latin typeface="Calibri"/>
-                        </a:rPr>
-                        <a:t>Continue.</a:t>
-                      </a:r>
-                    </a:p>
-                  </a:txBody>
-                  <a:tcPr>
-                    <a:solidFill>
-                      <a:srgbClr val="F5F7FB"/>
-                    </a:solidFill>
-                  </a:tcPr>
-                </a:tc>
-              </a:tr>
-              <a:tr h="804672">
-                <a:tc>
-                  <a:txBody>
-                    <a:bodyPr lIns="60000" rIns="60000" tIns="30000" bIns="30000" wrap="square"/>
-                    <a:lstStyle/>
-                    <a:p>
-                      <a:pPr algn="l"/>
-                      <a:r>
-                        <a:rPr sz="1200">
-                          <a:solidFill>
-                            <a:srgbClr val="1F2A44"/>
-                          </a:solidFill>
-                          <a:latin typeface="Calibri"/>
-                        </a:rPr>
-                        <a:t>3. Is the relevant corpus too large to fit in context or too volatile to encode?</a:t>
-                      </a:r>
-                    </a:p>
-                  </a:txBody>
-                  <a:tcPr>
-                    <a:solidFill>
-                      <a:srgbClr val="FFFFFF"/>
-                    </a:solidFill>
-                  </a:tcPr>
-                </a:tc>
-                <a:tc>
-                  <a:txBody>
-                    <a:bodyPr lIns="60000" rIns="60000" tIns="30000" bIns="30000" wrap="square"/>
-                    <a:lstStyle/>
-                    <a:p>
-                      <a:pPr algn="l"/>
-                      <a:r>
-                        <a:rPr sz="1200">
-                          <a:solidFill>
-                            <a:srgbClr val="1F2A44"/>
-                          </a:solidFill>
-                          <a:latin typeface="Calibri"/>
-                        </a:rPr>
-                        <a:t>Reach for RAG. Wire in freshness + retrieval evaluation.</a:t>
-                      </a:r>
-                    </a:p>
-                  </a:txBody>
-                  <a:tcPr>
-                    <a:solidFill>
-                      <a:srgbClr val="FFFFFF"/>
-                    </a:solidFill>
-                  </a:tcPr>
-                </a:tc>
-                <a:tc>
-                  <a:txBody>
-                    <a:bodyPr lIns="60000" rIns="60000" tIns="30000" bIns="30000" wrap="square"/>
-                    <a:lstStyle/>
-                    <a:p>
-                      <a:pPr algn="l"/>
-                      <a:r>
-                        <a:rPr sz="1200">
-                          <a:solidFill>
-                            <a:srgbClr val="1F2A44"/>
-                          </a:solidFill>
-                          <a:latin typeface="Calibri"/>
-                        </a:rPr>
-                        <a:t>Reconsider — most things land in script or skill.</a:t>
-                      </a:r>
-                    </a:p>
-                  </a:txBody>
-                  <a:tcPr>
-                    <a:solidFill>
-                      <a:srgbClr val="FFFFFF"/>
-                    </a:solidFill>
-                  </a:tcPr>
-                </a:tc>
-              </a:tr>
-              <a:tr h="804672">
-                <a:tc>
-                  <a:txBody>
-                    <a:bodyPr lIns="60000" rIns="60000" tIns="30000" bIns="30000" wrap="square"/>
-                    <a:lstStyle/>
-                    <a:p>
-                      <a:pPr algn="l"/>
-                      <a:r>
-                        <a:rPr sz="1200">
-                          <a:solidFill>
-                            <a:srgbClr val="1F2A44"/>
-                          </a:solidFill>
-                          <a:latin typeface="Calibri"/>
-                        </a:rPr>
-                        <a:t>4. Is the answer changing in real time (live state, current incidents)?</a:t>
-                      </a:r>
-                    </a:p>
-                  </a:txBody>
-                  <a:tcPr>
-                    <a:solidFill>
-                      <a:srgbClr val="F5F7FB"/>
-                    </a:solidFill>
-                  </a:tcPr>
-                </a:tc>
-                <a:tc>
-                  <a:txBody>
-                    <a:bodyPr lIns="60000" rIns="60000" tIns="30000" bIns="30000" wrap="square"/>
-                    <a:lstStyle/>
-                    <a:p>
-                      <a:pPr algn="l"/>
-                      <a:r>
-                        <a:rPr sz="1200">
-                          <a:solidFill>
-                            <a:srgbClr val="1F2A44"/>
-                          </a:solidFill>
-                          <a:latin typeface="Calibri"/>
-                        </a:rPr>
-                        <a:t>Use a queryable system (catalog, graph, DB) — RAG only if no API.</a:t>
-                      </a:r>
-                    </a:p>
-                  </a:txBody>
-                  <a:tcPr>
-                    <a:solidFill>
-                      <a:srgbClr val="F5F7FB"/>
-                    </a:solidFill>
-                  </a:tcPr>
-                </a:tc>
-                <a:tc>
-                  <a:txBody>
-                    <a:bodyPr lIns="60000" rIns="60000" tIns="30000" bIns="30000" wrap="square"/>
-                    <a:lstStyle/>
-                    <a:p>
-                      <a:pPr algn="l"/>
-                      <a:r>
-                        <a:rPr sz="1200">
-                          <a:solidFill>
-                            <a:srgbClr val="1F2A44"/>
-                          </a:solidFill>
-                          <a:latin typeface="Calibri"/>
-                        </a:rPr>
-                        <a:t>Stop. Pick from the previous answers.</a:t>
-                      </a:r>
-                    </a:p>
-                  </a:txBody>
-                  <a:tcPr>
-                    <a:solidFill>
-                      <a:srgbClr val="F5F7FB"/>
-                    </a:solidFill>
-                  </a:tcPr>
-                </a:tc>
-              </a:tr>
-            </a:tbl>
-          </a:graphicData>
-        </a:graphic>
-      </p:graphicFrame>
-      <p:sp>
-        <p:nvSpPr>
-          <p:cNvPr id="8" name="Rounded Rectangle 7"/>
+      <p:sp>
+        <p:nvSpPr>
+          <p:cNvPr id="7" name="Rounded Rectangle 6"/>
           <p:cNvSpPr/>
           <p:nvPr/>
         </p:nvSpPr>
         <p:spPr>
           <a:xfrm>
-            <a:off x="502920" y="5623560"/>
-            <a:ext cx="11155680" cy="594360"/>
+            <a:off x="502920" y="1325880"/>
+            <a:ext cx="3447288" cy="292608"/>
           </a:xfrm>
           <a:prstGeom prst="roundRect">
             <a:avLst/>
           </a:prstGeom>
           <a:solidFill>
-            <a:srgbClr val="ECF3FF"/>
+            <a:srgbClr val="1B55E0"/>
           </a:solidFill>
-          <a:ln w="12700">
-            <a:solidFill>
-              <a:srgbClr val="1B55E0"/>
-            </a:solidFill>
+          <a:ln>
+            <a:noFill/>
           </a:ln>
         </p:spPr>
         <p:style>
@@ -9719,6 +11544,60 @@
           </a:fontRef>
         </p:style>
         <p:txBody>
+          <a:bodyPr rtlCol="0" anchor="ctr" lIns="80000" rIns="80000" tIns="20000" bIns="20000"/>
+          <a:lstStyle/>
+          <a:p>
+            <a:pPr algn="ctr"/>
+            <a:r>
+              <a:rPr sz="1100" b="1">
+                <a:solidFill>
+                  <a:srgbClr val="FFFFFF"/>
+                </a:solidFill>
+                <a:latin typeface="Calibri"/>
+              </a:rPr>
+              <a:t>VOLATILE / HIGH-VOLUME RECALL</a:t>
+            </a:r>
+          </a:p>
+        </p:txBody>
+      </p:sp>
+      <p:sp>
+        <p:nvSpPr>
+          <p:cNvPr id="8" name="Rounded Rectangle 7"/>
+          <p:cNvSpPr/>
+          <p:nvPr/>
+        </p:nvSpPr>
+        <p:spPr>
+          <a:xfrm>
+            <a:off x="502920" y="1828800"/>
+            <a:ext cx="5486400" cy="2377440"/>
+          </a:xfrm>
+          <a:prstGeom prst="roundRect">
+            <a:avLst/>
+          </a:prstGeom>
+          <a:solidFill>
+            <a:srgbClr val="ECF3FF"/>
+          </a:solidFill>
+          <a:ln w="15875">
+            <a:solidFill>
+              <a:srgbClr val="1B55E0"/>
+            </a:solidFill>
+          </a:ln>
+        </p:spPr>
+        <p:style>
+          <a:lnRef idx="1">
+            <a:schemeClr val="accent1"/>
+          </a:lnRef>
+          <a:fillRef idx="3">
+            <a:schemeClr val="accent1"/>
+          </a:fillRef>
+          <a:effectRef idx="2">
+            <a:schemeClr val="accent1"/>
+          </a:effectRef>
+          <a:fontRef idx="minor">
+            <a:schemeClr val="lt1"/>
+          </a:fontRef>
+        </p:style>
+        <p:txBody>
           <a:bodyPr rtlCol="0" anchor="ctr"/>
           <a:lstStyle/>
           <a:p>
@@ -9734,8 +11613,8 @@
         </p:nvSpPr>
         <p:spPr>
           <a:xfrm>
-            <a:off x="777240" y="5715000"/>
-            <a:ext cx="10607040" cy="457200"/>
+            <a:off x="667512" y="1938528"/>
+            <a:ext cx="5212080" cy="365760"/>
           </a:xfrm>
           <a:prstGeom prst="rect">
             <a:avLst/>
@@ -9750,13 +11629,408 @@
           <a:p>
             <a:pPr algn="l"/>
             <a:r>
-              <a:rPr sz="1400" b="1">
-                <a:solidFill>
-                  <a:srgbClr val="1440A8"/>
-                </a:solidFill>
-                <a:latin typeface="Calibri"/>
-              </a:rPr>
-              <a:t>Default rule: if you can write a script, write the script. The other two earn their keep.</a:t>
+              <a:rPr sz="1500" b="1">
+                <a:solidFill>
+                  <a:srgbClr val="1B55E0"/>
+                </a:solidFill>
+                <a:latin typeface="Calibri"/>
+              </a:rPr>
+              <a:t>Strengths</a:t>
+            </a:r>
+          </a:p>
+        </p:txBody>
+      </p:sp>
+      <p:sp>
+        <p:nvSpPr>
+          <p:cNvPr id="10" name="TextBox 9"/>
+          <p:cNvSpPr txBox="1"/>
+          <p:nvPr/>
+        </p:nvSpPr>
+        <p:spPr>
+          <a:xfrm>
+            <a:off x="667512" y="2331720"/>
+            <a:ext cx="5212080" cy="1737360"/>
+          </a:xfrm>
+          <a:prstGeom prst="rect">
+            <a:avLst/>
+          </a:prstGeom>
+          <a:noFill/>
+        </p:spPr>
+        <p:txBody>
+          <a:bodyPr wrap="square" lIns="0" rIns="0" tIns="0" bIns="0">
+            <a:spAutoFit/>
+          </a:bodyPr>
+          <a:lstStyle/>
+          <a:p>
+            <a:pPr algn="l">
+              <a:spcAft>
+                <a:spcPts val="500"/>
+              </a:spcAft>
+            </a:pPr>
+            <a:r>
+              <a:rPr sz="1200">
+                <a:solidFill>
+                  <a:srgbClr val="1F2A44"/>
+                </a:solidFill>
+                <a:latin typeface="Calibri"/>
+              </a:rPr>
+              <a:t>•  Scales to large corpora the model cannot hold in context.</a:t>
+            </a:r>
+          </a:p>
+          <a:p>
+            <a:pPr algn="l">
+              <a:spcAft>
+                <a:spcPts val="500"/>
+              </a:spcAft>
+            </a:pPr>
+            <a:r>
+              <a:rPr sz="1200">
+                <a:solidFill>
+                  <a:srgbClr val="1F2A44"/>
+                </a:solidFill>
+                <a:latin typeface="Calibri"/>
+              </a:rPr>
+              <a:t>•  Indexer can refresh from live sources — freshness by design.</a:t>
+            </a:r>
+          </a:p>
+          <a:p>
+            <a:pPr algn="l">
+              <a:spcAft>
+                <a:spcPts val="500"/>
+              </a:spcAft>
+            </a:pPr>
+            <a:r>
+              <a:rPr sz="1200">
+                <a:solidFill>
+                  <a:srgbClr val="1F2A44"/>
+                </a:solidFill>
+                <a:latin typeface="Calibri"/>
+              </a:rPr>
+              <a:t>•  Single retrieval surface across many document types.</a:t>
+            </a:r>
+          </a:p>
+          <a:p>
+            <a:pPr algn="l">
+              <a:spcAft>
+                <a:spcPts val="500"/>
+              </a:spcAft>
+            </a:pPr>
+            <a:r>
+              <a:rPr sz="1200">
+                <a:solidFill>
+                  <a:srgbClr val="1F2A44"/>
+                </a:solidFill>
+                <a:latin typeface="Calibri"/>
+              </a:rPr>
+              <a:t>•  Decouples knowledge growth from prompt engineering.</a:t>
+            </a:r>
+          </a:p>
+        </p:txBody>
+      </p:sp>
+      <p:sp>
+        <p:nvSpPr>
+          <p:cNvPr id="11" name="Rounded Rectangle 10"/>
+          <p:cNvSpPr/>
+          <p:nvPr/>
+        </p:nvSpPr>
+        <p:spPr>
+          <a:xfrm>
+            <a:off x="6172200" y="1828800"/>
+            <a:ext cx="5486400" cy="2377440"/>
+          </a:xfrm>
+          <a:prstGeom prst="roundRect">
+            <a:avLst/>
+          </a:prstGeom>
+          <a:solidFill>
+            <a:srgbClr val="FEF6E6"/>
+          </a:solidFill>
+          <a:ln w="15875">
+            <a:solidFill>
+              <a:srgbClr val="C1462C"/>
+            </a:solidFill>
+          </a:ln>
+        </p:spPr>
+        <p:style>
+          <a:lnRef idx="1">
+            <a:schemeClr val="accent1"/>
+          </a:lnRef>
+          <a:fillRef idx="3">
+            <a:schemeClr val="accent1"/>
+          </a:fillRef>
+          <a:effectRef idx="2">
+            <a:schemeClr val="accent1"/>
+          </a:effectRef>
+          <a:fontRef idx="minor">
+            <a:schemeClr val="lt1"/>
+          </a:fontRef>
+        </p:style>
+        <p:txBody>
+          <a:bodyPr rtlCol="0" anchor="ctr"/>
+          <a:lstStyle/>
+          <a:p>
+            <a:pPr algn="ctr"/>
+          </a:p>
+        </p:txBody>
+      </p:sp>
+      <p:sp>
+        <p:nvSpPr>
+          <p:cNvPr id="12" name="TextBox 11"/>
+          <p:cNvSpPr txBox="1"/>
+          <p:nvPr/>
+        </p:nvSpPr>
+        <p:spPr>
+          <a:xfrm>
+            <a:off x="6336792" y="1938528"/>
+            <a:ext cx="5212080" cy="365760"/>
+          </a:xfrm>
+          <a:prstGeom prst="rect">
+            <a:avLst/>
+          </a:prstGeom>
+          <a:noFill/>
+        </p:spPr>
+        <p:txBody>
+          <a:bodyPr wrap="square" anchor="t" lIns="0" rIns="0" tIns="0" bIns="0">
+            <a:spAutoFit/>
+          </a:bodyPr>
+          <a:lstStyle/>
+          <a:p>
+            <a:pPr algn="l"/>
+            <a:r>
+              <a:rPr sz="1500" b="1">
+                <a:solidFill>
+                  <a:srgbClr val="C1462C"/>
+                </a:solidFill>
+                <a:latin typeface="Calibri"/>
+              </a:rPr>
+              <a:t>Weaknesses</a:t>
+            </a:r>
+          </a:p>
+        </p:txBody>
+      </p:sp>
+      <p:sp>
+        <p:nvSpPr>
+          <p:cNvPr id="13" name="TextBox 12"/>
+          <p:cNvSpPr txBox="1"/>
+          <p:nvPr/>
+        </p:nvSpPr>
+        <p:spPr>
+          <a:xfrm>
+            <a:off x="6336792" y="2331720"/>
+            <a:ext cx="5212080" cy="1737360"/>
+          </a:xfrm>
+          <a:prstGeom prst="rect">
+            <a:avLst/>
+          </a:prstGeom>
+          <a:noFill/>
+        </p:spPr>
+        <p:txBody>
+          <a:bodyPr wrap="square" lIns="0" rIns="0" tIns="0" bIns="0">
+            <a:spAutoFit/>
+          </a:bodyPr>
+          <a:lstStyle/>
+          <a:p>
+            <a:pPr algn="l">
+              <a:spcAft>
+                <a:spcPts val="500"/>
+              </a:spcAft>
+            </a:pPr>
+            <a:r>
+              <a:rPr sz="1200">
+                <a:solidFill>
+                  <a:srgbClr val="1F2A44"/>
+                </a:solidFill>
+                <a:latin typeface="Calibri"/>
+              </a:rPr>
+              <a:t>•  Most probabilistic of the three — retrieval ranking can miss.</a:t>
+            </a:r>
+          </a:p>
+          <a:p>
+            <a:pPr algn="l">
+              <a:spcAft>
+                <a:spcPts val="500"/>
+              </a:spcAft>
+            </a:pPr>
+            <a:r>
+              <a:rPr sz="1200">
+                <a:solidFill>
+                  <a:srgbClr val="1F2A44"/>
+                </a:solidFill>
+                <a:latin typeface="Calibri"/>
+              </a:rPr>
+              <a:t>•  Wrong-chunk failures are silent and hard to detect downstream.</a:t>
+            </a:r>
+          </a:p>
+          <a:p>
+            <a:pPr algn="l">
+              <a:spcAft>
+                <a:spcPts val="500"/>
+              </a:spcAft>
+            </a:pPr>
+            <a:r>
+              <a:rPr sz="1200">
+                <a:solidFill>
+                  <a:srgbClr val="1F2A44"/>
+                </a:solidFill>
+                <a:latin typeface="Calibri"/>
+              </a:rPr>
+              <a:t>•  Infra cost: index, embed, refresh, evaluate — non-trivial.</a:t>
+            </a:r>
+          </a:p>
+          <a:p>
+            <a:pPr algn="l">
+              <a:spcAft>
+                <a:spcPts val="500"/>
+              </a:spcAft>
+            </a:pPr>
+            <a:r>
+              <a:rPr sz="1200">
+                <a:solidFill>
+                  <a:srgbClr val="1F2A44"/>
+                </a:solidFill>
+                <a:latin typeface="Calibri"/>
+              </a:rPr>
+              <a:t>•  Garbage-in is amplified — a stale corpus degrades every answer.</a:t>
+            </a:r>
+          </a:p>
+        </p:txBody>
+      </p:sp>
+      <p:sp>
+        <p:nvSpPr>
+          <p:cNvPr id="14" name="TextBox 13"/>
+          <p:cNvSpPr txBox="1"/>
+          <p:nvPr/>
+        </p:nvSpPr>
+        <p:spPr>
+          <a:xfrm>
+            <a:off x="502920" y="4434840"/>
+            <a:ext cx="11155680" cy="365760"/>
+          </a:xfrm>
+          <a:prstGeom prst="rect">
+            <a:avLst/>
+          </a:prstGeom>
+          <a:noFill/>
+        </p:spPr>
+        <p:txBody>
+          <a:bodyPr wrap="square" anchor="t" lIns="0" rIns="0" tIns="0" bIns="0">
+            <a:spAutoFit/>
+          </a:bodyPr>
+          <a:lstStyle/>
+          <a:p>
+            <a:pPr algn="l"/>
+            <a:r>
+              <a:rPr sz="1500" b="1">
+                <a:solidFill>
+                  <a:srgbClr val="1B55E0"/>
+                </a:solidFill>
+                <a:latin typeface="Calibri"/>
+              </a:rPr>
+              <a:t>Use when…</a:t>
+            </a:r>
+          </a:p>
+        </p:txBody>
+      </p:sp>
+      <p:sp>
+        <p:nvSpPr>
+          <p:cNvPr id="15" name="TextBox 14"/>
+          <p:cNvSpPr txBox="1"/>
+          <p:nvPr/>
+        </p:nvSpPr>
+        <p:spPr>
+          <a:xfrm>
+            <a:off x="640080" y="4800600"/>
+            <a:ext cx="10972800" cy="1371600"/>
+          </a:xfrm>
+          <a:prstGeom prst="rect">
+            <a:avLst/>
+          </a:prstGeom>
+          <a:noFill/>
+        </p:spPr>
+        <p:txBody>
+          <a:bodyPr wrap="square" lIns="0" rIns="0" tIns="0" bIns="0">
+            <a:spAutoFit/>
+          </a:bodyPr>
+          <a:lstStyle/>
+          <a:p>
+            <a:pPr algn="l">
+              <a:spcAft>
+                <a:spcPts val="500"/>
+              </a:spcAft>
+            </a:pPr>
+            <a:r>
+              <a:rPr sz="1300">
+                <a:solidFill>
+                  <a:srgbClr val="1F2A44"/>
+                </a:solidFill>
+                <a:latin typeface="Calibri"/>
+              </a:rPr>
+              <a:t>•  The knowledge surface is too large to encode statically: ADRs, runbooks, ontology, customer history.</a:t>
+            </a:r>
+          </a:p>
+          <a:p>
+            <a:pPr algn="l">
+              <a:spcAft>
+                <a:spcPts val="500"/>
+              </a:spcAft>
+            </a:pPr>
+            <a:r>
+              <a:rPr sz="1300">
+                <a:solidFill>
+                  <a:srgbClr val="1F2A44"/>
+                </a:solidFill>
+                <a:latin typeface="Calibri"/>
+              </a:rPr>
+              <a:t>•  The content changes faster than humans can re-curate skills or scripts.</a:t>
+            </a:r>
+          </a:p>
+          <a:p>
+            <a:pPr algn="l">
+              <a:spcAft>
+                <a:spcPts val="500"/>
+              </a:spcAft>
+            </a:pPr>
+            <a:r>
+              <a:rPr sz="1300">
+                <a:solidFill>
+                  <a:srgbClr val="1F2A44"/>
+                </a:solidFill>
+                <a:latin typeface="Calibri"/>
+              </a:rPr>
+              <a:t>•  You can wire freshness checks and retrieval-evaluation into CI — otherwise it rots like everything else.</a:t>
+            </a:r>
+          </a:p>
+        </p:txBody>
+      </p:sp>
+      <p:sp>
+        <p:nvSpPr>
+          <p:cNvPr id="16" name="TextBox 15"/>
+          <p:cNvSpPr txBox="1"/>
+          <p:nvPr/>
+        </p:nvSpPr>
+        <p:spPr>
+          <a:xfrm>
+            <a:off x="502920" y="6035040"/>
+            <a:ext cx="11155680" cy="365760"/>
+          </a:xfrm>
+          <a:prstGeom prst="rect">
+            <a:avLst/>
+          </a:prstGeom>
+          <a:noFill/>
+        </p:spPr>
+        <p:txBody>
+          <a:bodyPr wrap="square" anchor="t" lIns="0" rIns="0" tIns="0" bIns="0">
+            <a:spAutoFit/>
+          </a:bodyPr>
+          <a:lstStyle/>
+          <a:p>
+            <a:pPr algn="l"/>
+            <a:r>
+              <a:rPr sz="1100" b="1">
+                <a:solidFill>
+                  <a:srgbClr val="55607A"/>
+                </a:solidFill>
+                <a:latin typeface="Calibri"/>
+              </a:rPr>
+              <a:t>Counter-intuitive: choosing RAG to fix "probabilistic skill retrieval" usually makes things more probabilistic, not less.</a:t>
             </a:r>
           </a:p>
         </p:txBody>
@@ -9860,7 +12134,7 @@
                 </a:solidFill>
                 <a:latin typeface="Calibri"/>
               </a:rPr>
-              <a:t>Staleness — Who Notices First?</a:t>
+              <a:t>Skills vs. Subagents — The Most Common Confusion</a:t>
             </a:r>
           </a:p>
         </p:txBody>
@@ -9895,7 +12169,7 @@
                 </a:solidFill>
                 <a:latin typeface="Calibri"/>
               </a:rPr>
-              <a:t>How each approach behaves when the codebase changes underneath it.</a:t>
+              <a:t>Both look like markdown files. They solve different problems.</a:t>
             </a:r>
           </a:p>
         </p:txBody>
@@ -9987,8 +12261,8 @@
           <p:nvPr/>
         </p:nvGraphicFramePr>
         <p:xfrm>
-          <a:off x="502920" y="1463040"/>
-          <a:ext cx="11155680" cy="3291840"/>
+          <a:off x="502920" y="1417320"/>
+          <a:ext cx="11155680" cy="4297680"/>
         </p:xfrm>
         <a:graphic>
           <a:graphicData uri="http://schemas.openxmlformats.org/drawingml/2006/table">
@@ -9997,12 +12271,11 @@
                 <a:tableStyleId>{5C22544A-7EE6-4342-B048-85BDC9FD1C3A}</a:tableStyleId>
               </a:tblPr>
               <a:tblGrid>
-                <a:gridCol w="1828800"/>
-                <a:gridCol w="4023360"/>
-                <a:gridCol w="2194560"/>
-                <a:gridCol w="3108960"/>
+                <a:gridCol w="2651760"/>
+                <a:gridCol w="4206240"/>
+                <a:gridCol w="4297680"/>
               </a:tblGrid>
-              <a:tr h="822960">
+              <a:tr h="537210">
                 <a:tc>
                   <a:txBody>
                     <a:bodyPr lIns="60000" rIns="60000" tIns="40000" bIns="40000"/>
@@ -10010,13 +12283,13 @@
                     <a:p>
                       <a:pPr algn="l"/>
                       <a:r>
-                        <a:rPr sz="1300" b="1">
+                        <a:rPr sz="1200" b="1">
                           <a:solidFill>
                             <a:srgbClr val="FFFFFF"/>
                           </a:solidFill>
                           <a:latin typeface="Calibri"/>
                         </a:rPr>
-                        <a:t>Approach</a:t>
+                        <a:t>Dimension</a:t>
                       </a:r>
                     </a:p>
                   </a:txBody>
@@ -10033,36 +12306,13 @@
                     <a:p>
                       <a:pPr algn="l"/>
                       <a:r>
-                        <a:rPr sz="1300" b="1">
+                        <a:rPr sz="1200" b="1">
                           <a:solidFill>
                             <a:srgbClr val="FFFFFF"/>
                           </a:solidFill>
                           <a:latin typeface="Calibri"/>
                         </a:rPr>
-                        <a:t>Drift behavior</a:t>
-                      </a:r>
-                    </a:p>
-                  </a:txBody>
-                  <a:tcPr>
-                    <a:solidFill>
-                      <a:srgbClr val="1F8055"/>
-                    </a:solidFill>
-                  </a:tcPr>
-                </a:tc>
-                <a:tc>
-                  <a:txBody>
-                    <a:bodyPr lIns="60000" rIns="60000" tIns="40000" bIns="40000"/>
-                    <a:lstStyle/>
-                    <a:p>
-                      <a:pPr algn="l"/>
-                      <a:r>
-                        <a:rPr sz="1300" b="1">
-                          <a:solidFill>
-                            <a:srgbClr val="FFFFFF"/>
-                          </a:solidFill>
-                          <a:latin typeface="Calibri"/>
-                        </a:rPr>
-                        <a:t>Time to discover</a:t>
+                        <a:t>Skill</a:t>
                       </a:r>
                     </a:p>
                   </a:txBody>
@@ -10079,24 +12329,24 @@
                     <a:p>
                       <a:pPr algn="l"/>
                       <a:r>
-                        <a:rPr sz="1300" b="1">
+                        <a:rPr sz="1200" b="1">
                           <a:solidFill>
                             <a:srgbClr val="FFFFFF"/>
                           </a:solidFill>
                           <a:latin typeface="Calibri"/>
                         </a:rPr>
-                        <a:t>Mitigation</a:t>
+                        <a:t>Subagent</a:t>
                       </a:r>
                     </a:p>
                   </a:txBody>
                   <a:tcPr>
                     <a:solidFill>
-                      <a:srgbClr val="1B55E0"/>
+                      <a:srgbClr val="6B3DB5"/>
                     </a:solidFill>
                   </a:tcPr>
                 </a:tc>
               </a:tr>
-              <a:tr h="822960">
+              <a:tr h="537210">
                 <a:tc>
                   <a:txBody>
                     <a:bodyPr lIns="60000" rIns="60000" tIns="30000" bIns="30000" wrap="square"/>
@@ -10104,13 +12354,13 @@
                     <a:p>
                       <a:pPr algn="l"/>
                       <a:r>
-                        <a:rPr sz="1200">
+                        <a:rPr sz="1100">
                           <a:solidFill>
                             <a:srgbClr val="1F2A44"/>
                           </a:solidFill>
                           <a:latin typeface="Calibri"/>
                         </a:rPr>
-                        <a:t>Script</a:t>
+                        <a:t>Where the work runs</a:t>
                       </a:r>
                     </a:p>
                   </a:txBody>
@@ -10127,13 +12377,13 @@
                     <a:p>
                       <a:pPr algn="l"/>
                       <a:r>
-                        <a:rPr sz="1200">
+                        <a:rPr sz="1100">
                           <a:solidFill>
                             <a:srgbClr val="1F2A44"/>
                           </a:solidFill>
                           <a:latin typeface="Calibri"/>
                         </a:rPr>
-                        <a:t>Breaks loudly — exit code, test failure, type error.</a:t>
+                        <a:t>Inside the calling agent's session — instructions merged into its prompt.</a:t>
                       </a:r>
                     </a:p>
                   </a:txBody>
@@ -10150,13 +12400,109 @@
                     <a:p>
                       <a:pPr algn="l"/>
                       <a:r>
-                        <a:rPr sz="1200">
+                        <a:rPr sz="1100">
                           <a:solidFill>
                             <a:srgbClr val="1F2A44"/>
                           </a:solidFill>
                           <a:latin typeface="Calibri"/>
                         </a:rPr>
-                        <a:t>Minutes (next CI run).</a:t>
+                        <a:t>In a separate session with its own context window and lifecycle.</a:t>
+                      </a:r>
+                    </a:p>
+                  </a:txBody>
+                  <a:tcPr>
+                    <a:solidFill>
+                      <a:srgbClr val="FFFFFF"/>
+                    </a:solidFill>
+                  </a:tcPr>
+                </a:tc>
+              </a:tr>
+              <a:tr h="537210">
+                <a:tc>
+                  <a:txBody>
+                    <a:bodyPr lIns="60000" rIns="60000" tIns="30000" bIns="30000" wrap="square"/>
+                    <a:lstStyle/>
+                    <a:p>
+                      <a:pPr algn="l"/>
+                      <a:r>
+                        <a:rPr sz="1100">
+                          <a:solidFill>
+                            <a:srgbClr val="1F2A44"/>
+                          </a:solidFill>
+                          <a:latin typeface="Calibri"/>
+                        </a:rPr>
+                        <a:t>Context budget impact</a:t>
+                      </a:r>
+                    </a:p>
+                  </a:txBody>
+                  <a:tcPr>
+                    <a:solidFill>
+                      <a:srgbClr val="F5F7FB"/>
+                    </a:solidFill>
+                  </a:tcPr>
+                </a:tc>
+                <a:tc>
+                  <a:txBody>
+                    <a:bodyPr lIns="60000" rIns="60000" tIns="30000" bIns="30000" wrap="square"/>
+                    <a:lstStyle/>
+                    <a:p>
+                      <a:pPr algn="l"/>
+                      <a:r>
+                        <a:rPr sz="1100">
+                          <a:solidFill>
+                            <a:srgbClr val="1F2A44"/>
+                          </a:solidFill>
+                          <a:latin typeface="Calibri"/>
+                        </a:rPr>
+                        <a:t>Skill content stays in the main thread; intermediate tool output also stays.</a:t>
+                      </a:r>
+                    </a:p>
+                  </a:txBody>
+                  <a:tcPr>
+                    <a:solidFill>
+                      <a:srgbClr val="F5F7FB"/>
+                    </a:solidFill>
+                  </a:tcPr>
+                </a:tc>
+                <a:tc>
+                  <a:txBody>
+                    <a:bodyPr lIns="60000" rIns="60000" tIns="30000" bIns="30000" wrap="square"/>
+                    <a:lstStyle/>
+                    <a:p>
+                      <a:pPr algn="l"/>
+                      <a:r>
+                        <a:rPr sz="1100">
+                          <a:solidFill>
+                            <a:srgbClr val="1F2A44"/>
+                          </a:solidFill>
+                          <a:latin typeface="Calibri"/>
+                        </a:rPr>
+                        <a:t>Only the final summary returns to the main thread.</a:t>
+                      </a:r>
+                    </a:p>
+                  </a:txBody>
+                  <a:tcPr>
+                    <a:solidFill>
+                      <a:srgbClr val="F5F7FB"/>
+                    </a:solidFill>
+                  </a:tcPr>
+                </a:tc>
+              </a:tr>
+              <a:tr h="537210">
+                <a:tc>
+                  <a:txBody>
+                    <a:bodyPr lIns="60000" rIns="60000" tIns="30000" bIns="30000" wrap="square"/>
+                    <a:lstStyle/>
+                    <a:p>
+                      <a:pPr algn="l"/>
+                      <a:r>
+                        <a:rPr sz="1100">
+                          <a:solidFill>
+                            <a:srgbClr val="1F2A44"/>
+                          </a:solidFill>
+                          <a:latin typeface="Calibri"/>
+                        </a:rPr>
+                        <a:t>Tool scoping</a:t>
                       </a:r>
                     </a:p>
                   </a:txBody>
@@ -10173,13 +12519,36 @@
                     <a:p>
                       <a:pPr algn="l"/>
                       <a:r>
-                        <a:rPr sz="1200">
+                        <a:rPr sz="1100">
                           <a:solidFill>
                             <a:srgbClr val="1F2A44"/>
                           </a:solidFill>
                           <a:latin typeface="Calibri"/>
                         </a:rPr>
-                        <a:t>Already covered by your test pyramid.</a:t>
+                        <a:t>Inherits whatever tools the calling agent has — guidance, not enforcement.</a:t>
+                      </a:r>
+                    </a:p>
+                  </a:txBody>
+                  <a:tcPr>
+                    <a:solidFill>
+                      <a:srgbClr val="FFFFFF"/>
+                    </a:solidFill>
+                  </a:tcPr>
+                </a:tc>
+                <a:tc>
+                  <a:txBody>
+                    <a:bodyPr lIns="60000" rIns="60000" tIns="30000" bIns="30000" wrap="square"/>
+                    <a:lstStyle/>
+                    <a:p>
+                      <a:pPr algn="l"/>
+                      <a:r>
+                        <a:rPr sz="1100">
+                          <a:solidFill>
+                            <a:srgbClr val="1F2A44"/>
+                          </a:solidFill>
+                          <a:latin typeface="Calibri"/>
+                        </a:rPr>
+                        <a:t>Has its own allowlist — physically cannot use tools outside it.</a:t>
                       </a:r>
                     </a:p>
                   </a:txBody>
@@ -10190,7 +12559,7 @@
                   </a:tcPr>
                 </a:tc>
               </a:tr>
-              <a:tr h="822960">
+              <a:tr h="537210">
                 <a:tc>
                   <a:txBody>
                     <a:bodyPr lIns="60000" rIns="60000" tIns="30000" bIns="30000" wrap="square"/>
@@ -10198,13 +12567,13 @@
                     <a:p>
                       <a:pPr algn="l"/>
                       <a:r>
-                        <a:rPr sz="1200">
+                        <a:rPr sz="1100">
                           <a:solidFill>
                             <a:srgbClr val="1F2A44"/>
                           </a:solidFill>
                           <a:latin typeface="Calibri"/>
                         </a:rPr>
-                        <a:t>Skill</a:t>
+                        <a:t>Model selection</a:t>
                       </a:r>
                     </a:p>
                   </a:txBody>
@@ -10221,13 +12590,13 @@
                     <a:p>
                       <a:pPr algn="l"/>
                       <a:r>
-                        <a:rPr sz="1200">
+                        <a:rPr sz="1100">
                           <a:solidFill>
                             <a:srgbClr val="1F2A44"/>
                           </a:solidFill>
                           <a:latin typeface="Calibri"/>
                         </a:rPr>
-                        <a:t>Silent rot. Agent follows stale instructions and produces a confidently-wrong action.</a:t>
+                        <a:t>Same model as the calling agent.</a:t>
                       </a:r>
                     </a:p>
                   </a:txBody>
@@ -10244,13 +12613,109 @@
                     <a:p>
                       <a:pPr algn="l"/>
                       <a:r>
-                        <a:rPr sz="1200">
+                        <a:rPr sz="1100">
                           <a:solidFill>
                             <a:srgbClr val="1F2A44"/>
                           </a:solidFill>
                           <a:latin typeface="Calibri"/>
                         </a:rPr>
-                        <a:t>Days to weeks — discovered via incident.</a:t>
+                        <a:t>Per-subagent model choice (Haiku for search, Opus for reasoning).</a:t>
+                      </a:r>
+                    </a:p>
+                  </a:txBody>
+                  <a:tcPr>
+                    <a:solidFill>
+                      <a:srgbClr val="F5F7FB"/>
+                    </a:solidFill>
+                  </a:tcPr>
+                </a:tc>
+              </a:tr>
+              <a:tr h="537210">
+                <a:tc>
+                  <a:txBody>
+                    <a:bodyPr lIns="60000" rIns="60000" tIns="30000" bIns="30000" wrap="square"/>
+                    <a:lstStyle/>
+                    <a:p>
+                      <a:pPr algn="l"/>
+                      <a:r>
+                        <a:rPr sz="1100">
+                          <a:solidFill>
+                            <a:srgbClr val="1F2A44"/>
+                          </a:solidFill>
+                          <a:latin typeface="Calibri"/>
+                        </a:rPr>
+                        <a:t>Concurrency</a:t>
+                      </a:r>
+                    </a:p>
+                  </a:txBody>
+                  <a:tcPr>
+                    <a:solidFill>
+                      <a:srgbClr val="FFFFFF"/>
+                    </a:solidFill>
+                  </a:tcPr>
+                </a:tc>
+                <a:tc>
+                  <a:txBody>
+                    <a:bodyPr lIns="60000" rIns="60000" tIns="30000" bIns="30000" wrap="square"/>
+                    <a:lstStyle/>
+                    <a:p>
+                      <a:pPr algn="l"/>
+                      <a:r>
+                        <a:rPr sz="1100">
+                          <a:solidFill>
+                            <a:srgbClr val="1F2A44"/>
+                          </a:solidFill>
+                          <a:latin typeface="Calibri"/>
+                        </a:rPr>
+                        <a:t>Serial — one skill at a time, in the main thread.</a:t>
+                      </a:r>
+                    </a:p>
+                  </a:txBody>
+                  <a:tcPr>
+                    <a:solidFill>
+                      <a:srgbClr val="FFFFFF"/>
+                    </a:solidFill>
+                  </a:tcPr>
+                </a:tc>
+                <a:tc>
+                  <a:txBody>
+                    <a:bodyPr lIns="60000" rIns="60000" tIns="30000" bIns="30000" wrap="square"/>
+                    <a:lstStyle/>
+                    <a:p>
+                      <a:pPr algn="l"/>
+                      <a:r>
+                        <a:rPr sz="1100">
+                          <a:solidFill>
+                            <a:srgbClr val="1F2A44"/>
+                          </a:solidFill>
+                          <a:latin typeface="Calibri"/>
+                        </a:rPr>
+                        <a:t>Parallel — multiple subagents can run simultaneously.</a:t>
+                      </a:r>
+                    </a:p>
+                  </a:txBody>
+                  <a:tcPr>
+                    <a:solidFill>
+                      <a:srgbClr val="FFFFFF"/>
+                    </a:solidFill>
+                  </a:tcPr>
+                </a:tc>
+              </a:tr>
+              <a:tr h="537210">
+                <a:tc>
+                  <a:txBody>
+                    <a:bodyPr lIns="60000" rIns="60000" tIns="30000" bIns="30000" wrap="square"/>
+                    <a:lstStyle/>
+                    <a:p>
+                      <a:pPr algn="l"/>
+                      <a:r>
+                        <a:rPr sz="1100">
+                          <a:solidFill>
+                            <a:srgbClr val="1F2A44"/>
+                          </a:solidFill>
+                          <a:latin typeface="Calibri"/>
+                        </a:rPr>
+                        <a:t>Failure mode</a:t>
                       </a:r>
                     </a:p>
                   </a:txBody>
@@ -10267,13 +12732,36 @@
                     <a:p>
                       <a:pPr algn="l"/>
                       <a:r>
-                        <a:rPr sz="1200">
+                        <a:rPr sz="1100">
                           <a:solidFill>
                             <a:srgbClr val="1F2A44"/>
                           </a:solidFill>
                           <a:latin typeface="Calibri"/>
                         </a:rPr>
-                        <a:t>Link to file paths in code; CI test asserts the paths still exist.</a:t>
+                        <a:t>Selection probabilistic; once injected, behavior is the main agent's.</a:t>
+                      </a:r>
+                    </a:p>
+                  </a:txBody>
+                  <a:tcPr>
+                    <a:solidFill>
+                      <a:srgbClr val="F5F7FB"/>
+                    </a:solidFill>
+                  </a:tcPr>
+                </a:tc>
+                <a:tc>
+                  <a:txBody>
+                    <a:bodyPr lIns="60000" rIns="60000" tIns="30000" bIns="30000" wrap="square"/>
+                    <a:lstStyle/>
+                    <a:p>
+                      <a:pPr algn="l"/>
+                      <a:r>
+                        <a:rPr sz="1100">
+                          <a:solidFill>
+                            <a:srgbClr val="1F2A44"/>
+                          </a:solidFill>
+                          <a:latin typeface="Calibri"/>
+                        </a:rPr>
+                        <a:t>Selection probabilistic AND subagent's internal decisions probabilistic.</a:t>
                       </a:r>
                     </a:p>
                   </a:txBody>
@@ -10284,7 +12772,7 @@
                   </a:tcPr>
                 </a:tc>
               </a:tr>
-              <a:tr h="822960">
+              <a:tr h="537210">
                 <a:tc>
                   <a:txBody>
                     <a:bodyPr lIns="60000" rIns="60000" tIns="30000" bIns="30000" wrap="square"/>
@@ -10292,13 +12780,13 @@
                     <a:p>
                       <a:pPr algn="l"/>
                       <a:r>
-                        <a:rPr sz="1200">
+                        <a:rPr sz="1100">
                           <a:solidFill>
                             <a:srgbClr val="1F2A44"/>
                           </a:solidFill>
                           <a:latin typeface="Calibri"/>
                         </a:rPr>
-                        <a:t>RAG</a:t>
+                        <a:t>Best for</a:t>
                       </a:r>
                     </a:p>
                   </a:txBody>
@@ -10315,13 +12803,13 @@
                     <a:p>
                       <a:pPr algn="l"/>
                       <a:r>
-                        <a:rPr sz="1200">
+                        <a:rPr sz="1100">
                           <a:solidFill>
                             <a:srgbClr val="1F2A44"/>
                           </a:solidFill>
                           <a:latin typeface="Calibri"/>
                         </a:rPr>
-                        <a:t>Silent degradation. Retrieval picks an outdated chunk; answer drifts.</a:t>
+                        <a:t>Patterns of judgment the main agent should apply itself.</a:t>
                       </a:r>
                     </a:p>
                   </a:txBody>
@@ -10338,36 +12826,13 @@
                     <a:p>
                       <a:pPr algn="l"/>
                       <a:r>
-                        <a:rPr sz="1200">
+                        <a:rPr sz="1100">
                           <a:solidFill>
                             <a:srgbClr val="1F2A44"/>
                           </a:solidFill>
                           <a:latin typeface="Calibri"/>
                         </a:rPr>
-                        <a:t>Weeks to months — usually noticed via aggregate quality dip.</a:t>
-                      </a:r>
-                    </a:p>
-                  </a:txBody>
-                  <a:tcPr>
-                    <a:solidFill>
-                      <a:srgbClr val="FFFFFF"/>
-                    </a:solidFill>
-                  </a:tcPr>
-                </a:tc>
-                <a:tc>
-                  <a:txBody>
-                    <a:bodyPr lIns="60000" rIns="60000" tIns="30000" bIns="30000" wrap="square"/>
-                    <a:lstStyle/>
-                    <a:p>
-                      <a:pPr algn="l"/>
-                      <a:r>
-                        <a:rPr sz="1200">
-                          <a:solidFill>
-                            <a:srgbClr val="1F2A44"/>
-                          </a:solidFill>
-                          <a:latin typeface="Calibri"/>
-                        </a:rPr>
-                        <a:t>Indexer freshness SLO + retrieval evaluation harness on a fixed eval set.</a:t>
+                        <a:t>Heavy isolated work, enforced guardrails, parallel research.</a:t>
                       </a:r>
                     </a:p>
                   </a:txBody>
@@ -10390,18 +12855,18 @@
         </p:nvSpPr>
         <p:spPr>
           <a:xfrm>
-            <a:off x="502920" y="5120640"/>
-            <a:ext cx="11155680" cy="1005840"/>
+            <a:off x="502920" y="5852160"/>
+            <a:ext cx="11155680" cy="640080"/>
           </a:xfrm>
           <a:prstGeom prst="roundRect">
             <a:avLst/>
           </a:prstGeom>
           <a:solidFill>
-            <a:srgbClr val="E9F5EE"/>
+            <a:srgbClr val="F1ECF8"/>
           </a:solidFill>
-          <a:ln w="12700">
+          <a:ln w="15875">
             <a:solidFill>
-              <a:srgbClr val="1F8055"/>
+              <a:srgbClr val="6B3DB5"/>
             </a:solidFill>
           </a:ln>
         </p:spPr>
@@ -10435,8 +12900,8 @@
         </p:nvSpPr>
         <p:spPr>
           <a:xfrm>
-            <a:off x="777240" y="5257800"/>
-            <a:ext cx="10607040" cy="365760"/>
+            <a:off x="777240" y="5943600"/>
+            <a:ext cx="10607040" cy="457200"/>
           </a:xfrm>
           <a:prstGeom prst="rect">
             <a:avLst/>
@@ -10451,48 +12916,13 @@
           <a:p>
             <a:pPr algn="l"/>
             <a:r>
-              <a:rPr sz="1400" b="1">
-                <a:solidFill>
-                  <a:srgbClr val="1F8055"/>
-                </a:solidFill>
-                <a:latin typeface="Calibri"/>
-              </a:rPr>
-              <a:t>Why scripts win the staleness game</a:t>
-            </a:r>
-          </a:p>
-        </p:txBody>
-      </p:sp>
-      <p:sp>
-        <p:nvSpPr>
-          <p:cNvPr id="10" name="TextBox 9"/>
-          <p:cNvSpPr txBox="1"/>
-          <p:nvPr/>
-        </p:nvSpPr>
-        <p:spPr>
-          <a:xfrm>
-            <a:off x="777240" y="5623560"/>
-            <a:ext cx="10607040" cy="457200"/>
-          </a:xfrm>
-          <a:prstGeom prst="rect">
-            <a:avLst/>
-          </a:prstGeom>
-          <a:noFill/>
-        </p:spPr>
-        <p:txBody>
-          <a:bodyPr wrap="square" anchor="t" lIns="0" rIns="0" tIns="0" bIns="0">
-            <a:spAutoFit/>
-          </a:bodyPr>
-          <a:lstStyle/>
-          <a:p>
-            <a:pPr algn="l"/>
-            <a:r>
-              <a:rPr sz="1300" b="0">
-                <a:solidFill>
-                  <a:srgbClr val="1F2A44"/>
-                </a:solidFill>
-                <a:latin typeface="Calibri"/>
-              </a:rPr>
-              <a:t>Loud failure beats silent rot. A script that breaks in CI is a feature, not a bug — drift becomes a build error, not a production incident.</a:t>
+              <a:rPr sz="1300" b="1">
+                <a:solidFill>
+                  <a:srgbClr val="6B3DB5"/>
+                </a:solidFill>
+                <a:latin typeface="Calibri"/>
+              </a:rPr>
+              <a:t>Promote a skill to a subagent only when context isolation or tool scoping is the actual constraint. Otherwise you are paying for indirection you do not need.</a:t>
             </a:r>
           </a:p>
         </p:txBody>
@@ -10596,7 +13026,7 @@
                 </a:solidFill>
                 <a:latin typeface="Calibri"/>
               </a:rPr>
-              <a:t>Determinism vs. Probabilistic Retrieval</a:t>
+              <a:t>Decision Matrix — How to Choose</a:t>
             </a:r>
           </a:p>
         </p:txBody>
@@ -10631,7 +13061,7 @@
                 </a:solidFill>
                 <a:latin typeface="Calibri"/>
               </a:rPr>
-              <a:t>The honest ranking — and why "reach for RAG to fix probabilistic skills" is the wrong move.</a:t>
+              <a:t>A five-question gate. Default to script unless the higher-cost option earns its keep.</a:t>
             </a:r>
           </a:p>
         </p:txBody>
@@ -10723,8 +13153,8 @@
           <p:nvPr/>
         </p:nvGraphicFramePr>
         <p:xfrm>
-          <a:off x="502920" y="1463040"/>
-          <a:ext cx="11155680" cy="2743200"/>
+          <a:off x="502920" y="1417320"/>
+          <a:ext cx="11155680" cy="4297680"/>
         </p:xfrm>
         <a:graphic>
           <a:graphicData uri="http://schemas.openxmlformats.org/drawingml/2006/table">
@@ -10733,11 +13163,11 @@
                 <a:tableStyleId>{5C22544A-7EE6-4342-B048-85BDC9FD1C3A}</a:tableStyleId>
               </a:tblPr>
               <a:tblGrid>
-                <a:gridCol w="1828800"/>
-                <a:gridCol w="5120640"/>
-                <a:gridCol w="4206240"/>
+                <a:gridCol w="4754880"/>
+                <a:gridCol w="3383280"/>
+                <a:gridCol w="3017520"/>
               </a:tblGrid>
-              <a:tr h="685800">
+              <a:tr h="716280">
                 <a:tc>
                   <a:txBody>
                     <a:bodyPr lIns="60000" rIns="60000" tIns="40000" bIns="40000"/>
@@ -10745,13 +13175,13 @@
                     <a:p>
                       <a:pPr algn="l"/>
                       <a:r>
-                        <a:rPr sz="1300" b="1">
+                        <a:rPr sz="1200" b="1">
                           <a:solidFill>
                             <a:srgbClr val="FFFFFF"/>
                           </a:solidFill>
                           <a:latin typeface="Calibri"/>
                         </a:rPr>
-                        <a:t>Approach</a:t>
+                        <a:t>Question</a:t>
                       </a:r>
                     </a:p>
                   </a:txBody>
@@ -10768,19 +13198,19 @@
                     <a:p>
                       <a:pPr algn="l"/>
                       <a:r>
-                        <a:rPr sz="1300" b="1">
+                        <a:rPr sz="1200" b="1">
                           <a:solidFill>
                             <a:srgbClr val="FFFFFF"/>
                           </a:solidFill>
                           <a:latin typeface="Calibri"/>
                         </a:rPr>
-                        <a:t>Where probability enters</a:t>
+                        <a:t>If yes →</a:t>
                       </a:r>
                     </a:p>
                   </a:txBody>
                   <a:tcPr>
                     <a:solidFill>
-                      <a:srgbClr val="1F8055"/>
+                      <a:srgbClr val="1F2A44"/>
                     </a:solidFill>
                   </a:tcPr>
                 </a:tc>
@@ -10791,24 +13221,24 @@
                     <a:p>
                       <a:pPr algn="l"/>
                       <a:r>
-                        <a:rPr sz="1300" b="1">
+                        <a:rPr sz="1200" b="1">
                           <a:solidFill>
                             <a:srgbClr val="FFFFFF"/>
                           </a:solidFill>
                           <a:latin typeface="Calibri"/>
                         </a:rPr>
-                        <a:t>What is fixed once chosen</a:t>
+                        <a:t>If no →</a:t>
                       </a:r>
                     </a:p>
                   </a:txBody>
                   <a:tcPr>
                     <a:solidFill>
-                      <a:srgbClr val="C26E1A"/>
+                      <a:srgbClr val="1F2A44"/>
                     </a:solidFill>
                   </a:tcPr>
                 </a:tc>
               </a:tr>
-              <a:tr h="685800">
+              <a:tr h="716280">
                 <a:tc>
                   <a:txBody>
                     <a:bodyPr lIns="60000" rIns="60000" tIns="30000" bIns="30000" wrap="square"/>
@@ -10816,13 +13246,13 @@
                     <a:p>
                       <a:pPr algn="l"/>
                       <a:r>
-                        <a:rPr sz="1200">
+                        <a:rPr sz="1100">
                           <a:solidFill>
                             <a:srgbClr val="1F2A44"/>
                           </a:solidFill>
                           <a:latin typeface="Calibri"/>
                         </a:rPr>
-                        <a:t>Script</a:t>
+                        <a:t>1. Can the steps be enumerated as code with stable inputs and outputs?</a:t>
                       </a:r>
                     </a:p>
                   </a:txBody>
@@ -10839,13 +13269,13 @@
                     <a:p>
                       <a:pPr algn="l"/>
                       <a:r>
-                        <a:rPr sz="1200">
+                        <a:rPr sz="1100">
                           <a:solidFill>
                             <a:srgbClr val="1F2A44"/>
                           </a:solidFill>
                           <a:latin typeface="Calibri"/>
                         </a:rPr>
-                        <a:t>Nowhere — fully deterministic.</a:t>
+                        <a:t>Write a script. Stop here.</a:t>
                       </a:r>
                     </a:p>
                   </a:txBody>
@@ -10862,13 +13292,13 @@
                     <a:p>
                       <a:pPr algn="l"/>
                       <a:r>
-                        <a:rPr sz="1200">
+                        <a:rPr sz="1100">
                           <a:solidFill>
                             <a:srgbClr val="1F2A44"/>
                           </a:solidFill>
                           <a:latin typeface="Calibri"/>
                         </a:rPr>
-                        <a:t>Everything.</a:t>
+                        <a:t>Continue.</a:t>
                       </a:r>
                     </a:p>
                   </a:txBody>
@@ -10879,7 +13309,7 @@
                   </a:tcPr>
                 </a:tc>
               </a:tr>
-              <a:tr h="685800">
+              <a:tr h="716280">
                 <a:tc>
                   <a:txBody>
                     <a:bodyPr lIns="60000" rIns="60000" tIns="30000" bIns="30000" wrap="square"/>
@@ -10887,13 +13317,13 @@
                     <a:p>
                       <a:pPr algn="l"/>
                       <a:r>
-                        <a:rPr sz="1200">
+                        <a:rPr sz="1100">
                           <a:solidFill>
                             <a:srgbClr val="1F2A44"/>
                           </a:solidFill>
                           <a:latin typeface="Calibri"/>
                         </a:rPr>
-                        <a:t>Skill</a:t>
+                        <a:t>2. Does the task need composition or judgment that varies by situation?</a:t>
                       </a:r>
                     </a:p>
                   </a:txBody>
@@ -10910,13 +13340,13 @@
                     <a:p>
                       <a:pPr algn="l"/>
                       <a:r>
-                        <a:rPr sz="1200">
+                        <a:rPr sz="1100">
                           <a:solidFill>
                             <a:srgbClr val="1F2A44"/>
                           </a:solidFill>
                           <a:latin typeface="Calibri"/>
                         </a:rPr>
-                        <a:t>Selection: agent decides whether to invoke this skill on a given query.</a:t>
+                        <a:t>Continue — this is skill or subagent territory.</a:t>
                       </a:r>
                     </a:p>
                   </a:txBody>
@@ -10933,13 +13363,13 @@
                     <a:p>
                       <a:pPr algn="l"/>
                       <a:r>
-                        <a:rPr sz="1200">
+                        <a:rPr sz="1100">
                           <a:solidFill>
                             <a:srgbClr val="1F2A44"/>
                           </a:solidFill>
                           <a:latin typeface="Calibri"/>
                         </a:rPr>
-                        <a:t>Once invoked, the skill content is fixed in the system prompt.</a:t>
+                        <a:t>Reconsider — likely a script after all.</a:t>
                       </a:r>
                     </a:p>
                   </a:txBody>
@@ -10950,7 +13380,7 @@
                   </a:tcPr>
                 </a:tc>
               </a:tr>
-              <a:tr h="685800">
+              <a:tr h="716280">
                 <a:tc>
                   <a:txBody>
                     <a:bodyPr lIns="60000" rIns="60000" tIns="30000" bIns="30000" wrap="square"/>
@@ -10958,13 +13388,13 @@
                     <a:p>
                       <a:pPr algn="l"/>
                       <a:r>
-                        <a:rPr sz="1200">
+                        <a:rPr sz="1100">
                           <a:solidFill>
                             <a:srgbClr val="1F2A44"/>
                           </a:solidFill>
                           <a:latin typeface="Calibri"/>
                         </a:rPr>
-                        <a:t>RAG</a:t>
+                        <a:t>3. Does the work generate heavy intermediate tool output, OR need an enforced tool allowlist, OR run in parallel with other work?</a:t>
                       </a:r>
                     </a:p>
                   </a:txBody>
@@ -10981,13 +13411,13 @@
                     <a:p>
                       <a:pPr algn="l"/>
                       <a:r>
-                        <a:rPr sz="1200">
+                        <a:rPr sz="1100">
                           <a:solidFill>
                             <a:srgbClr val="1F2A44"/>
                           </a:solidFill>
                           <a:latin typeface="Calibri"/>
                         </a:rPr>
-                        <a:t>Two stages: query rewrite → retrieval ranking. Both can miss.</a:t>
+                        <a:t>Write a subagent. Define its tool allowlist tightly.</a:t>
                       </a:r>
                     </a:p>
                   </a:txBody>
@@ -11004,13 +13434,155 @@
                     <a:p>
                       <a:pPr algn="l"/>
                       <a:r>
-                        <a:rPr sz="1200">
+                        <a:rPr sz="1100">
                           <a:solidFill>
                             <a:srgbClr val="1F2A44"/>
                           </a:solidFill>
                           <a:latin typeface="Calibri"/>
                         </a:rPr>
-                        <a:t>Only the chunks actually retrieved make it into context — and they may be wrong.</a:t>
+                        <a:t>Continue — likely a skill.</a:t>
+                      </a:r>
+                    </a:p>
+                  </a:txBody>
+                  <a:tcPr>
+                    <a:solidFill>
+                      <a:srgbClr val="FFFFFF"/>
+                    </a:solidFill>
+                  </a:tcPr>
+                </a:tc>
+              </a:tr>
+              <a:tr h="716280">
+                <a:tc>
+                  <a:txBody>
+                    <a:bodyPr lIns="60000" rIns="60000" tIns="30000" bIns="30000" wrap="square"/>
+                    <a:lstStyle/>
+                    <a:p>
+                      <a:pPr algn="l"/>
+                      <a:r>
+                        <a:rPr sz="1100">
+                          <a:solidFill>
+                            <a:srgbClr val="1F2A44"/>
+                          </a:solidFill>
+                          <a:latin typeface="Calibri"/>
+                        </a:rPr>
+                        <a:t>4. Will the agent need this guidance in-thread on many tasks?</a:t>
+                      </a:r>
+                    </a:p>
+                  </a:txBody>
+                  <a:tcPr>
+                    <a:solidFill>
+                      <a:srgbClr val="F5F7FB"/>
+                    </a:solidFill>
+                  </a:tcPr>
+                </a:tc>
+                <a:tc>
+                  <a:txBody>
+                    <a:bodyPr lIns="60000" rIns="60000" tIns="30000" bIns="30000" wrap="square"/>
+                    <a:lstStyle/>
+                    <a:p>
+                      <a:pPr algn="l"/>
+                      <a:r>
+                        <a:rPr sz="1100">
+                          <a:solidFill>
+                            <a:srgbClr val="1F2A44"/>
+                          </a:solidFill>
+                          <a:latin typeface="Calibri"/>
+                        </a:rPr>
+                        <a:t>Write a skill. Link to source-of-truth files; add a drift test.</a:t>
+                      </a:r>
+                    </a:p>
+                  </a:txBody>
+                  <a:tcPr>
+                    <a:solidFill>
+                      <a:srgbClr val="F5F7FB"/>
+                    </a:solidFill>
+                  </a:tcPr>
+                </a:tc>
+                <a:tc>
+                  <a:txBody>
+                    <a:bodyPr lIns="60000" rIns="60000" tIns="30000" bIns="30000" wrap="square"/>
+                    <a:lstStyle/>
+                    <a:p>
+                      <a:pPr algn="l"/>
+                      <a:r>
+                        <a:rPr sz="1100">
+                          <a:solidFill>
+                            <a:srgbClr val="1F2A44"/>
+                          </a:solidFill>
+                          <a:latin typeface="Calibri"/>
+                        </a:rPr>
+                        <a:t>Reconsider — maybe inline the guidance.</a:t>
+                      </a:r>
+                    </a:p>
+                  </a:txBody>
+                  <a:tcPr>
+                    <a:solidFill>
+                      <a:srgbClr val="F5F7FB"/>
+                    </a:solidFill>
+                  </a:tcPr>
+                </a:tc>
+              </a:tr>
+              <a:tr h="716280">
+                <a:tc>
+                  <a:txBody>
+                    <a:bodyPr lIns="60000" rIns="60000" tIns="30000" bIns="30000" wrap="square"/>
+                    <a:lstStyle/>
+                    <a:p>
+                      <a:pPr algn="l"/>
+                      <a:r>
+                        <a:rPr sz="1100">
+                          <a:solidFill>
+                            <a:srgbClr val="1F2A44"/>
+                          </a:solidFill>
+                          <a:latin typeface="Calibri"/>
+                        </a:rPr>
+                        <a:t>5. Is the relevant corpus too large to fit in context or too volatile to encode?</a:t>
+                      </a:r>
+                    </a:p>
+                  </a:txBody>
+                  <a:tcPr>
+                    <a:solidFill>
+                      <a:srgbClr val="FFFFFF"/>
+                    </a:solidFill>
+                  </a:tcPr>
+                </a:tc>
+                <a:tc>
+                  <a:txBody>
+                    <a:bodyPr lIns="60000" rIns="60000" tIns="30000" bIns="30000" wrap="square"/>
+                    <a:lstStyle/>
+                    <a:p>
+                      <a:pPr algn="l"/>
+                      <a:r>
+                        <a:rPr sz="1100">
+                          <a:solidFill>
+                            <a:srgbClr val="1F2A44"/>
+                          </a:solidFill>
+                          <a:latin typeface="Calibri"/>
+                        </a:rPr>
+                        <a:t>Reach for RAG. Wire in freshness + retrieval evaluation.</a:t>
+                      </a:r>
+                    </a:p>
+                  </a:txBody>
+                  <a:tcPr>
+                    <a:solidFill>
+                      <a:srgbClr val="FFFFFF"/>
+                    </a:solidFill>
+                  </a:tcPr>
+                </a:tc>
+                <a:tc>
+                  <a:txBody>
+                    <a:bodyPr lIns="60000" rIns="60000" tIns="30000" bIns="30000" wrap="square"/>
+                    <a:lstStyle/>
+                    <a:p>
+                      <a:pPr algn="l"/>
+                      <a:r>
+                        <a:rPr sz="1100">
+                          <a:solidFill>
+                            <a:srgbClr val="1F2A44"/>
+                          </a:solidFill>
+                          <a:latin typeface="Calibri"/>
+                        </a:rPr>
+                        <a:t>Stop. Pick from the previous answers.</a:t>
                       </a:r>
                     </a:p>
                   </a:txBody>
@@ -11027,14 +13599,59 @@
       </p:graphicFrame>
       <p:sp>
         <p:nvSpPr>
-          <p:cNvPr id="8" name="TextBox 7"/>
+          <p:cNvPr id="8" name="Rounded Rectangle 7"/>
+          <p:cNvSpPr/>
+          <p:nvPr/>
+        </p:nvSpPr>
+        <p:spPr>
+          <a:xfrm>
+            <a:off x="502920" y="5852160"/>
+            <a:ext cx="11155680" cy="640080"/>
+          </a:xfrm>
+          <a:prstGeom prst="roundRect">
+            <a:avLst/>
+          </a:prstGeom>
+          <a:solidFill>
+            <a:srgbClr val="ECF3FF"/>
+          </a:solidFill>
+          <a:ln w="12700">
+            <a:solidFill>
+              <a:srgbClr val="1B55E0"/>
+            </a:solidFill>
+          </a:ln>
+        </p:spPr>
+        <p:style>
+          <a:lnRef idx="1">
+            <a:schemeClr val="accent1"/>
+          </a:lnRef>
+          <a:fillRef idx="3">
+            <a:schemeClr val="accent1"/>
+          </a:fillRef>
+          <a:effectRef idx="2">
+            <a:schemeClr val="accent1"/>
+          </a:effectRef>
+          <a:fontRef idx="minor">
+            <a:schemeClr val="lt1"/>
+          </a:fontRef>
+        </p:style>
+        <p:txBody>
+          <a:bodyPr rtlCol="0" anchor="ctr"/>
+          <a:lstStyle/>
+          <a:p>
+            <a:pPr algn="ctr"/>
+          </a:p>
+        </p:txBody>
+      </p:sp>
+      <p:sp>
+        <p:nvSpPr>
+          <p:cNvPr id="9" name="TextBox 8"/>
           <p:cNvSpPr txBox="1"/>
           <p:nvPr/>
         </p:nvSpPr>
         <p:spPr>
           <a:xfrm>
-            <a:off x="502920" y="4572000"/>
-            <a:ext cx="11155680" cy="365760"/>
+            <a:off x="777240" y="5943600"/>
+            <a:ext cx="10607040" cy="457200"/>
           </a:xfrm>
           <a:prstGeom prst="rect">
             <a:avLst/>
@@ -11049,84 +13666,13 @@
           <a:p>
             <a:pPr algn="l"/>
             <a:r>
-              <a:rPr sz="1600" b="1">
+              <a:rPr sz="1400" b="1">
                 <a:solidFill>
                   <a:srgbClr val="1440A8"/>
                 </a:solidFill>
                 <a:latin typeface="Calibri"/>
               </a:rPr>
-              <a:t>The counter-intuitive takeaway</a:t>
-            </a:r>
-          </a:p>
-        </p:txBody>
-      </p:sp>
-      <p:sp>
-        <p:nvSpPr>
-          <p:cNvPr id="9" name="TextBox 8"/>
-          <p:cNvSpPr txBox="1"/>
-          <p:nvPr/>
-        </p:nvSpPr>
-        <p:spPr>
-          <a:xfrm>
-            <a:off x="640080" y="4937760"/>
-            <a:ext cx="10972800" cy="1371600"/>
-          </a:xfrm>
-          <a:prstGeom prst="rect">
-            <a:avLst/>
-          </a:prstGeom>
-          <a:noFill/>
-        </p:spPr>
-        <p:txBody>
-          <a:bodyPr wrap="square" lIns="0" rIns="0" tIns="0" bIns="0">
-            <a:spAutoFit/>
-          </a:bodyPr>
-          <a:lstStyle/>
-          <a:p>
-            <a:pPr algn="l">
-              <a:spcAft>
-                <a:spcPts val="500"/>
-              </a:spcAft>
-            </a:pPr>
-            <a:r>
-              <a:rPr sz="1300">
-                <a:solidFill>
-                  <a:srgbClr val="1F2A44"/>
-                </a:solidFill>
-                <a:latin typeface="Calibri"/>
-              </a:rPr>
-              <a:t>•  RAG is more probabilistic than skills, not less. Two ranking decisions stack on top of each other.</a:t>
-            </a:r>
-          </a:p>
-          <a:p>
-            <a:pPr algn="l">
-              <a:spcAft>
-                <a:spcPts val="500"/>
-              </a:spcAft>
-            </a:pPr>
-            <a:r>
-              <a:rPr sz="1300">
-                <a:solidFill>
-                  <a:srgbClr val="1F2A44"/>
-                </a:solidFill>
-                <a:latin typeface="Calibri"/>
-              </a:rPr>
-              <a:t>•  Skills sit in a fixed slot once invoked — RAG chunks are sampled per-query.</a:t>
-            </a:r>
-          </a:p>
-          <a:p>
-            <a:pPr algn="l">
-              <a:spcAft>
-                <a:spcPts val="500"/>
-              </a:spcAft>
-            </a:pPr>
-            <a:r>
-              <a:rPr sz="1300">
-                <a:solidFill>
-                  <a:srgbClr val="1F2A44"/>
-                </a:solidFill>
-                <a:latin typeface="Calibri"/>
-              </a:rPr>
-              <a:t>•  If your concern is "agent picks the wrong knowledge," RAG is not the fix; tighter scoping + fewer skills is.</a:t>
+              <a:t>Default rule: if you can write a script, write the script. The other three earn their keep — they do not get it for free.</a:t>
             </a:r>
           </a:p>
         </p:txBody>
